--- a/DataAnalysis_ElectricVehicles.pptx
+++ b/DataAnalysis_ElectricVehicles.pptx
@@ -822,7 +822,7 @@
   <p:cSld>
     <p:spTree>
       <p:nvGrpSpPr>
-        <p:cNvPr id="117" name="Shape 117"/>
+        <p:cNvPr id="118" name="Shape 118"/>
         <p:cNvGrpSpPr/>
         <p:nvPr/>
       </p:nvGrpSpPr>
@@ -836,7 +836,7 @@
       </p:grpSpPr>
       <p:sp>
         <p:nvSpPr>
-          <p:cNvPr id="118" name="Google Shape;118;g35da4827f45_0_81:notes"/>
+          <p:cNvPr id="119" name="Google Shape;119;g35da4827f45_0_81:notes"/>
           <p:cNvSpPr/>
           <p:nvPr>
             <p:ph idx="2" type="sldImg"/>
@@ -871,7 +871,7 @@
       </p:sp>
       <p:sp>
         <p:nvSpPr>
-          <p:cNvPr id="119" name="Google Shape;119;g35da4827f45_0_81:notes"/>
+          <p:cNvPr id="120" name="Google Shape;120;g35da4827f45_0_81:notes"/>
           <p:cNvSpPr txBox="1"/>
           <p:nvPr>
             <p:ph idx="1" type="body"/>
@@ -921,7 +921,7 @@
   <p:cSld>
     <p:spTree>
       <p:nvGrpSpPr>
-        <p:cNvPr id="125" name="Shape 125"/>
+        <p:cNvPr id="126" name="Shape 126"/>
         <p:cNvGrpSpPr/>
         <p:nvPr/>
       </p:nvGrpSpPr>
@@ -935,7 +935,7 @@
       </p:grpSpPr>
       <p:sp>
         <p:nvSpPr>
-          <p:cNvPr id="126" name="Google Shape;126;g35da4827f45_0_76:notes"/>
+          <p:cNvPr id="127" name="Google Shape;127;g35da4827f45_0_76:notes"/>
           <p:cNvSpPr/>
           <p:nvPr>
             <p:ph idx="2" type="sldImg"/>
@@ -970,7 +970,7 @@
       </p:sp>
       <p:sp>
         <p:nvSpPr>
-          <p:cNvPr id="127" name="Google Shape;127;g35da4827f45_0_76:notes"/>
+          <p:cNvPr id="128" name="Google Shape;128;g35da4827f45_0_76:notes"/>
           <p:cNvSpPr txBox="1"/>
           <p:nvPr>
             <p:ph idx="1" type="body"/>
@@ -1020,7 +1020,7 @@
   <p:cSld>
     <p:spTree>
       <p:nvGrpSpPr>
-        <p:cNvPr id="132" name="Shape 132"/>
+        <p:cNvPr id="133" name="Shape 133"/>
         <p:cNvGrpSpPr/>
         <p:nvPr/>
       </p:nvGrpSpPr>
@@ -1034,7 +1034,7 @@
       </p:grpSpPr>
       <p:sp>
         <p:nvSpPr>
-          <p:cNvPr id="133" name="Google Shape;133;g35da4827f45_0_86:notes"/>
+          <p:cNvPr id="134" name="Google Shape;134;g35da4827f45_0_86:notes"/>
           <p:cNvSpPr/>
           <p:nvPr>
             <p:ph idx="2" type="sldImg"/>
@@ -1069,7 +1069,7 @@
       </p:sp>
       <p:sp>
         <p:nvSpPr>
-          <p:cNvPr id="134" name="Google Shape;134;g35da4827f45_0_86:notes"/>
+          <p:cNvPr id="135" name="Google Shape;135;g35da4827f45_0_86:notes"/>
           <p:cNvSpPr txBox="1"/>
           <p:nvPr>
             <p:ph idx="1" type="body"/>
@@ -1119,7 +1119,7 @@
   <p:cSld>
     <p:spTree>
       <p:nvGrpSpPr>
-        <p:cNvPr id="139" name="Shape 139"/>
+        <p:cNvPr id="140" name="Shape 140"/>
         <p:cNvGrpSpPr/>
         <p:nvPr/>
       </p:nvGrpSpPr>
@@ -1133,7 +1133,7 @@
       </p:grpSpPr>
       <p:sp>
         <p:nvSpPr>
-          <p:cNvPr id="140" name="Google Shape;140;g35da4827f45_0_180:notes"/>
+          <p:cNvPr id="141" name="Google Shape;141;g35da4827f45_0_180:notes"/>
           <p:cNvSpPr/>
           <p:nvPr>
             <p:ph idx="2" type="sldImg"/>
@@ -1168,7 +1168,7 @@
       </p:sp>
       <p:sp>
         <p:nvSpPr>
-          <p:cNvPr id="141" name="Google Shape;141;g35da4827f45_0_180:notes"/>
+          <p:cNvPr id="142" name="Google Shape;142;g35da4827f45_0_180:notes"/>
           <p:cNvSpPr txBox="1"/>
           <p:nvPr>
             <p:ph idx="1" type="body"/>
@@ -1218,7 +1218,7 @@
   <p:cSld>
     <p:spTree>
       <p:nvGrpSpPr>
-        <p:cNvPr id="147" name="Shape 147"/>
+        <p:cNvPr id="148" name="Shape 148"/>
         <p:cNvGrpSpPr/>
         <p:nvPr/>
       </p:nvGrpSpPr>
@@ -1232,7 +1232,7 @@
       </p:grpSpPr>
       <p:sp>
         <p:nvSpPr>
-          <p:cNvPr id="148" name="Google Shape;148;g35da4827f45_0_116:notes"/>
+          <p:cNvPr id="149" name="Google Shape;149;g35da4827f45_0_116:notes"/>
           <p:cNvSpPr/>
           <p:nvPr>
             <p:ph idx="2" type="sldImg"/>
@@ -1267,7 +1267,7 @@
       </p:sp>
       <p:sp>
         <p:nvSpPr>
-          <p:cNvPr id="149" name="Google Shape;149;g35da4827f45_0_116:notes"/>
+          <p:cNvPr id="150" name="Google Shape;150;g35da4827f45_0_116:notes"/>
           <p:cNvSpPr txBox="1"/>
           <p:nvPr>
             <p:ph idx="1" type="body"/>
@@ -1317,7 +1317,7 @@
   <p:cSld>
     <p:spTree>
       <p:nvGrpSpPr>
-        <p:cNvPr id="154" name="Shape 154"/>
+        <p:cNvPr id="155" name="Shape 155"/>
         <p:cNvGrpSpPr/>
         <p:nvPr/>
       </p:nvGrpSpPr>
@@ -1331,7 +1331,7 @@
       </p:grpSpPr>
       <p:sp>
         <p:nvSpPr>
-          <p:cNvPr id="155" name="Google Shape;155;g35da4827f45_0_124:notes"/>
+          <p:cNvPr id="156" name="Google Shape;156;g35da4827f45_0_124:notes"/>
           <p:cNvSpPr/>
           <p:nvPr>
             <p:ph idx="2" type="sldImg"/>
@@ -1366,7 +1366,7 @@
       </p:sp>
       <p:sp>
         <p:nvSpPr>
-          <p:cNvPr id="156" name="Google Shape;156;g35da4827f45_0_124:notes"/>
+          <p:cNvPr id="157" name="Google Shape;157;g35da4827f45_0_124:notes"/>
           <p:cNvSpPr txBox="1"/>
           <p:nvPr>
             <p:ph idx="1" type="body"/>
@@ -1416,7 +1416,7 @@
   <p:cSld>
     <p:spTree>
       <p:nvGrpSpPr>
-        <p:cNvPr id="161" name="Shape 161"/>
+        <p:cNvPr id="162" name="Shape 162"/>
         <p:cNvGrpSpPr/>
         <p:nvPr/>
       </p:nvGrpSpPr>
@@ -1430,7 +1430,7 @@
       </p:grpSpPr>
       <p:sp>
         <p:nvSpPr>
-          <p:cNvPr id="162" name="Google Shape;162;g35da4827f45_0_104:notes"/>
+          <p:cNvPr id="163" name="Google Shape;163;g35da4827f45_0_104:notes"/>
           <p:cNvSpPr/>
           <p:nvPr>
             <p:ph idx="2" type="sldImg"/>
@@ -1465,7 +1465,7 @@
       </p:sp>
       <p:sp>
         <p:nvSpPr>
-          <p:cNvPr id="163" name="Google Shape;163;g35da4827f45_0_104:notes"/>
+          <p:cNvPr id="164" name="Google Shape;164;g35da4827f45_0_104:notes"/>
           <p:cNvSpPr txBox="1"/>
           <p:nvPr>
             <p:ph idx="1" type="body"/>
@@ -1515,7 +1515,7 @@
   <p:cSld>
     <p:spTree>
       <p:nvGrpSpPr>
-        <p:cNvPr id="170" name="Shape 170"/>
+        <p:cNvPr id="171" name="Shape 171"/>
         <p:cNvGrpSpPr/>
         <p:nvPr/>
       </p:nvGrpSpPr>
@@ -1529,7 +1529,7 @@
       </p:grpSpPr>
       <p:sp>
         <p:nvSpPr>
-          <p:cNvPr id="171" name="Google Shape;171;g35da4827f45_0_131:notes"/>
+          <p:cNvPr id="172" name="Google Shape;172;g35da4827f45_0_131:notes"/>
           <p:cNvSpPr/>
           <p:nvPr>
             <p:ph idx="2" type="sldImg"/>
@@ -1564,7 +1564,7 @@
       </p:sp>
       <p:sp>
         <p:nvSpPr>
-          <p:cNvPr id="172" name="Google Shape;172;g35da4827f45_0_131:notes"/>
+          <p:cNvPr id="173" name="Google Shape;173;g35da4827f45_0_131:notes"/>
           <p:cNvSpPr txBox="1"/>
           <p:nvPr>
             <p:ph idx="1" type="body"/>
@@ -1614,7 +1614,7 @@
   <p:cSld>
     <p:spTree>
       <p:nvGrpSpPr>
-        <p:cNvPr id="177" name="Shape 177"/>
+        <p:cNvPr id="183" name="Shape 183"/>
         <p:cNvGrpSpPr/>
         <p:nvPr/>
       </p:nvGrpSpPr>
@@ -1628,7 +1628,7 @@
       </p:grpSpPr>
       <p:sp>
         <p:nvSpPr>
-          <p:cNvPr id="178" name="Google Shape;178;g35da4827f45_0_137:notes"/>
+          <p:cNvPr id="184" name="Google Shape;184;g35da4827f45_0_137:notes"/>
           <p:cNvSpPr/>
           <p:nvPr>
             <p:ph idx="2" type="sldImg"/>
@@ -1663,7 +1663,7 @@
       </p:sp>
       <p:sp>
         <p:nvSpPr>
-          <p:cNvPr id="179" name="Google Shape;179;g35da4827f45_0_137:notes"/>
+          <p:cNvPr id="185" name="Google Shape;185;g35da4827f45_0_137:notes"/>
           <p:cNvSpPr txBox="1"/>
           <p:nvPr>
             <p:ph idx="1" type="body"/>
@@ -1713,7 +1713,7 @@
   <p:cSld>
     <p:spTree>
       <p:nvGrpSpPr>
-        <p:cNvPr id="184" name="Shape 184"/>
+        <p:cNvPr id="191" name="Shape 191"/>
         <p:cNvGrpSpPr/>
         <p:nvPr/>
       </p:nvGrpSpPr>
@@ -1727,7 +1727,7 @@
       </p:grpSpPr>
       <p:sp>
         <p:nvSpPr>
-          <p:cNvPr id="185" name="Google Shape;185;g35da4827f45_0_162:notes"/>
+          <p:cNvPr id="192" name="Google Shape;192;g35da4827f45_0_162:notes"/>
           <p:cNvSpPr/>
           <p:nvPr>
             <p:ph idx="2" type="sldImg"/>
@@ -1762,7 +1762,7 @@
       </p:sp>
       <p:sp>
         <p:nvSpPr>
-          <p:cNvPr id="186" name="Google Shape;186;g35da4827f45_0_162:notes"/>
+          <p:cNvPr id="193" name="Google Shape;193;g35da4827f45_0_162:notes"/>
           <p:cNvSpPr txBox="1"/>
           <p:nvPr>
             <p:ph idx="1" type="body"/>
@@ -1812,7 +1812,7 @@
   <p:cSld>
     <p:spTree>
       <p:nvGrpSpPr>
-        <p:cNvPr id="58" name="Shape 58"/>
+        <p:cNvPr id="59" name="Shape 59"/>
         <p:cNvGrpSpPr/>
         <p:nvPr/>
       </p:nvGrpSpPr>
@@ -1826,7 +1826,7 @@
       </p:grpSpPr>
       <p:sp>
         <p:nvSpPr>
-          <p:cNvPr id="59" name="Google Shape;59;g35da4827f45_0_145:notes"/>
+          <p:cNvPr id="60" name="Google Shape;60;g35da4827f45_0_145:notes"/>
           <p:cNvSpPr/>
           <p:nvPr>
             <p:ph idx="2" type="sldImg"/>
@@ -1861,7 +1861,7 @@
       </p:sp>
       <p:sp>
         <p:nvSpPr>
-          <p:cNvPr id="60" name="Google Shape;60;g35da4827f45_0_145:notes"/>
+          <p:cNvPr id="61" name="Google Shape;61;g35da4827f45_0_145:notes"/>
           <p:cNvSpPr txBox="1"/>
           <p:nvPr>
             <p:ph idx="1" type="body"/>
@@ -1911,7 +1911,7 @@
   <p:cSld>
     <p:spTree>
       <p:nvGrpSpPr>
-        <p:cNvPr id="191" name="Shape 191"/>
+        <p:cNvPr id="198" name="Shape 198"/>
         <p:cNvGrpSpPr/>
         <p:nvPr/>
       </p:nvGrpSpPr>
@@ -1925,7 +1925,7 @@
       </p:grpSpPr>
       <p:sp>
         <p:nvSpPr>
-          <p:cNvPr id="192" name="Google Shape;192;g35da4827f45_0_167:notes"/>
+          <p:cNvPr id="199" name="Google Shape;199;g35da4827f45_0_167:notes"/>
           <p:cNvSpPr/>
           <p:nvPr>
             <p:ph idx="2" type="sldImg"/>
@@ -1960,7 +1960,7 @@
       </p:sp>
       <p:sp>
         <p:nvSpPr>
-          <p:cNvPr id="193" name="Google Shape;193;g35da4827f45_0_167:notes"/>
+          <p:cNvPr id="200" name="Google Shape;200;g35da4827f45_0_167:notes"/>
           <p:cNvSpPr txBox="1"/>
           <p:nvPr>
             <p:ph idx="1" type="body"/>
@@ -2010,7 +2010,7 @@
   <p:cSld>
     <p:spTree>
       <p:nvGrpSpPr>
-        <p:cNvPr id="198" name="Shape 198"/>
+        <p:cNvPr id="205" name="Shape 205"/>
         <p:cNvGrpSpPr/>
         <p:nvPr/>
       </p:nvGrpSpPr>
@@ -2024,7 +2024,7 @@
       </p:grpSpPr>
       <p:sp>
         <p:nvSpPr>
-          <p:cNvPr id="199" name="Google Shape;199;g35da4827f45_0_91:notes"/>
+          <p:cNvPr id="206" name="Google Shape;206;g35da4827f45_0_91:notes"/>
           <p:cNvSpPr/>
           <p:nvPr>
             <p:ph idx="2" type="sldImg"/>
@@ -2059,7 +2059,7 @@
       </p:sp>
       <p:sp>
         <p:nvSpPr>
-          <p:cNvPr id="200" name="Google Shape;200;g35da4827f45_0_91:notes"/>
+          <p:cNvPr id="207" name="Google Shape;207;g35da4827f45_0_91:notes"/>
           <p:cNvSpPr txBox="1"/>
           <p:nvPr>
             <p:ph idx="1" type="body"/>
@@ -2109,7 +2109,7 @@
   <p:cSld>
     <p:spTree>
       <p:nvGrpSpPr>
-        <p:cNvPr id="205" name="Shape 205"/>
+        <p:cNvPr id="212" name="Shape 212"/>
         <p:cNvGrpSpPr/>
         <p:nvPr/>
       </p:nvGrpSpPr>
@@ -2123,7 +2123,7 @@
       </p:grpSpPr>
       <p:sp>
         <p:nvSpPr>
-          <p:cNvPr id="206" name="Google Shape;206;g35da4827f45_2_11:notes"/>
+          <p:cNvPr id="213" name="Google Shape;213;g35da4827f45_2_11:notes"/>
           <p:cNvSpPr/>
           <p:nvPr>
             <p:ph idx="2" type="sldImg"/>
@@ -2158,7 +2158,7 @@
       </p:sp>
       <p:sp>
         <p:nvSpPr>
-          <p:cNvPr id="207" name="Google Shape;207;g35da4827f45_2_11:notes"/>
+          <p:cNvPr id="214" name="Google Shape;214;g35da4827f45_2_11:notes"/>
           <p:cNvSpPr txBox="1"/>
           <p:nvPr>
             <p:ph idx="1" type="body"/>
@@ -2208,7 +2208,7 @@
   <p:cSld>
     <p:spTree>
       <p:nvGrpSpPr>
-        <p:cNvPr id="212" name="Shape 212"/>
+        <p:cNvPr id="219" name="Shape 219"/>
         <p:cNvGrpSpPr/>
         <p:nvPr/>
       </p:nvGrpSpPr>
@@ -2222,7 +2222,7 @@
       </p:grpSpPr>
       <p:sp>
         <p:nvSpPr>
-          <p:cNvPr id="213" name="Google Shape;213;g35da4827f45_2_17:notes"/>
+          <p:cNvPr id="220" name="Google Shape;220;g35da4827f45_2_17:notes"/>
           <p:cNvSpPr/>
           <p:nvPr>
             <p:ph idx="2" type="sldImg"/>
@@ -2257,7 +2257,7 @@
       </p:sp>
       <p:sp>
         <p:nvSpPr>
-          <p:cNvPr id="214" name="Google Shape;214;g35da4827f45_2_17:notes"/>
+          <p:cNvPr id="221" name="Google Shape;221;g35da4827f45_2_17:notes"/>
           <p:cNvSpPr txBox="1"/>
           <p:nvPr>
             <p:ph idx="1" type="body"/>
@@ -2307,7 +2307,7 @@
   <p:cSld>
     <p:spTree>
       <p:nvGrpSpPr>
-        <p:cNvPr id="219" name="Shape 219"/>
+        <p:cNvPr id="226" name="Shape 226"/>
         <p:cNvGrpSpPr/>
         <p:nvPr/>
       </p:nvGrpSpPr>
@@ -2321,7 +2321,7 @@
       </p:grpSpPr>
       <p:sp>
         <p:nvSpPr>
-          <p:cNvPr id="220" name="Google Shape;220;g35da4827f45_0_157:notes"/>
+          <p:cNvPr id="227" name="Google Shape;227;g35da4827f45_0_157:notes"/>
           <p:cNvSpPr/>
           <p:nvPr>
             <p:ph idx="2" type="sldImg"/>
@@ -2356,7 +2356,7 @@
       </p:sp>
       <p:sp>
         <p:nvSpPr>
-          <p:cNvPr id="221" name="Google Shape;221;g35da4827f45_0_157:notes"/>
+          <p:cNvPr id="228" name="Google Shape;228;g35da4827f45_0_157:notes"/>
           <p:cNvSpPr txBox="1"/>
           <p:nvPr>
             <p:ph idx="1" type="body"/>
@@ -2406,7 +2406,7 @@
   <p:cSld>
     <p:spTree>
       <p:nvGrpSpPr>
-        <p:cNvPr id="67" name="Shape 67"/>
+        <p:cNvPr id="68" name="Shape 68"/>
         <p:cNvGrpSpPr/>
         <p:nvPr/>
       </p:nvGrpSpPr>
@@ -2420,7 +2420,7 @@
       </p:grpSpPr>
       <p:sp>
         <p:nvSpPr>
-          <p:cNvPr id="68" name="Google Shape;68;g35da4827f45_0_1:notes"/>
+          <p:cNvPr id="69" name="Google Shape;69;g35da4827f45_0_1:notes"/>
           <p:cNvSpPr/>
           <p:nvPr>
             <p:ph idx="2" type="sldImg"/>
@@ -2455,7 +2455,7 @@
       </p:sp>
       <p:sp>
         <p:nvSpPr>
-          <p:cNvPr id="69" name="Google Shape;69;g35da4827f45_0_1:notes"/>
+          <p:cNvPr id="70" name="Google Shape;70;g35da4827f45_0_1:notes"/>
           <p:cNvSpPr txBox="1"/>
           <p:nvPr>
             <p:ph idx="1" type="body"/>
@@ -2505,7 +2505,7 @@
   <p:cSld>
     <p:spTree>
       <p:nvGrpSpPr>
-        <p:cNvPr id="74" name="Shape 74"/>
+        <p:cNvPr id="75" name="Shape 75"/>
         <p:cNvGrpSpPr/>
         <p:nvPr/>
       </p:nvGrpSpPr>
@@ -2519,7 +2519,7 @@
       </p:grpSpPr>
       <p:sp>
         <p:nvSpPr>
-          <p:cNvPr id="75" name="Google Shape;75;g35da4827f45_0_9:notes"/>
+          <p:cNvPr id="76" name="Google Shape;76;g35da4827f45_0_9:notes"/>
           <p:cNvSpPr/>
           <p:nvPr>
             <p:ph idx="2" type="sldImg"/>
@@ -2554,7 +2554,7 @@
       </p:sp>
       <p:sp>
         <p:nvSpPr>
-          <p:cNvPr id="76" name="Google Shape;76;g35da4827f45_0_9:notes"/>
+          <p:cNvPr id="77" name="Google Shape;77;g35da4827f45_0_9:notes"/>
           <p:cNvSpPr txBox="1"/>
           <p:nvPr>
             <p:ph idx="1" type="body"/>
@@ -2604,7 +2604,7 @@
   <p:cSld>
     <p:spTree>
       <p:nvGrpSpPr>
-        <p:cNvPr id="80" name="Shape 80"/>
+        <p:cNvPr id="81" name="Shape 81"/>
         <p:cNvGrpSpPr/>
         <p:nvPr/>
       </p:nvGrpSpPr>
@@ -2618,7 +2618,7 @@
       </p:grpSpPr>
       <p:sp>
         <p:nvSpPr>
-          <p:cNvPr id="81" name="Google Shape;81;g35da4827f45_0_40:notes"/>
+          <p:cNvPr id="82" name="Google Shape;82;g35da4827f45_0_40:notes"/>
           <p:cNvSpPr/>
           <p:nvPr>
             <p:ph idx="2" type="sldImg"/>
@@ -2653,7 +2653,7 @@
       </p:sp>
       <p:sp>
         <p:nvSpPr>
-          <p:cNvPr id="82" name="Google Shape;82;g35da4827f45_0_40:notes"/>
+          <p:cNvPr id="83" name="Google Shape;83;g35da4827f45_0_40:notes"/>
           <p:cNvSpPr txBox="1"/>
           <p:nvPr>
             <p:ph idx="1" type="body"/>
@@ -2703,7 +2703,7 @@
   <p:cSld>
     <p:spTree>
       <p:nvGrpSpPr>
-        <p:cNvPr id="86" name="Shape 86"/>
+        <p:cNvPr id="87" name="Shape 87"/>
         <p:cNvGrpSpPr/>
         <p:nvPr/>
       </p:nvGrpSpPr>
@@ -2717,7 +2717,7 @@
       </p:grpSpPr>
       <p:sp>
         <p:nvSpPr>
-          <p:cNvPr id="87" name="Google Shape;87;g35da4827f45_0_61:notes"/>
+          <p:cNvPr id="88" name="Google Shape;88;g35da4827f45_0_61:notes"/>
           <p:cNvSpPr/>
           <p:nvPr>
             <p:ph idx="2" type="sldImg"/>
@@ -2752,7 +2752,7 @@
       </p:sp>
       <p:sp>
         <p:nvSpPr>
-          <p:cNvPr id="88" name="Google Shape;88;g35da4827f45_0_61:notes"/>
+          <p:cNvPr id="89" name="Google Shape;89;g35da4827f45_0_61:notes"/>
           <p:cNvSpPr txBox="1"/>
           <p:nvPr>
             <p:ph idx="1" type="body"/>
@@ -2802,7 +2802,7 @@
   <p:cSld>
     <p:spTree>
       <p:nvGrpSpPr>
-        <p:cNvPr id="93" name="Shape 93"/>
+        <p:cNvPr id="94" name="Shape 94"/>
         <p:cNvGrpSpPr/>
         <p:nvPr/>
       </p:nvGrpSpPr>
@@ -2816,7 +2816,7 @@
       </p:grpSpPr>
       <p:sp>
         <p:nvSpPr>
-          <p:cNvPr id="94" name="Google Shape;94;g35da4827f45_0_14:notes"/>
+          <p:cNvPr id="95" name="Google Shape;95;g35da4827f45_0_14:notes"/>
           <p:cNvSpPr/>
           <p:nvPr>
             <p:ph idx="2" type="sldImg"/>
@@ -2851,7 +2851,7 @@
       </p:sp>
       <p:sp>
         <p:nvSpPr>
-          <p:cNvPr id="95" name="Google Shape;95;g35da4827f45_0_14:notes"/>
+          <p:cNvPr id="96" name="Google Shape;96;g35da4827f45_0_14:notes"/>
           <p:cNvSpPr txBox="1"/>
           <p:nvPr>
             <p:ph idx="1" type="body"/>
@@ -2901,7 +2901,7 @@
   <p:cSld>
     <p:spTree>
       <p:nvGrpSpPr>
-        <p:cNvPr id="101" name="Shape 101"/>
+        <p:cNvPr id="102" name="Shape 102"/>
         <p:cNvGrpSpPr/>
         <p:nvPr/>
       </p:nvGrpSpPr>
@@ -2915,7 +2915,7 @@
       </p:grpSpPr>
       <p:sp>
         <p:nvSpPr>
-          <p:cNvPr id="102" name="Google Shape;102;g35da4827f45_2_3:notes"/>
+          <p:cNvPr id="103" name="Google Shape;103;g35da4827f45_2_3:notes"/>
           <p:cNvSpPr/>
           <p:nvPr>
             <p:ph idx="2" type="sldImg"/>
@@ -2950,7 +2950,7 @@
       </p:sp>
       <p:sp>
         <p:nvSpPr>
-          <p:cNvPr id="103" name="Google Shape;103;g35da4827f45_2_3:notes"/>
+          <p:cNvPr id="104" name="Google Shape;104;g35da4827f45_2_3:notes"/>
           <p:cNvSpPr txBox="1"/>
           <p:nvPr>
             <p:ph idx="1" type="body"/>
@@ -3000,7 +3000,7 @@
   <p:cSld>
     <p:spTree>
       <p:nvGrpSpPr>
-        <p:cNvPr id="108" name="Shape 108"/>
+        <p:cNvPr id="109" name="Shape 109"/>
         <p:cNvGrpSpPr/>
         <p:nvPr/>
       </p:nvGrpSpPr>
@@ -3014,7 +3014,7 @@
       </p:grpSpPr>
       <p:sp>
         <p:nvSpPr>
-          <p:cNvPr id="109" name="Google Shape;109;g35da4827f45_0_67:notes"/>
+          <p:cNvPr id="110" name="Google Shape;110;g35da4827f45_0_67:notes"/>
           <p:cNvSpPr/>
           <p:nvPr>
             <p:ph idx="2" type="sldImg"/>
@@ -3049,7 +3049,7 @@
       </p:sp>
       <p:sp>
         <p:nvSpPr>
-          <p:cNvPr id="110" name="Google Shape;110;g35da4827f45_0_67:notes"/>
+          <p:cNvPr id="111" name="Google Shape;111;g35da4827f45_0_67:notes"/>
           <p:cNvSpPr txBox="1"/>
           <p:nvPr>
             <p:ph idx="1" type="body"/>
@@ -7929,7 +7929,7 @@
         </p:nvSpPr>
         <p:spPr>
           <a:xfrm>
-            <a:off x="4101000" y="4171800"/>
+            <a:off x="4101000" y="3988300"/>
             <a:ext cx="942000" cy="323400"/>
           </a:xfrm>
           <a:prstGeom prst="rect">
@@ -7963,6 +7963,57 @@
                 <a:hlinkClick r:id="rId4"/>
               </a:rPr>
               <a:t>GitHub</a:t>
+            </a:r>
+            <a:endParaRPr sz="1800">
+              <a:solidFill>
+                <a:schemeClr val="dk2"/>
+              </a:solidFill>
+            </a:endParaRPr>
+          </a:p>
+        </p:txBody>
+      </p:sp>
+      <p:sp>
+        <p:nvSpPr>
+          <p:cNvPr id="58" name="Google Shape;58;p13"/>
+          <p:cNvSpPr txBox="1"/>
+          <p:nvPr/>
+        </p:nvSpPr>
+        <p:spPr>
+          <a:xfrm>
+            <a:off x="3931050" y="4376650"/>
+            <a:ext cx="1281900" cy="323400"/>
+          </a:xfrm>
+          <a:prstGeom prst="rect">
+            <a:avLst/>
+          </a:prstGeom>
+          <a:noFill/>
+          <a:ln>
+            <a:noFill/>
+          </a:ln>
+        </p:spPr>
+        <p:txBody>
+          <a:bodyPr anchorCtr="0" anchor="t" bIns="91425" lIns="91425" spcFirstLastPara="1" rIns="91425" wrap="square" tIns="91425">
+            <a:noAutofit/>
+          </a:bodyPr>
+          <a:lstStyle/>
+          <a:p>
+            <a:pPr indent="0" lvl="0" marL="0" rtl="0" algn="l">
+              <a:spcBef>
+                <a:spcPts val="0"/>
+              </a:spcBef>
+              <a:spcAft>
+                <a:spcPts val="0"/>
+              </a:spcAft>
+              <a:buNone/>
+            </a:pPr>
+            <a:r>
+              <a:rPr lang="iw" sz="1800" u="sng">
+                <a:solidFill>
+                  <a:schemeClr val="hlink"/>
+                </a:solidFill>
+                <a:hlinkClick r:id="rId5"/>
+              </a:rPr>
+              <a:t>Notebook</a:t>
             </a:r>
             <a:endParaRPr sz="1800">
               <a:solidFill>
@@ -7985,7 +8036,7 @@
   <p:cSld>
     <p:spTree>
       <p:nvGrpSpPr>
-        <p:cNvPr id="120" name="Shape 120"/>
+        <p:cNvPr id="121" name="Shape 121"/>
         <p:cNvGrpSpPr/>
         <p:nvPr/>
       </p:nvGrpSpPr>
@@ -7999,7 +8050,7 @@
       </p:grpSpPr>
       <p:sp>
         <p:nvSpPr>
-          <p:cNvPr id="121" name="Google Shape;121;p22"/>
+          <p:cNvPr id="122" name="Google Shape;122;p22"/>
           <p:cNvSpPr txBox="1"/>
           <p:nvPr>
             <p:ph type="title"/>
@@ -8037,9 +8088,6 @@
                 <a:solidFill>
                   <a:srgbClr val="1F1F1F"/>
                 </a:solidFill>
-                <a:highlight>
-                  <a:srgbClr val="FFFFFF"/>
-                </a:highlight>
                 <a:latin typeface="Roboto"/>
                 <a:ea typeface="Roboto"/>
                 <a:cs typeface="Roboto"/>
@@ -8053,7 +8101,7 @@
       </p:sp>
       <p:sp>
         <p:nvSpPr>
-          <p:cNvPr id="122" name="Google Shape;122;p22"/>
+          <p:cNvPr id="123" name="Google Shape;123;p22"/>
           <p:cNvSpPr txBox="1"/>
           <p:nvPr>
             <p:ph idx="1" type="body"/>
@@ -8088,15 +8136,36 @@
                 <a:solidFill>
                   <a:srgbClr val="1F1F1F"/>
                 </a:solidFill>
-                <a:highlight>
-                  <a:srgbClr val="FFFFFF"/>
-                </a:highlight>
                 <a:latin typeface="Roboto"/>
                 <a:ea typeface="Roboto"/>
                 <a:cs typeface="Roboto"/>
                 <a:sym typeface="Roboto"/>
               </a:rPr>
-              <a:t>Conclusion: King county has the most (118,711) by a large margin, followed by Snohomish Thus we can conclude that any vehicle not in King county is an outlier</a:t>
+              <a:t>Conclusion: King county has the most (118,711) by a </a:t>
+            </a:r>
+            <a:r>
+              <a:rPr b="1" lang="iw" sz="1500">
+                <a:solidFill>
+                  <a:srgbClr val="1F1F1F"/>
+                </a:solidFill>
+                <a:latin typeface="Roboto"/>
+                <a:ea typeface="Roboto"/>
+                <a:cs typeface="Roboto"/>
+                <a:sym typeface="Roboto"/>
+              </a:rPr>
+              <a:t>large </a:t>
+            </a:r>
+            <a:r>
+              <a:rPr lang="iw" sz="1500">
+                <a:solidFill>
+                  <a:srgbClr val="1F1F1F"/>
+                </a:solidFill>
+                <a:latin typeface="Roboto"/>
+                <a:ea typeface="Roboto"/>
+                <a:cs typeface="Roboto"/>
+                <a:sym typeface="Roboto"/>
+              </a:rPr>
+              <a:t>margin, followed by Snohomish Thus we can conclude that any vehicle not in King county is a minor outlier in the dataset</a:t>
             </a:r>
             <a:endParaRPr sz="2100"/>
           </a:p>
@@ -8104,7 +8173,7 @@
       </p:sp>
       <p:pic>
         <p:nvPicPr>
-          <p:cNvPr id="123" name="Google Shape;123;p22"/>
+          <p:cNvPr id="124" name="Google Shape;124;p22"/>
           <p:cNvPicPr preferRelativeResize="0"/>
           <p:nvPr/>
         </p:nvPicPr>
@@ -8132,7 +8201,7 @@
       </p:pic>
       <p:pic>
         <p:nvPicPr>
-          <p:cNvPr id="124" name="Google Shape;124;p22"/>
+          <p:cNvPr id="125" name="Google Shape;125;p22"/>
           <p:cNvPicPr preferRelativeResize="0"/>
           <p:nvPr/>
         </p:nvPicPr>
@@ -8171,7 +8240,7 @@
   <p:cSld>
     <p:spTree>
       <p:nvGrpSpPr>
-        <p:cNvPr id="128" name="Shape 128"/>
+        <p:cNvPr id="129" name="Shape 129"/>
         <p:cNvGrpSpPr/>
         <p:nvPr/>
       </p:nvGrpSpPr>
@@ -8185,7 +8254,7 @@
       </p:grpSpPr>
       <p:sp>
         <p:nvSpPr>
-          <p:cNvPr id="129" name="Google Shape;129;p23"/>
+          <p:cNvPr id="130" name="Google Shape;130;p23"/>
           <p:cNvSpPr txBox="1"/>
           <p:nvPr>
             <p:ph idx="1" type="body"/>
@@ -8193,7 +8262,7 @@
         </p:nvSpPr>
         <p:spPr>
           <a:xfrm>
-            <a:off x="311700" y="1152475"/>
+            <a:off x="311700" y="1017725"/>
             <a:ext cx="8832300" cy="3416400"/>
           </a:xfrm>
           <a:prstGeom prst="rect">
@@ -8217,7 +8286,7 @@
             </a:pPr>
             <a:r>
               <a:rPr lang="iw"/>
-              <a:t>Conclusion: Tesla is the most popular make in the top 20 cities with the most vehicles</a:t>
+              <a:t>Conclusion: Tesla is the most popular make in the top 20 cities by a large margin</a:t>
             </a:r>
             <a:endParaRPr/>
           </a:p>
@@ -8225,7 +8294,7 @@
       </p:sp>
       <p:pic>
         <p:nvPicPr>
-          <p:cNvPr id="130" name="Google Shape;130;p23"/>
+          <p:cNvPr id="131" name="Google Shape;131;p23"/>
           <p:cNvPicPr preferRelativeResize="0"/>
           <p:nvPr/>
         </p:nvPicPr>
@@ -8253,7 +8322,7 @@
       </p:pic>
       <p:sp>
         <p:nvSpPr>
-          <p:cNvPr id="131" name="Google Shape;131;p23"/>
+          <p:cNvPr id="132" name="Google Shape;132;p23"/>
           <p:cNvSpPr txBox="1"/>
           <p:nvPr>
             <p:ph type="title"/>
@@ -8318,7 +8387,7 @@
   <p:cSld>
     <p:spTree>
       <p:nvGrpSpPr>
-        <p:cNvPr id="135" name="Shape 135"/>
+        <p:cNvPr id="136" name="Shape 136"/>
         <p:cNvGrpSpPr/>
         <p:nvPr/>
       </p:nvGrpSpPr>
@@ -8332,7 +8401,7 @@
       </p:grpSpPr>
       <p:sp>
         <p:nvSpPr>
-          <p:cNvPr id="136" name="Google Shape;136;p24"/>
+          <p:cNvPr id="137" name="Google Shape;137;p24"/>
           <p:cNvSpPr txBox="1"/>
           <p:nvPr>
             <p:ph type="title"/>
@@ -8372,7 +8441,7 @@
       </p:sp>
       <p:sp>
         <p:nvSpPr>
-          <p:cNvPr id="137" name="Google Shape;137;p24"/>
+          <p:cNvPr id="138" name="Google Shape;138;p24"/>
           <p:cNvSpPr txBox="1"/>
           <p:nvPr>
             <p:ph idx="1" type="body"/>
@@ -8404,9 +8473,6 @@
             </a:pPr>
             <a:r>
               <a:rPr lang="iw">
-                <a:solidFill>
-                  <a:srgbClr val="1F1F1F"/>
-                </a:solidFill>
                 <a:latin typeface="Roboto"/>
                 <a:ea typeface="Roboto"/>
                 <a:cs typeface="Roboto"/>
@@ -8416,9 +8482,6 @@
             </a:r>
             <a:r>
               <a:rPr lang="iw">
-                <a:solidFill>
-                  <a:srgbClr val="1F1F1F"/>
-                </a:solidFill>
                 <a:latin typeface="Roboto"/>
                 <a:ea typeface="Roboto"/>
                 <a:cs typeface="Roboto"/>
@@ -8428,9 +8491,6 @@
             </a:r>
             <a:r>
               <a:rPr lang="iw">
-                <a:solidFill>
-                  <a:srgbClr val="1F1F1F"/>
-                </a:solidFill>
                 <a:latin typeface="Roboto"/>
                 <a:ea typeface="Roboto"/>
                 <a:cs typeface="Roboto"/>
@@ -8444,7 +8504,7 @@
       </p:sp>
       <p:pic>
         <p:nvPicPr>
-          <p:cNvPr id="138" name="Google Shape;138;p24"/>
+          <p:cNvPr id="139" name="Google Shape;139;p24"/>
           <p:cNvPicPr preferRelativeResize="0"/>
           <p:nvPr/>
         </p:nvPicPr>
@@ -8483,7 +8543,7 @@
   <p:cSld>
     <p:spTree>
       <p:nvGrpSpPr>
-        <p:cNvPr id="142" name="Shape 142"/>
+        <p:cNvPr id="143" name="Shape 143"/>
         <p:cNvGrpSpPr/>
         <p:nvPr/>
       </p:nvGrpSpPr>
@@ -8497,7 +8557,7 @@
       </p:grpSpPr>
       <p:sp>
         <p:nvSpPr>
-          <p:cNvPr id="143" name="Google Shape;143;p25"/>
+          <p:cNvPr id="144" name="Google Shape;144;p25"/>
           <p:cNvSpPr txBox="1"/>
           <p:nvPr>
             <p:ph type="title"/>
@@ -8537,7 +8597,7 @@
       </p:sp>
       <p:sp>
         <p:nvSpPr>
-          <p:cNvPr id="144" name="Google Shape;144;p25"/>
+          <p:cNvPr id="145" name="Google Shape;145;p25"/>
           <p:cNvSpPr txBox="1"/>
           <p:nvPr>
             <p:ph idx="1" type="body"/>
@@ -8593,7 +8653,7 @@
       </p:sp>
       <p:pic>
         <p:nvPicPr>
-          <p:cNvPr id="145" name="Google Shape;145;p25"/>
+          <p:cNvPr id="146" name="Google Shape;146;p25"/>
           <p:cNvPicPr preferRelativeResize="0"/>
           <p:nvPr/>
         </p:nvPicPr>
@@ -8621,7 +8681,7 @@
       </p:pic>
       <p:pic>
         <p:nvPicPr>
-          <p:cNvPr id="146" name="Google Shape;146;p25"/>
+          <p:cNvPr id="147" name="Google Shape;147;p25"/>
           <p:cNvPicPr preferRelativeResize="0"/>
           <p:nvPr/>
         </p:nvPicPr>
@@ -8660,7 +8720,7 @@
   <p:cSld>
     <p:spTree>
       <p:nvGrpSpPr>
-        <p:cNvPr id="150" name="Shape 150"/>
+        <p:cNvPr id="151" name="Shape 151"/>
         <p:cNvGrpSpPr/>
         <p:nvPr/>
       </p:nvGrpSpPr>
@@ -8674,7 +8734,7 @@
       </p:grpSpPr>
       <p:sp>
         <p:nvSpPr>
-          <p:cNvPr id="151" name="Google Shape;151;p26"/>
+          <p:cNvPr id="152" name="Google Shape;152;p26"/>
           <p:cNvSpPr txBox="1"/>
           <p:nvPr>
             <p:ph type="title"/>
@@ -8714,7 +8774,7 @@
       </p:sp>
       <p:sp>
         <p:nvSpPr>
-          <p:cNvPr id="152" name="Google Shape;152;p26"/>
+          <p:cNvPr id="153" name="Google Shape;153;p26"/>
           <p:cNvSpPr txBox="1"/>
           <p:nvPr>
             <p:ph idx="1" type="body"/>
@@ -8723,7 +8783,7 @@
         <p:spPr>
           <a:xfrm>
             <a:off x="311700" y="1152475"/>
-            <a:ext cx="8520600" cy="3416400"/>
+            <a:ext cx="3257400" cy="3416400"/>
           </a:xfrm>
           <a:prstGeom prst="rect">
             <a:avLst/>
@@ -8753,14 +8813,7 @@
             </a:br>
             <a:r>
               <a:rPr lang="iw"/>
-              <a:t>Most vehicles are made by </a:t>
-            </a:r>
-            <a:br>
-              <a:rPr lang="iw"/>
-            </a:br>
-            <a:r>
-              <a:rPr lang="iw"/>
-              <a:t>TESLA by a large margin </a:t>
+              <a:t>TESLA is the top Make in the dataset by a large margin, </a:t>
             </a:r>
             <a:br>
               <a:rPr lang="iw"/>
@@ -8782,7 +8835,7 @@
       </p:sp>
       <p:pic>
         <p:nvPicPr>
-          <p:cNvPr id="153" name="Google Shape;153;p26"/>
+          <p:cNvPr id="154" name="Google Shape;154;p26"/>
           <p:cNvPicPr preferRelativeResize="0"/>
           <p:nvPr/>
         </p:nvPicPr>
@@ -8821,7 +8874,7 @@
   <p:cSld>
     <p:spTree>
       <p:nvGrpSpPr>
-        <p:cNvPr id="157" name="Shape 157"/>
+        <p:cNvPr id="158" name="Shape 158"/>
         <p:cNvGrpSpPr/>
         <p:nvPr/>
       </p:nvGrpSpPr>
@@ -8835,7 +8888,7 @@
       </p:grpSpPr>
       <p:sp>
         <p:nvSpPr>
-          <p:cNvPr id="158" name="Google Shape;158;p27"/>
+          <p:cNvPr id="159" name="Google Shape;159;p27"/>
           <p:cNvSpPr txBox="1"/>
           <p:nvPr>
             <p:ph type="title"/>
@@ -8875,7 +8928,7 @@
       </p:sp>
       <p:sp>
         <p:nvSpPr>
-          <p:cNvPr id="159" name="Google Shape;159;p27"/>
+          <p:cNvPr id="160" name="Google Shape;160;p27"/>
           <p:cNvSpPr txBox="1"/>
           <p:nvPr>
             <p:ph idx="1" type="body"/>
@@ -8884,7 +8937,7 @@
         <p:spPr>
           <a:xfrm>
             <a:off x="311700" y="1152475"/>
-            <a:ext cx="8520600" cy="3416400"/>
+            <a:ext cx="2975100" cy="3416400"/>
           </a:xfrm>
           <a:prstGeom prst="rect">
             <a:avLst/>
@@ -8901,20 +8954,29 @@
                 <a:spcPts val="0"/>
               </a:spcBef>
               <a:spcAft>
+                <a:spcPts val="0"/>
+              </a:spcAft>
+              <a:buNone/>
+            </a:pPr>
+            <a:r>
+              <a:rPr lang="iw"/>
+              <a:t>Conclusion:</a:t>
+            </a:r>
+            <a:endParaRPr/>
+          </a:p>
+          <a:p>
+            <a:pPr indent="0" lvl="0" marL="0" rtl="0" algn="l">
+              <a:spcBef>
                 <a:spcPts val="1200"/>
+              </a:spcBef>
+              <a:spcAft>
+                <a:spcPts val="1200"/>
               </a:spcAft>
               <a:buNone/>
             </a:pPr>
             <a:r>
               <a:rPr lang="iw"/>
-              <a:t>Conclusion: The top models are Model Y and 3 by Tesla by a large margin followed by Leaf made </a:t>
-            </a:r>
-            <a:br>
-              <a:rPr lang="iw"/>
-            </a:br>
-            <a:r>
-              <a:rPr lang="iw"/>
-              <a:t>by Nissan.</a:t>
+              <a:t>The top models are Model Y and 3 of TESLA followed by Leaf of Nissan.</a:t>
             </a:r>
             <a:endParaRPr/>
           </a:p>
@@ -8922,7 +8984,7 @@
       </p:sp>
       <p:pic>
         <p:nvPicPr>
-          <p:cNvPr id="160" name="Google Shape;160;p27"/>
+          <p:cNvPr id="161" name="Google Shape;161;p27"/>
           <p:cNvPicPr preferRelativeResize="0"/>
           <p:nvPr/>
         </p:nvPicPr>
@@ -8936,8 +8998,8 @@
         </p:blipFill>
         <p:spPr>
           <a:xfrm>
-            <a:off x="3026251" y="1512650"/>
-            <a:ext cx="6117749" cy="3630851"/>
+            <a:off x="3286800" y="1289500"/>
+            <a:ext cx="5525524" cy="3279375"/>
           </a:xfrm>
           <a:prstGeom prst="rect">
             <a:avLst/>
@@ -8961,7 +9023,7 @@
   <p:cSld>
     <p:spTree>
       <p:nvGrpSpPr>
-        <p:cNvPr id="164" name="Shape 164"/>
+        <p:cNvPr id="165" name="Shape 165"/>
         <p:cNvGrpSpPr/>
         <p:nvPr/>
       </p:nvGrpSpPr>
@@ -8975,7 +9037,7 @@
       </p:grpSpPr>
       <p:sp>
         <p:nvSpPr>
-          <p:cNvPr id="165" name="Google Shape;165;p28"/>
+          <p:cNvPr id="166" name="Google Shape;166;p28"/>
           <p:cNvSpPr txBox="1"/>
           <p:nvPr>
             <p:ph type="title"/>
@@ -9007,7 +9069,7 @@
             </a:pPr>
             <a:r>
               <a:rPr lang="iw"/>
-              <a:t>Models per Make (top 3)</a:t>
+              <a:t>Models per Make (top 3 Make)</a:t>
             </a:r>
             <a:endParaRPr/>
           </a:p>
@@ -9015,7 +9077,7 @@
       </p:sp>
       <p:sp>
         <p:nvSpPr>
-          <p:cNvPr id="166" name="Google Shape;166;p28"/>
+          <p:cNvPr id="167" name="Google Shape;167;p28"/>
           <p:cNvSpPr txBox="1"/>
           <p:nvPr>
             <p:ph idx="1" type="body"/>
@@ -9041,13 +9103,64 @@
                 <a:spcPts val="0"/>
               </a:spcBef>
               <a:spcAft>
+                <a:spcPts val="0"/>
+              </a:spcAft>
+              <a:buNone/>
+            </a:pPr>
+            <a:r>
+              <a:rPr lang="iw"/>
+              <a:t>Conclusion:</a:t>
+            </a:r>
+            <a:endParaRPr/>
+          </a:p>
+          <a:p>
+            <a:pPr indent="-342900" lvl="0" marL="457200" rtl="0" algn="l">
+              <a:spcBef>
                 <a:spcPts val="1200"/>
-              </a:spcAft>
-              <a:buNone/>
+              </a:spcBef>
+              <a:spcAft>
+                <a:spcPts val="0"/>
+              </a:spcAft>
+              <a:buSzPts val="1800"/>
+              <a:buChar char="●"/>
             </a:pPr>
             <a:r>
               <a:rPr lang="iw"/>
-              <a:t>Conclusion: Half of Tesla Models are Model Y, 42.5% of CHEVROLET Models are BOLT EV and ~90% of NISSAN models are LEAF.</a:t>
+              <a:t>48.7% of Tesla Models are the Model Y</a:t>
+            </a:r>
+            <a:endParaRPr/>
+          </a:p>
+          <a:p>
+            <a:pPr indent="-342900" lvl="0" marL="457200" rtl="0" algn="l">
+              <a:spcBef>
+                <a:spcPts val="0"/>
+              </a:spcBef>
+              <a:spcAft>
+                <a:spcPts val="0"/>
+              </a:spcAft>
+              <a:buSzPts val="1800"/>
+              <a:buChar char="●"/>
+            </a:pPr>
+            <a:r>
+              <a:rPr lang="iw"/>
+              <a:t>42.5% of CHEVROLET Models are BOLT EV</a:t>
+            </a:r>
+            <a:endParaRPr/>
+          </a:p>
+          <a:p>
+            <a:pPr indent="-342900" lvl="0" marL="457200" rtl="0" algn="l">
+              <a:spcBef>
+                <a:spcPts val="0"/>
+              </a:spcBef>
+              <a:spcAft>
+                <a:spcPts val="0"/>
+              </a:spcAft>
+              <a:buSzPts val="1800"/>
+              <a:buChar char="●"/>
+            </a:pPr>
+            <a:r>
+              <a:rPr lang="iw"/>
+              <a:t>88.9% of NISSAN models are LEAF.</a:t>
             </a:r>
             <a:endParaRPr/>
           </a:p>
@@ -9055,7 +9168,7 @@
       </p:sp>
       <p:pic>
         <p:nvPicPr>
-          <p:cNvPr id="167" name="Google Shape;167;p28"/>
+          <p:cNvPr id="168" name="Google Shape;168;p28"/>
           <p:cNvPicPr preferRelativeResize="0"/>
           <p:nvPr/>
         </p:nvPicPr>
@@ -9069,8 +9182,8 @@
         </p:blipFill>
         <p:spPr>
           <a:xfrm>
-            <a:off x="3133800" y="2189293"/>
-            <a:ext cx="2946651" cy="2941657"/>
+            <a:off x="3148550" y="2645095"/>
+            <a:ext cx="2492025" cy="2487818"/>
           </a:xfrm>
           <a:prstGeom prst="rect">
             <a:avLst/>
@@ -9083,7 +9196,7 @@
       </p:pic>
       <p:pic>
         <p:nvPicPr>
-          <p:cNvPr id="168" name="Google Shape;168;p28"/>
+          <p:cNvPr id="169" name="Google Shape;169;p28"/>
           <p:cNvPicPr preferRelativeResize="0"/>
           <p:nvPr/>
         </p:nvPicPr>
@@ -9097,8 +9210,8 @@
         </p:blipFill>
         <p:spPr>
           <a:xfrm>
-            <a:off x="0" y="2206810"/>
-            <a:ext cx="2946650" cy="2931740"/>
+            <a:off x="186425" y="2664087"/>
+            <a:ext cx="2492025" cy="2479425"/>
           </a:xfrm>
           <a:prstGeom prst="rect">
             <a:avLst/>
@@ -9111,7 +9224,7 @@
       </p:pic>
       <p:pic>
         <p:nvPicPr>
-          <p:cNvPr id="169" name="Google Shape;169;p28"/>
+          <p:cNvPr id="170" name="Google Shape;170;p28"/>
           <p:cNvPicPr preferRelativeResize="0"/>
           <p:nvPr/>
         </p:nvPicPr>
@@ -9125,8 +9238,8 @@
         </p:blipFill>
         <p:spPr>
           <a:xfrm>
-            <a:off x="6197350" y="2176750"/>
-            <a:ext cx="2946650" cy="2966750"/>
+            <a:off x="6200675" y="2634500"/>
+            <a:ext cx="2492025" cy="2509000"/>
           </a:xfrm>
           <a:prstGeom prst="rect">
             <a:avLst/>
@@ -9150,7 +9263,7 @@
   <p:cSld>
     <p:spTree>
       <p:nvGrpSpPr>
-        <p:cNvPr id="173" name="Shape 173"/>
+        <p:cNvPr id="174" name="Shape 174"/>
         <p:cNvGrpSpPr/>
         <p:nvPr/>
       </p:nvGrpSpPr>
@@ -9164,7 +9277,7 @@
       </p:grpSpPr>
       <p:sp>
         <p:nvSpPr>
-          <p:cNvPr id="174" name="Google Shape;174;p29"/>
+          <p:cNvPr id="175" name="Google Shape;175;p29"/>
           <p:cNvSpPr txBox="1"/>
           <p:nvPr>
             <p:ph type="title"/>
@@ -9196,7 +9309,11 @@
             </a:pPr>
             <a:r>
               <a:rPr lang="iw"/>
-              <a:t>Top Makes in each County (top 10)</a:t>
+              <a:t>Top Makes in </a:t>
+            </a:r>
+            <a:r>
+              <a:rPr lang="iw"/>
+              <a:t>WA Counties</a:t>
             </a:r>
             <a:endParaRPr/>
           </a:p>
@@ -9204,7 +9321,7 @@
       </p:sp>
       <p:sp>
         <p:nvSpPr>
-          <p:cNvPr id="175" name="Google Shape;175;p29"/>
+          <p:cNvPr id="176" name="Google Shape;176;p29"/>
           <p:cNvSpPr txBox="1"/>
           <p:nvPr>
             <p:ph idx="1" type="body"/>
@@ -9213,7 +9330,7 @@
         <p:spPr>
           <a:xfrm>
             <a:off x="311700" y="1152475"/>
-            <a:ext cx="8520600" cy="3416400"/>
+            <a:ext cx="5085900" cy="916200"/>
           </a:xfrm>
           <a:prstGeom prst="rect">
             <a:avLst/>
@@ -9221,37 +9338,38 @@
         </p:spPr>
         <p:txBody>
           <a:bodyPr anchorCtr="0" anchor="t" bIns="91425" lIns="91425" spcFirstLastPara="1" rIns="91425" wrap="square" tIns="91425">
-            <a:normAutofit/>
+            <a:noAutofit/>
           </a:bodyPr>
           <a:lstStyle/>
           <a:p>
             <a:pPr indent="0" lvl="0" marL="0" rtl="0" algn="l">
+              <a:lnSpc>
+                <a:spcPct val="95000"/>
+              </a:lnSpc>
               <a:spcBef>
                 <a:spcPts val="0"/>
               </a:spcBef>
               <a:spcAft>
                 <a:spcPts val="1200"/>
               </a:spcAft>
+              <a:buSzPts val="440"/>
               <a:buNone/>
             </a:pPr>
             <a:r>
-              <a:rPr lang="iw"/>
-              <a:t>Conclusion: TESLA has the most vehicles in the top 10 </a:t>
-            </a:r>
-            <a:br>
-              <a:rPr lang="iw"/>
-            </a:br>
-            <a:r>
-              <a:rPr lang="iw"/>
-              <a:t>Counties</a:t>
-            </a:r>
-            <a:endParaRPr/>
+              <a:rPr lang="iw" sz="1520"/>
+              <a:t>Conclusion: </a:t>
+            </a:r>
+            <a:r>
+              <a:rPr lang="iw" sz="1520"/>
+              <a:t>TESLA is leading in the top 10 counties and in 95% of all counties in Washington (WA)</a:t>
+            </a:r>
+            <a:endParaRPr sz="1620"/>
           </a:p>
         </p:txBody>
       </p:sp>
       <p:pic>
         <p:nvPicPr>
-          <p:cNvPr id="176" name="Google Shape;176;p29"/>
+          <p:cNvPr id="177" name="Google Shape;177;p29"/>
           <p:cNvPicPr preferRelativeResize="0"/>
           <p:nvPr/>
         </p:nvPicPr>
@@ -9265,8 +9383,180 @@
         </p:blipFill>
         <p:spPr>
           <a:xfrm>
-            <a:off x="6398550" y="524825"/>
-            <a:ext cx="2594750" cy="4487850"/>
+            <a:off x="6882525" y="524825"/>
+            <a:ext cx="2110775" cy="3650775"/>
+          </a:xfrm>
+          <a:prstGeom prst="rect">
+            <a:avLst/>
+          </a:prstGeom>
+          <a:noFill/>
+          <a:ln>
+            <a:noFill/>
+          </a:ln>
+        </p:spPr>
+      </p:pic>
+      <p:sp>
+        <p:nvSpPr>
+          <p:cNvPr id="178" name="Google Shape;178;p29"/>
+          <p:cNvSpPr txBox="1"/>
+          <p:nvPr>
+            <p:ph idx="1" type="body"/>
+          </p:nvPr>
+        </p:nvSpPr>
+        <p:spPr>
+          <a:xfrm>
+            <a:off x="3512575" y="1754325"/>
+            <a:ext cx="3270300" cy="1308300"/>
+          </a:xfrm>
+          <a:prstGeom prst="rect">
+            <a:avLst/>
+          </a:prstGeom>
+        </p:spPr>
+        <p:txBody>
+          <a:bodyPr anchorCtr="0" anchor="t" bIns="91425" lIns="91425" spcFirstLastPara="1" rIns="91425" wrap="square" tIns="91425">
+            <a:noAutofit/>
+          </a:bodyPr>
+          <a:lstStyle/>
+          <a:p>
+            <a:pPr indent="0" lvl="0" marL="0" rtl="0" algn="l">
+              <a:lnSpc>
+                <a:spcPct val="95000"/>
+              </a:lnSpc>
+              <a:spcBef>
+                <a:spcPts val="0"/>
+              </a:spcBef>
+              <a:spcAft>
+                <a:spcPts val="1200"/>
+              </a:spcAft>
+              <a:buSzPts val="440"/>
+              <a:buNone/>
+            </a:pPr>
+            <a:r>
+              <a:rPr lang="iw" sz="1320"/>
+              <a:t>And the only county TESLA isn’t in the lead is Garfield</a:t>
+            </a:r>
+            <a:endParaRPr sz="1420"/>
+          </a:p>
+        </p:txBody>
+      </p:sp>
+      <p:pic>
+        <p:nvPicPr>
+          <p:cNvPr id="179" name="Google Shape;179;p29"/>
+          <p:cNvPicPr preferRelativeResize="0"/>
+          <p:nvPr/>
+        </p:nvPicPr>
+        <p:blipFill>
+          <a:blip r:embed="rId4">
+            <a:alphaModFix/>
+          </a:blip>
+          <a:stretch>
+            <a:fillRect/>
+          </a:stretch>
+        </p:blipFill>
+        <p:spPr>
+          <a:xfrm>
+            <a:off x="4120425" y="2352679"/>
+            <a:ext cx="1721708" cy="1344825"/>
+          </a:xfrm>
+          <a:prstGeom prst="rect">
+            <a:avLst/>
+          </a:prstGeom>
+          <a:noFill/>
+          <a:ln>
+            <a:noFill/>
+          </a:ln>
+        </p:spPr>
+      </p:pic>
+      <p:pic>
+        <p:nvPicPr>
+          <p:cNvPr id="180" name="Google Shape;180;p29"/>
+          <p:cNvPicPr preferRelativeResize="0"/>
+          <p:nvPr/>
+        </p:nvPicPr>
+        <p:blipFill>
+          <a:blip r:embed="rId5">
+            <a:alphaModFix/>
+          </a:blip>
+          <a:stretch>
+            <a:fillRect/>
+          </a:stretch>
+        </p:blipFill>
+        <p:spPr>
+          <a:xfrm>
+            <a:off x="311700" y="1754322"/>
+            <a:ext cx="3200887" cy="3389174"/>
+          </a:xfrm>
+          <a:prstGeom prst="rect">
+            <a:avLst/>
+          </a:prstGeom>
+          <a:noFill/>
+          <a:ln>
+            <a:noFill/>
+          </a:ln>
+        </p:spPr>
+      </p:pic>
+      <p:sp>
+        <p:nvSpPr>
+          <p:cNvPr id="181" name="Google Shape;181;p29"/>
+          <p:cNvSpPr txBox="1"/>
+          <p:nvPr>
+            <p:ph idx="1" type="body"/>
+          </p:nvPr>
+        </p:nvSpPr>
+        <p:spPr>
+          <a:xfrm>
+            <a:off x="3562400" y="3697500"/>
+            <a:ext cx="3270300" cy="728100"/>
+          </a:xfrm>
+          <a:prstGeom prst="rect">
+            <a:avLst/>
+          </a:prstGeom>
+        </p:spPr>
+        <p:txBody>
+          <a:bodyPr anchorCtr="0" anchor="t" bIns="91425" lIns="91425" spcFirstLastPara="1" rIns="91425" wrap="square" tIns="91425">
+            <a:noAutofit/>
+          </a:bodyPr>
+          <a:lstStyle/>
+          <a:p>
+            <a:pPr indent="0" lvl="0" marL="0" rtl="0" algn="l">
+              <a:lnSpc>
+                <a:spcPct val="95000"/>
+              </a:lnSpc>
+              <a:spcBef>
+                <a:spcPts val="0"/>
+              </a:spcBef>
+              <a:spcAft>
+                <a:spcPts val="1200"/>
+              </a:spcAft>
+              <a:buSzPts val="440"/>
+              <a:buNone/>
+            </a:pPr>
+            <a:r>
+              <a:rPr lang="iw" sz="1300"/>
+              <a:t>And that TESLA is actually tied with FORD in Columbia</a:t>
+            </a:r>
+            <a:endParaRPr sz="1420"/>
+          </a:p>
+        </p:txBody>
+      </p:sp>
+      <p:pic>
+        <p:nvPicPr>
+          <p:cNvPr id="182" name="Google Shape;182;p29"/>
+          <p:cNvPicPr preferRelativeResize="0"/>
+          <p:nvPr/>
+        </p:nvPicPr>
+        <p:blipFill>
+          <a:blip r:embed="rId6">
+            <a:alphaModFix/>
+          </a:blip>
+          <a:stretch>
+            <a:fillRect/>
+          </a:stretch>
+        </p:blipFill>
+        <p:spPr>
+          <a:xfrm>
+            <a:off x="4216824" y="4175605"/>
+            <a:ext cx="1528900" cy="971922"/>
           </a:xfrm>
           <a:prstGeom prst="rect">
             <a:avLst/>
@@ -9290,7 +9580,7 @@
   <p:cSld>
     <p:spTree>
       <p:nvGrpSpPr>
-        <p:cNvPr id="180" name="Shape 180"/>
+        <p:cNvPr id="186" name="Shape 186"/>
         <p:cNvGrpSpPr/>
         <p:nvPr/>
       </p:nvGrpSpPr>
@@ -9304,7 +9594,7 @@
       </p:grpSpPr>
       <p:sp>
         <p:nvSpPr>
-          <p:cNvPr id="181" name="Google Shape;181;p30"/>
+          <p:cNvPr id="187" name="Google Shape;187;p30"/>
           <p:cNvSpPr txBox="1"/>
           <p:nvPr>
             <p:ph type="title"/>
@@ -9336,7 +9626,7 @@
             </a:pPr>
             <a:r>
               <a:rPr lang="iw"/>
-              <a:t>Top Models in each County (top 10)</a:t>
+              <a:t>Top Models in WA Counties</a:t>
             </a:r>
             <a:endParaRPr/>
           </a:p>
@@ -9344,7 +9634,7 @@
       </p:sp>
       <p:sp>
         <p:nvSpPr>
-          <p:cNvPr id="182" name="Google Shape;182;p30"/>
+          <p:cNvPr id="188" name="Google Shape;188;p30"/>
           <p:cNvSpPr txBox="1"/>
           <p:nvPr>
             <p:ph idx="1" type="body"/>
@@ -9353,7 +9643,7 @@
         <p:spPr>
           <a:xfrm>
             <a:off x="311700" y="1152475"/>
-            <a:ext cx="8520600" cy="3416400"/>
+            <a:ext cx="6105600" cy="848700"/>
           </a:xfrm>
           <a:prstGeom prst="rect">
             <a:avLst/>
@@ -9375,23 +9665,28 @@
               <a:buNone/>
             </a:pPr>
             <a:r>
-              <a:rPr lang="iw"/>
-              <a:t>Conclusion: MODEL Y is the most popular in the top </a:t>
-            </a:r>
-            <a:br>
-              <a:rPr lang="iw"/>
-            </a:br>
-            <a:r>
-              <a:rPr lang="iw"/>
-              <a:t>10 Counties</a:t>
-            </a:r>
-            <a:endParaRPr/>
+              <a:rPr lang="iw" sz="1500"/>
+              <a:t>Conclusion: </a:t>
+            </a:r>
+            <a:r>
+              <a:rPr lang="iw" sz="1500"/>
+              <a:t>The Model Y is the most popular in the top 10 counties and is the top model in 59% of all counties </a:t>
+            </a:r>
+            <a:r>
+              <a:rPr lang="iw" sz="1500"/>
+              <a:t>in Washington (WA)</a:t>
+            </a:r>
+            <a:r>
+              <a:rPr lang="iw" sz="1500"/>
+              <a:t>.</a:t>
+            </a:r>
+            <a:endParaRPr sz="1500"/>
           </a:p>
         </p:txBody>
       </p:sp>
       <p:pic>
         <p:nvPicPr>
-          <p:cNvPr id="183" name="Google Shape;183;p30"/>
+          <p:cNvPr id="189" name="Google Shape;189;p30"/>
           <p:cNvPicPr preferRelativeResize="0"/>
           <p:nvPr/>
         </p:nvPicPr>
@@ -9417,329 +9712,9 @@
           </a:ln>
         </p:spPr>
       </p:pic>
-    </p:spTree>
-  </p:cSld>
-  <p:clrMapOvr>
-    <a:masterClrMapping/>
-  </p:clrMapOvr>
-</p:sld>
-</file>
-
-<file path=ppt/slides/slide19.xml><?xml version="1.0" encoding="utf-8"?>
-<p:sld xmlns:a="http://schemas.openxmlformats.org/drawingml/2006/main" xmlns:r="http://schemas.openxmlformats.org/officeDocument/2006/relationships" xmlns:mc="http://schemas.openxmlformats.org/markup-compatibility/2006" xmlns:mv="urn:schemas-microsoft-com:mac:vml" xmlns:p="http://schemas.openxmlformats.org/presentationml/2006/main" xmlns:c="http://schemas.openxmlformats.org/drawingml/2006/chart" xmlns:dgm="http://schemas.openxmlformats.org/drawingml/2006/diagram" xmlns:o="urn:schemas-microsoft-com:office:office" xmlns:v="urn:schemas-microsoft-com:vml" xmlns:pvml="urn:schemas-microsoft-com:office:powerpoint" xmlns:com="http://schemas.openxmlformats.org/drawingml/2006/compatibility" xmlns:p14="http://schemas.microsoft.com/office/powerpoint/2010/main" xmlns:p15="http://schemas.microsoft.com/office/powerpoint/2012/main" xmlns:ahyp="http://schemas.microsoft.com/office/drawing/2018/hyperlinkcolor">
-  <p:cSld>
-    <p:spTree>
-      <p:nvGrpSpPr>
-        <p:cNvPr id="187" name="Shape 187"/>
-        <p:cNvGrpSpPr/>
-        <p:nvPr/>
-      </p:nvGrpSpPr>
-      <p:grpSpPr>
-        <a:xfrm>
-          <a:off x="0" y="0"/>
-          <a:ext cx="0" cy="0"/>
-          <a:chOff x="0" y="0"/>
-          <a:chExt cx="0" cy="0"/>
-        </a:xfrm>
-      </p:grpSpPr>
-      <p:sp>
-        <p:nvSpPr>
-          <p:cNvPr id="188" name="Google Shape;188;p31"/>
-          <p:cNvSpPr txBox="1"/>
-          <p:nvPr>
-            <p:ph type="title"/>
-          </p:nvPr>
-        </p:nvSpPr>
-        <p:spPr>
-          <a:xfrm>
-            <a:off x="311700" y="445025"/>
-            <a:ext cx="8520600" cy="572700"/>
-          </a:xfrm>
-          <a:prstGeom prst="rect">
-            <a:avLst/>
-          </a:prstGeom>
-        </p:spPr>
-        <p:txBody>
-          <a:bodyPr anchorCtr="0" anchor="t" bIns="91425" lIns="91425" spcFirstLastPara="1" rIns="91425" wrap="square" tIns="91425">
-            <a:normAutofit fontScale="90000"/>
-          </a:bodyPr>
-          <a:lstStyle/>
-          <a:p>
-            <a:pPr indent="0" lvl="0" marL="0" rtl="0" algn="l">
-              <a:spcBef>
-                <a:spcPts val="0"/>
-              </a:spcBef>
-              <a:spcAft>
-                <a:spcPts val="0"/>
-              </a:spcAft>
-              <a:buNone/>
-            </a:pPr>
-            <a:r>
-              <a:rPr lang="iw"/>
-              <a:t>Amount of Top 3 Make of each CAFV Eligibility</a:t>
-            </a:r>
-            <a:endParaRPr/>
-          </a:p>
-        </p:txBody>
-      </p:sp>
-      <p:sp>
-        <p:nvSpPr>
-          <p:cNvPr id="189" name="Google Shape;189;p31"/>
-          <p:cNvSpPr txBox="1"/>
-          <p:nvPr>
-            <p:ph idx="1" type="body"/>
-          </p:nvPr>
-        </p:nvSpPr>
-        <p:spPr>
-          <a:xfrm>
-            <a:off x="311700" y="941525"/>
-            <a:ext cx="8520600" cy="3551100"/>
-          </a:xfrm>
-          <a:prstGeom prst="rect">
-            <a:avLst/>
-          </a:prstGeom>
-        </p:spPr>
-        <p:txBody>
-          <a:bodyPr anchorCtr="0" anchor="t" bIns="91425" lIns="91425" spcFirstLastPara="1" rIns="91425" wrap="square" tIns="91425">
-            <a:normAutofit/>
-          </a:bodyPr>
-          <a:lstStyle/>
-          <a:p>
-            <a:pPr indent="0" lvl="0" marL="0" rtl="0" algn="l">
-              <a:spcBef>
-                <a:spcPts val="0"/>
-              </a:spcBef>
-              <a:spcAft>
-                <a:spcPts val="1200"/>
-              </a:spcAft>
-              <a:buNone/>
-            </a:pPr>
-            <a:r>
-              <a:rPr lang="iw"/>
-              <a:t>Conclusion: </a:t>
-            </a:r>
-            <a:br>
-              <a:rPr lang="iw"/>
-            </a:br>
-            <a:r>
-              <a:rPr lang="iw"/>
-              <a:t>Most unknown </a:t>
-            </a:r>
-            <a:r>
-              <a:rPr lang="iw"/>
-              <a:t>eligibility</a:t>
-            </a:r>
-            <a:r>
-              <a:rPr lang="iw"/>
-              <a:t> are TESLA vehicles. </a:t>
-            </a:r>
-            <a:br>
-              <a:rPr lang="iw"/>
-            </a:br>
-            <a:r>
-              <a:rPr lang="iw"/>
-              <a:t>Most eligible vehicles are by Tesla</a:t>
-            </a:r>
-            <a:br>
-              <a:rPr lang="iw"/>
-            </a:br>
-            <a:r>
-              <a:rPr lang="iw"/>
-              <a:t>Most not eligible vehicles are by</a:t>
-            </a:r>
-            <a:br>
-              <a:rPr lang="iw"/>
-            </a:br>
-            <a:r>
-              <a:rPr lang="iw"/>
-              <a:t>Jeep</a:t>
-            </a:r>
-            <a:endParaRPr/>
-          </a:p>
-        </p:txBody>
-      </p:sp>
       <p:pic>
         <p:nvPicPr>
-          <p:cNvPr id="190" name="Google Shape;190;p31"/>
-          <p:cNvPicPr preferRelativeResize="0"/>
-          <p:nvPr/>
-        </p:nvPicPr>
-        <p:blipFill>
-          <a:blip r:embed="rId3">
-            <a:alphaModFix/>
-          </a:blip>
-          <a:stretch>
-            <a:fillRect/>
-          </a:stretch>
-        </p:blipFill>
-        <p:spPr>
-          <a:xfrm>
-            <a:off x="3725500" y="1927122"/>
-            <a:ext cx="5418500" cy="3216375"/>
-          </a:xfrm>
-          <a:prstGeom prst="rect">
-            <a:avLst/>
-          </a:prstGeom>
-          <a:noFill/>
-          <a:ln>
-            <a:noFill/>
-          </a:ln>
-        </p:spPr>
-      </p:pic>
-    </p:spTree>
-  </p:cSld>
-  <p:clrMapOvr>
-    <a:masterClrMapping/>
-  </p:clrMapOvr>
-</p:sld>
-</file>
-
-<file path=ppt/slides/slide2.xml><?xml version="1.0" encoding="utf-8"?>
-<p:sld xmlns:a="http://schemas.openxmlformats.org/drawingml/2006/main" xmlns:r="http://schemas.openxmlformats.org/officeDocument/2006/relationships" xmlns:mc="http://schemas.openxmlformats.org/markup-compatibility/2006" xmlns:mv="urn:schemas-microsoft-com:mac:vml" xmlns:p="http://schemas.openxmlformats.org/presentationml/2006/main" xmlns:c="http://schemas.openxmlformats.org/drawingml/2006/chart" xmlns:dgm="http://schemas.openxmlformats.org/drawingml/2006/diagram" xmlns:o="urn:schemas-microsoft-com:office:office" xmlns:v="urn:schemas-microsoft-com:vml" xmlns:pvml="urn:schemas-microsoft-com:office:powerpoint" xmlns:com="http://schemas.openxmlformats.org/drawingml/2006/compatibility" xmlns:p14="http://schemas.microsoft.com/office/powerpoint/2010/main" xmlns:p15="http://schemas.microsoft.com/office/powerpoint/2012/main" xmlns:ahyp="http://schemas.microsoft.com/office/drawing/2018/hyperlinkcolor">
-  <p:cSld>
-    <p:spTree>
-      <p:nvGrpSpPr>
-        <p:cNvPr id="61" name="Shape 61"/>
-        <p:cNvGrpSpPr/>
-        <p:nvPr/>
-      </p:nvGrpSpPr>
-      <p:grpSpPr>
-        <a:xfrm>
-          <a:off x="0" y="0"/>
-          <a:ext cx="0" cy="0"/>
-          <a:chOff x="0" y="0"/>
-          <a:chExt cx="0" cy="0"/>
-        </a:xfrm>
-      </p:grpSpPr>
-      <p:sp>
-        <p:nvSpPr>
-          <p:cNvPr id="62" name="Google Shape;62;p14"/>
-          <p:cNvSpPr txBox="1"/>
-          <p:nvPr>
-            <p:ph idx="4294967295" type="title"/>
-          </p:nvPr>
-        </p:nvSpPr>
-        <p:spPr>
-          <a:xfrm>
-            <a:off x="311700" y="445025"/>
-            <a:ext cx="1898700" cy="572700"/>
-          </a:xfrm>
-          <a:prstGeom prst="rect">
-            <a:avLst/>
-          </a:prstGeom>
-        </p:spPr>
-        <p:txBody>
-          <a:bodyPr anchorCtr="0" anchor="t" bIns="91425" lIns="91425" spcFirstLastPara="1" rIns="91425" wrap="square" tIns="91425">
-            <a:normAutofit fontScale="90000"/>
-          </a:bodyPr>
-          <a:lstStyle/>
-          <a:p>
-            <a:pPr indent="0" lvl="0" marL="0" rtl="0" algn="l">
-              <a:lnSpc>
-                <a:spcPct val="115000"/>
-              </a:lnSpc>
-              <a:spcBef>
-                <a:spcPts val="2400"/>
-              </a:spcBef>
-              <a:spcAft>
-                <a:spcPts val="0"/>
-              </a:spcAft>
-              <a:buNone/>
-            </a:pPr>
-            <a:r>
-              <a:rPr lang="iw"/>
-              <a:t>Members</a:t>
-            </a:r>
-            <a:endParaRPr b="1" sz="2300"/>
-          </a:p>
-          <a:p>
-            <a:pPr indent="0" lvl="0" marL="0" rtl="0" algn="l">
-              <a:spcBef>
-                <a:spcPts val="400"/>
-              </a:spcBef>
-              <a:spcAft>
-                <a:spcPts val="0"/>
-              </a:spcAft>
-              <a:buNone/>
-            </a:pPr>
-            <a:r>
-              <a:t/>
-            </a:r>
-            <a:endParaRPr/>
-          </a:p>
-        </p:txBody>
-      </p:sp>
-      <p:sp>
-        <p:nvSpPr>
-          <p:cNvPr id="63" name="Google Shape;63;p14"/>
-          <p:cNvSpPr txBox="1"/>
-          <p:nvPr>
-            <p:ph idx="4294967295" type="body"/>
-          </p:nvPr>
-        </p:nvSpPr>
-        <p:spPr>
-          <a:xfrm>
-            <a:off x="808700" y="4624400"/>
-            <a:ext cx="3629100" cy="486000"/>
-          </a:xfrm>
-          <a:prstGeom prst="rect">
-            <a:avLst/>
-          </a:prstGeom>
-        </p:spPr>
-        <p:txBody>
-          <a:bodyPr anchorCtr="0" anchor="t" bIns="91425" lIns="91425" spcFirstLastPara="1" rIns="91425" wrap="square" tIns="91425">
-            <a:normAutofit/>
-          </a:bodyPr>
-          <a:lstStyle/>
-          <a:p>
-            <a:pPr indent="0" lvl="0" marL="0" rtl="0" algn="ctr">
-              <a:spcBef>
-                <a:spcPts val="0"/>
-              </a:spcBef>
-              <a:spcAft>
-                <a:spcPts val="1200"/>
-              </a:spcAft>
-              <a:buNone/>
-            </a:pPr>
-            <a:r>
-              <a:rPr lang="iw"/>
-              <a:t>Shahar Berenson</a:t>
-            </a:r>
-            <a:endParaRPr/>
-          </a:p>
-        </p:txBody>
-      </p:sp>
-      <p:pic>
-        <p:nvPicPr>
-          <p:cNvPr id="64" name="Google Shape;64;p14"/>
-          <p:cNvPicPr preferRelativeResize="0"/>
-          <p:nvPr/>
-        </p:nvPicPr>
-        <p:blipFill>
-          <a:blip r:embed="rId3">
-            <a:alphaModFix/>
-          </a:blip>
-          <a:stretch>
-            <a:fillRect/>
-          </a:stretch>
-        </p:blipFill>
-        <p:spPr>
-          <a:xfrm>
-            <a:off x="4870913" y="976313"/>
-            <a:ext cx="3629025" cy="3648075"/>
-          </a:xfrm>
-          <a:prstGeom prst="rect">
-            <a:avLst/>
-          </a:prstGeom>
-          <a:noFill/>
-          <a:ln>
-            <a:noFill/>
-          </a:ln>
-        </p:spPr>
-      </p:pic>
-      <p:pic>
-        <p:nvPicPr>
-          <p:cNvPr id="65" name="Google Shape;65;p14"/>
+          <p:cNvPr id="190" name="Google Shape;190;p30"/>
           <p:cNvPicPr preferRelativeResize="0"/>
           <p:nvPr/>
         </p:nvPicPr>
@@ -9753,8 +9728,8 @@
         </p:blipFill>
         <p:spPr>
           <a:xfrm>
-            <a:off x="808788" y="976313"/>
-            <a:ext cx="3629025" cy="3648075"/>
+            <a:off x="1507275" y="2058925"/>
+            <a:ext cx="3692149" cy="2815175"/>
           </a:xfrm>
           <a:prstGeom prst="rect">
             <a:avLst/>
@@ -9765,46 +9740,6 @@
           </a:ln>
         </p:spPr>
       </p:pic>
-      <p:sp>
-        <p:nvSpPr>
-          <p:cNvPr id="66" name="Google Shape;66;p14"/>
-          <p:cNvSpPr txBox="1"/>
-          <p:nvPr>
-            <p:ph idx="4294967295" type="body"/>
-          </p:nvPr>
-        </p:nvSpPr>
-        <p:spPr>
-          <a:xfrm>
-            <a:off x="4870888" y="4624400"/>
-            <a:ext cx="3629100" cy="486000"/>
-          </a:xfrm>
-          <a:prstGeom prst="rect">
-            <a:avLst/>
-          </a:prstGeom>
-        </p:spPr>
-        <p:txBody>
-          <a:bodyPr anchorCtr="0" anchor="t" bIns="91425" lIns="91425" spcFirstLastPara="1" rIns="91425" wrap="square" tIns="91425">
-            <a:normAutofit/>
-          </a:bodyPr>
-          <a:lstStyle/>
-          <a:p>
-            <a:pPr indent="0" lvl="0" marL="0" rtl="0" algn="ctr">
-              <a:spcBef>
-                <a:spcPts val="0"/>
-              </a:spcBef>
-              <a:spcAft>
-                <a:spcPts val="1200"/>
-              </a:spcAft>
-              <a:buNone/>
-            </a:pPr>
-            <a:r>
-              <a:rPr lang="iw"/>
-              <a:t>Shlomi Fridman</a:t>
-            </a:r>
-            <a:endParaRPr/>
-          </a:p>
-        </p:txBody>
-      </p:sp>
     </p:spTree>
   </p:cSld>
   <p:clrMapOvr>
@@ -9813,7 +9748,7 @@
 </p:sld>
 </file>
 
-<file path=ppt/slides/slide20.xml><?xml version="1.0" encoding="utf-8"?>
+<file path=ppt/slides/slide19.xml><?xml version="1.0" encoding="utf-8"?>
 <p:sld xmlns:a="http://schemas.openxmlformats.org/drawingml/2006/main" xmlns:r="http://schemas.openxmlformats.org/officeDocument/2006/relationships" xmlns:mc="http://schemas.openxmlformats.org/markup-compatibility/2006" xmlns:mv="urn:schemas-microsoft-com:mac:vml" xmlns:p="http://schemas.openxmlformats.org/presentationml/2006/main" xmlns:c="http://schemas.openxmlformats.org/drawingml/2006/chart" xmlns:dgm="http://schemas.openxmlformats.org/drawingml/2006/diagram" xmlns:o="urn:schemas-microsoft-com:office:office" xmlns:v="urn:schemas-microsoft-com:vml" xmlns:pvml="urn:schemas-microsoft-com:office:powerpoint" xmlns:com="http://schemas.openxmlformats.org/drawingml/2006/compatibility" xmlns:p14="http://schemas.microsoft.com/office/powerpoint/2010/main" xmlns:p15="http://schemas.microsoft.com/office/powerpoint/2012/main" xmlns:ahyp="http://schemas.microsoft.com/office/drawing/2018/hyperlinkcolor">
   <p:cSld>
     <p:spTree>
@@ -9832,7 +9767,7 @@
       </p:grpSpPr>
       <p:sp>
         <p:nvSpPr>
-          <p:cNvPr id="195" name="Google Shape;195;p32"/>
+          <p:cNvPr id="195" name="Google Shape;195;p31"/>
           <p:cNvSpPr txBox="1"/>
           <p:nvPr>
             <p:ph type="title"/>
@@ -9864,7 +9799,7 @@
             </a:pPr>
             <a:r>
               <a:rPr lang="iw"/>
-              <a:t>Mean of Top 3 Make of each CAFV Eligibility</a:t>
+              <a:t>Amount of Top 3 Make of each CAFV Eligibility</a:t>
             </a:r>
             <a:endParaRPr/>
           </a:p>
@@ -9872,7 +9807,7 @@
       </p:sp>
       <p:sp>
         <p:nvSpPr>
-          <p:cNvPr id="196" name="Google Shape;196;p32"/>
+          <p:cNvPr id="196" name="Google Shape;196;p31"/>
           <p:cNvSpPr txBox="1"/>
           <p:nvPr>
             <p:ph idx="1" type="body"/>
@@ -9880,8 +9815,8 @@
         </p:nvSpPr>
         <p:spPr>
           <a:xfrm>
-            <a:off x="0" y="1017725"/>
-            <a:ext cx="3024600" cy="4002600"/>
+            <a:off x="311700" y="941525"/>
+            <a:ext cx="4683600" cy="1540800"/>
           </a:xfrm>
           <a:prstGeom prst="rect">
             <a:avLst/>
@@ -9903,83 +9838,75 @@
               <a:buNone/>
             </a:pPr>
             <a:r>
-              <a:rPr lang="iw"/>
-              <a:t>Conclusion:  </a:t>
-            </a:r>
-            <a:endParaRPr/>
+              <a:rPr lang="iw" sz="1600"/>
+              <a:t>Conclusion: </a:t>
+            </a:r>
+            <a:endParaRPr sz="1600"/>
           </a:p>
           <a:p>
-            <a:pPr indent="-342900" lvl="0" marL="457200" rtl="0" algn="l">
+            <a:pPr indent="-330200" lvl="0" marL="457200" rtl="0" algn="l">
               <a:spcBef>
                 <a:spcPts val="1200"/>
               </a:spcBef>
               <a:spcAft>
                 <a:spcPts val="0"/>
               </a:spcAft>
-              <a:buSzPts val="1800"/>
-              <a:buChar char="-"/>
+              <a:buSzPts val="1600"/>
+              <a:buChar char="●"/>
             </a:pPr>
             <a:r>
-              <a:rPr lang="iw"/>
-              <a:t>TESLA has the highest mean of Electric Range</a:t>
-            </a:r>
-            <a:endParaRPr/>
+              <a:rPr lang="iw" sz="1600"/>
+              <a:t>Most unknown </a:t>
+            </a:r>
+            <a:r>
+              <a:rPr lang="iw" sz="1600"/>
+              <a:t>eligibility</a:t>
+            </a:r>
+            <a:r>
+              <a:rPr lang="iw" sz="1600"/>
+              <a:t> are TESLA vehicles. </a:t>
+            </a:r>
+            <a:endParaRPr sz="1600"/>
           </a:p>
           <a:p>
-            <a:pPr indent="-342900" lvl="0" marL="457200" rtl="0" algn="l">
-              <a:spcBef>
-                <a:spcPts val="0"/>
-              </a:spcBef>
-              <a:spcAft>
-                <a:spcPts val="0"/>
-              </a:spcAft>
-              <a:buSzPts val="1800"/>
-              <a:buChar char="-"/>
+            <a:pPr indent="-330200" lvl="0" marL="457200" rtl="0" algn="l">
+              <a:spcBef>
+                <a:spcPts val="0"/>
+              </a:spcBef>
+              <a:spcAft>
+                <a:spcPts val="0"/>
+              </a:spcAft>
+              <a:buSzPts val="1600"/>
+              <a:buChar char="●"/>
             </a:pPr>
             <a:r>
-              <a:rPr lang="iw"/>
-              <a:t>Unknown </a:t>
-            </a:r>
-            <a:r>
-              <a:rPr lang="iw"/>
-              <a:t>eligibility</a:t>
-            </a:r>
-            <a:r>
-              <a:rPr lang="iw"/>
-              <a:t> has no known electric range.</a:t>
-            </a:r>
-            <a:endParaRPr/>
+              <a:rPr lang="iw" sz="1600"/>
+              <a:t>Most eligible vehicles are by Tesla</a:t>
+            </a:r>
+            <a:endParaRPr sz="1600"/>
           </a:p>
           <a:p>
-            <a:pPr indent="-342900" lvl="0" marL="457200" rtl="0" algn="l">
-              <a:spcBef>
-                <a:spcPts val="0"/>
-              </a:spcBef>
-              <a:spcAft>
-                <a:spcPts val="0"/>
-              </a:spcAft>
-              <a:buSzPts val="1800"/>
-              <a:buChar char="-"/>
+            <a:pPr indent="-330200" lvl="0" marL="457200" rtl="0" algn="l">
+              <a:spcBef>
+                <a:spcPts val="0"/>
+              </a:spcBef>
+              <a:spcAft>
+                <a:spcPts val="0"/>
+              </a:spcAft>
+              <a:buSzPts val="1600"/>
+              <a:buChar char="●"/>
             </a:pPr>
             <a:r>
-              <a:rPr lang="iw"/>
-              <a:t>Low battery not eligibility vehicles have lower electric range than </a:t>
-            </a:r>
-            <a:r>
-              <a:rPr lang="iw"/>
-              <a:t>eligible </a:t>
-            </a:r>
-            <a:r>
-              <a:rPr lang="iw"/>
-              <a:t>vehicles</a:t>
-            </a:r>
-            <a:endParaRPr/>
+              <a:rPr lang="iw" sz="1600"/>
+              <a:t>Most not eligible vehicles are by Jeep</a:t>
+            </a:r>
+            <a:endParaRPr sz="1600"/>
           </a:p>
         </p:txBody>
       </p:sp>
       <p:pic>
         <p:nvPicPr>
-          <p:cNvPr id="197" name="Google Shape;197;p32"/>
+          <p:cNvPr id="197" name="Google Shape;197;p31"/>
           <p:cNvPicPr preferRelativeResize="0"/>
           <p:nvPr/>
         </p:nvPicPr>
@@ -9993,8 +9920,8 @@
         </p:blipFill>
         <p:spPr>
           <a:xfrm>
-            <a:off x="3024523" y="1420348"/>
-            <a:ext cx="6119475" cy="3723150"/>
+            <a:off x="4291050" y="2262825"/>
+            <a:ext cx="4852949" cy="2880675"/>
           </a:xfrm>
           <a:prstGeom prst="rect">
             <a:avLst/>
@@ -10013,7 +9940,226 @@
 </p:sld>
 </file>
 
-<file path=ppt/slides/slide21.xml><?xml version="1.0" encoding="utf-8"?>
+<file path=ppt/slides/slide2.xml><?xml version="1.0" encoding="utf-8"?>
+<p:sld xmlns:a="http://schemas.openxmlformats.org/drawingml/2006/main" xmlns:r="http://schemas.openxmlformats.org/officeDocument/2006/relationships" xmlns:mc="http://schemas.openxmlformats.org/markup-compatibility/2006" xmlns:mv="urn:schemas-microsoft-com:mac:vml" xmlns:p="http://schemas.openxmlformats.org/presentationml/2006/main" xmlns:c="http://schemas.openxmlformats.org/drawingml/2006/chart" xmlns:dgm="http://schemas.openxmlformats.org/drawingml/2006/diagram" xmlns:o="urn:schemas-microsoft-com:office:office" xmlns:v="urn:schemas-microsoft-com:vml" xmlns:pvml="urn:schemas-microsoft-com:office:powerpoint" xmlns:com="http://schemas.openxmlformats.org/drawingml/2006/compatibility" xmlns:p14="http://schemas.microsoft.com/office/powerpoint/2010/main" xmlns:p15="http://schemas.microsoft.com/office/powerpoint/2012/main" xmlns:ahyp="http://schemas.microsoft.com/office/drawing/2018/hyperlinkcolor">
+  <p:cSld>
+    <p:spTree>
+      <p:nvGrpSpPr>
+        <p:cNvPr id="62" name="Shape 62"/>
+        <p:cNvGrpSpPr/>
+        <p:nvPr/>
+      </p:nvGrpSpPr>
+      <p:grpSpPr>
+        <a:xfrm>
+          <a:off x="0" y="0"/>
+          <a:ext cx="0" cy="0"/>
+          <a:chOff x="0" y="0"/>
+          <a:chExt cx="0" cy="0"/>
+        </a:xfrm>
+      </p:grpSpPr>
+      <p:sp>
+        <p:nvSpPr>
+          <p:cNvPr id="63" name="Google Shape;63;p14"/>
+          <p:cNvSpPr txBox="1"/>
+          <p:nvPr>
+            <p:ph idx="4294967295" type="title"/>
+          </p:nvPr>
+        </p:nvSpPr>
+        <p:spPr>
+          <a:xfrm>
+            <a:off x="311700" y="445025"/>
+            <a:ext cx="1898700" cy="572700"/>
+          </a:xfrm>
+          <a:prstGeom prst="rect">
+            <a:avLst/>
+          </a:prstGeom>
+        </p:spPr>
+        <p:txBody>
+          <a:bodyPr anchorCtr="0" anchor="t" bIns="91425" lIns="91425" spcFirstLastPara="1" rIns="91425" wrap="square" tIns="91425">
+            <a:normAutofit fontScale="90000"/>
+          </a:bodyPr>
+          <a:lstStyle/>
+          <a:p>
+            <a:pPr indent="0" lvl="0" marL="0" rtl="0" algn="l">
+              <a:lnSpc>
+                <a:spcPct val="115000"/>
+              </a:lnSpc>
+              <a:spcBef>
+                <a:spcPts val="2400"/>
+              </a:spcBef>
+              <a:spcAft>
+                <a:spcPts val="0"/>
+              </a:spcAft>
+              <a:buNone/>
+            </a:pPr>
+            <a:r>
+              <a:rPr lang="iw"/>
+              <a:t>Members</a:t>
+            </a:r>
+            <a:endParaRPr b="1" sz="2300"/>
+          </a:p>
+          <a:p>
+            <a:pPr indent="0" lvl="0" marL="0" rtl="0" algn="l">
+              <a:spcBef>
+                <a:spcPts val="400"/>
+              </a:spcBef>
+              <a:spcAft>
+                <a:spcPts val="0"/>
+              </a:spcAft>
+              <a:buNone/>
+            </a:pPr>
+            <a:r>
+              <a:t/>
+            </a:r>
+            <a:endParaRPr/>
+          </a:p>
+        </p:txBody>
+      </p:sp>
+      <p:sp>
+        <p:nvSpPr>
+          <p:cNvPr id="64" name="Google Shape;64;p14"/>
+          <p:cNvSpPr txBox="1"/>
+          <p:nvPr>
+            <p:ph idx="4294967295" type="body"/>
+          </p:nvPr>
+        </p:nvSpPr>
+        <p:spPr>
+          <a:xfrm>
+            <a:off x="808700" y="4624400"/>
+            <a:ext cx="3629100" cy="486000"/>
+          </a:xfrm>
+          <a:prstGeom prst="rect">
+            <a:avLst/>
+          </a:prstGeom>
+        </p:spPr>
+        <p:txBody>
+          <a:bodyPr anchorCtr="0" anchor="t" bIns="91425" lIns="91425" spcFirstLastPara="1" rIns="91425" wrap="square" tIns="91425">
+            <a:normAutofit/>
+          </a:bodyPr>
+          <a:lstStyle/>
+          <a:p>
+            <a:pPr indent="0" lvl="0" marL="0" rtl="0" algn="ctr">
+              <a:spcBef>
+                <a:spcPts val="0"/>
+              </a:spcBef>
+              <a:spcAft>
+                <a:spcPts val="1200"/>
+              </a:spcAft>
+              <a:buNone/>
+            </a:pPr>
+            <a:r>
+              <a:rPr lang="iw"/>
+              <a:t>Shahar Berenson</a:t>
+            </a:r>
+            <a:endParaRPr/>
+          </a:p>
+        </p:txBody>
+      </p:sp>
+      <p:pic>
+        <p:nvPicPr>
+          <p:cNvPr id="65" name="Google Shape;65;p14"/>
+          <p:cNvPicPr preferRelativeResize="0"/>
+          <p:nvPr/>
+        </p:nvPicPr>
+        <p:blipFill>
+          <a:blip r:embed="rId3">
+            <a:alphaModFix/>
+          </a:blip>
+          <a:stretch>
+            <a:fillRect/>
+          </a:stretch>
+        </p:blipFill>
+        <p:spPr>
+          <a:xfrm>
+            <a:off x="808788" y="976313"/>
+            <a:ext cx="3629025" cy="3648075"/>
+          </a:xfrm>
+          <a:prstGeom prst="rect">
+            <a:avLst/>
+          </a:prstGeom>
+          <a:noFill/>
+          <a:ln>
+            <a:noFill/>
+          </a:ln>
+        </p:spPr>
+      </p:pic>
+      <p:sp>
+        <p:nvSpPr>
+          <p:cNvPr id="66" name="Google Shape;66;p14"/>
+          <p:cNvSpPr txBox="1"/>
+          <p:nvPr>
+            <p:ph idx="4294967295" type="body"/>
+          </p:nvPr>
+        </p:nvSpPr>
+        <p:spPr>
+          <a:xfrm>
+            <a:off x="4870888" y="4624400"/>
+            <a:ext cx="3629100" cy="486000"/>
+          </a:xfrm>
+          <a:prstGeom prst="rect">
+            <a:avLst/>
+          </a:prstGeom>
+        </p:spPr>
+        <p:txBody>
+          <a:bodyPr anchorCtr="0" anchor="t" bIns="91425" lIns="91425" spcFirstLastPara="1" rIns="91425" wrap="square" tIns="91425">
+            <a:normAutofit/>
+          </a:bodyPr>
+          <a:lstStyle/>
+          <a:p>
+            <a:pPr indent="0" lvl="0" marL="0" rtl="0" algn="ctr">
+              <a:spcBef>
+                <a:spcPts val="0"/>
+              </a:spcBef>
+              <a:spcAft>
+                <a:spcPts val="1200"/>
+              </a:spcAft>
+              <a:buNone/>
+            </a:pPr>
+            <a:r>
+              <a:rPr lang="iw"/>
+              <a:t>Shlomi Fridman</a:t>
+            </a:r>
+            <a:endParaRPr/>
+          </a:p>
+        </p:txBody>
+      </p:sp>
+      <p:pic>
+        <p:nvPicPr>
+          <p:cNvPr id="67" name="Google Shape;67;p14" title="file.jpg"/>
+          <p:cNvPicPr preferRelativeResize="0"/>
+          <p:nvPr/>
+        </p:nvPicPr>
+        <p:blipFill>
+          <a:blip r:embed="rId4">
+            <a:alphaModFix/>
+          </a:blip>
+          <a:stretch>
+            <a:fillRect/>
+          </a:stretch>
+        </p:blipFill>
+        <p:spPr>
+          <a:xfrm>
+            <a:off x="4870900" y="985800"/>
+            <a:ext cx="3629100" cy="3629100"/>
+          </a:xfrm>
+          <a:prstGeom prst="rect">
+            <a:avLst/>
+          </a:prstGeom>
+          <a:noFill/>
+          <a:ln>
+            <a:noFill/>
+          </a:ln>
+        </p:spPr>
+      </p:pic>
+    </p:spTree>
+  </p:cSld>
+  <p:clrMapOvr>
+    <a:masterClrMapping/>
+  </p:clrMapOvr>
+</p:sld>
+</file>
+
+<file path=ppt/slides/slide20.xml><?xml version="1.0" encoding="utf-8"?>
 <p:sld xmlns:a="http://schemas.openxmlformats.org/drawingml/2006/main" xmlns:r="http://schemas.openxmlformats.org/officeDocument/2006/relationships" xmlns:mc="http://schemas.openxmlformats.org/markup-compatibility/2006" xmlns:mv="urn:schemas-microsoft-com:mac:vml" xmlns:p="http://schemas.openxmlformats.org/presentationml/2006/main" xmlns:c="http://schemas.openxmlformats.org/drawingml/2006/chart" xmlns:dgm="http://schemas.openxmlformats.org/drawingml/2006/diagram" xmlns:o="urn:schemas-microsoft-com:office:office" xmlns:v="urn:schemas-microsoft-com:vml" xmlns:pvml="urn:schemas-microsoft-com:office:powerpoint" xmlns:com="http://schemas.openxmlformats.org/drawingml/2006/compatibility" xmlns:p14="http://schemas.microsoft.com/office/powerpoint/2010/main" xmlns:p15="http://schemas.microsoft.com/office/powerpoint/2012/main" xmlns:ahyp="http://schemas.microsoft.com/office/drawing/2018/hyperlinkcolor">
   <p:cSld>
     <p:spTree>
@@ -10032,7 +10178,7 @@
       </p:grpSpPr>
       <p:sp>
         <p:nvSpPr>
-          <p:cNvPr id="202" name="Google Shape;202;p33"/>
+          <p:cNvPr id="202" name="Google Shape;202;p32"/>
           <p:cNvSpPr txBox="1"/>
           <p:nvPr>
             <p:ph type="title"/>
@@ -10064,7 +10210,7 @@
             </a:pPr>
             <a:r>
               <a:rPr lang="iw"/>
-              <a:t>Top models in each eligibility category - CAFV Eligible</a:t>
+              <a:t>Mean of Top 3 Make of each CAFV Eligibility</a:t>
             </a:r>
             <a:endParaRPr/>
           </a:p>
@@ -10072,7 +10218,7 @@
       </p:sp>
       <p:sp>
         <p:nvSpPr>
-          <p:cNvPr id="203" name="Google Shape;203;p33"/>
+          <p:cNvPr id="203" name="Google Shape;203;p32"/>
           <p:cNvSpPr txBox="1"/>
           <p:nvPr>
             <p:ph idx="1" type="body"/>
@@ -10080,8 +10226,8 @@
         </p:nvSpPr>
         <p:spPr>
           <a:xfrm>
-            <a:off x="311700" y="1152475"/>
-            <a:ext cx="8520600" cy="651900"/>
+            <a:off x="0" y="1017725"/>
+            <a:ext cx="3024600" cy="4002600"/>
           </a:xfrm>
           <a:prstGeom prst="rect">
             <a:avLst/>
@@ -10089,42 +10235,97 @@
         </p:spPr>
         <p:txBody>
           <a:bodyPr anchorCtr="0" anchor="t" bIns="91425" lIns="91425" spcFirstLastPara="1" rIns="91425" wrap="square" tIns="91425">
-            <a:noAutofit/>
+            <a:normAutofit/>
           </a:bodyPr>
           <a:lstStyle/>
           <a:p>
             <a:pPr indent="0" lvl="0" marL="0" rtl="0" algn="l">
-              <a:lnSpc>
-                <a:spcPct val="95000"/>
-              </a:lnSpc>
-              <a:spcBef>
-                <a:spcPts val="0"/>
-              </a:spcBef>
-              <a:spcAft>
+              <a:spcBef>
+                <a:spcPts val="0"/>
+              </a:spcBef>
+              <a:spcAft>
+                <a:spcPts val="0"/>
+              </a:spcAft>
+              <a:buNone/>
+            </a:pPr>
+            <a:r>
+              <a:rPr lang="iw"/>
+              <a:t>Conclusion:  </a:t>
+            </a:r>
+            <a:endParaRPr/>
+          </a:p>
+          <a:p>
+            <a:pPr indent="-342900" lvl="0" marL="457200" rtl="0" algn="l">
+              <a:spcBef>
                 <a:spcPts val="1200"/>
-              </a:spcAft>
-              <a:buSzPts val="935"/>
-              <a:buNone/>
+              </a:spcBef>
+              <a:spcAft>
+                <a:spcPts val="0"/>
+              </a:spcAft>
+              <a:buSzPts val="1800"/>
+              <a:buChar char="-"/>
             </a:pPr>
             <a:r>
-              <a:rPr lang="iw" sz="1629"/>
-              <a:t>Conclusion</a:t>
-            </a:r>
-            <a:r>
-              <a:rPr lang="iw" sz="1629"/>
-              <a:t>: The Tesla Model 3 is the top model that is Eligible with close to 14 thousands vehicles, followed by the Nissan Leaf with ~10 </a:t>
-            </a:r>
-            <a:r>
-              <a:rPr lang="iw" sz="1629"/>
-              <a:t>thousands vehicles</a:t>
-            </a:r>
-            <a:endParaRPr sz="1629"/>
+              <a:rPr lang="iw"/>
+              <a:t>TESLA has the highest mean of Electric Range</a:t>
+            </a:r>
+            <a:endParaRPr/>
+          </a:p>
+          <a:p>
+            <a:pPr indent="-342900" lvl="0" marL="457200" rtl="0" algn="l">
+              <a:spcBef>
+                <a:spcPts val="0"/>
+              </a:spcBef>
+              <a:spcAft>
+                <a:spcPts val="0"/>
+              </a:spcAft>
+              <a:buSzPts val="1800"/>
+              <a:buChar char="-"/>
+            </a:pPr>
+            <a:r>
+              <a:rPr lang="iw"/>
+              <a:t>Unknown </a:t>
+            </a:r>
+            <a:r>
+              <a:rPr lang="iw"/>
+              <a:t>eligibility</a:t>
+            </a:r>
+            <a:r>
+              <a:rPr lang="iw"/>
+              <a:t> has no known electric range.</a:t>
+            </a:r>
+            <a:endParaRPr/>
+          </a:p>
+          <a:p>
+            <a:pPr indent="-342900" lvl="0" marL="457200" rtl="0" algn="l">
+              <a:spcBef>
+                <a:spcPts val="0"/>
+              </a:spcBef>
+              <a:spcAft>
+                <a:spcPts val="0"/>
+              </a:spcAft>
+              <a:buSzPts val="1800"/>
+              <a:buChar char="-"/>
+            </a:pPr>
+            <a:r>
+              <a:rPr lang="iw"/>
+              <a:t>Low battery not eligibility vehicles have lower electric range than </a:t>
+            </a:r>
+            <a:r>
+              <a:rPr lang="iw"/>
+              <a:t>eligible </a:t>
+            </a:r>
+            <a:r>
+              <a:rPr lang="iw"/>
+              <a:t>vehicles</a:t>
+            </a:r>
+            <a:endParaRPr/>
           </a:p>
         </p:txBody>
       </p:sp>
       <p:pic>
         <p:nvPicPr>
-          <p:cNvPr id="204" name="Google Shape;204;p33"/>
+          <p:cNvPr id="204" name="Google Shape;204;p32"/>
           <p:cNvPicPr preferRelativeResize="0"/>
           <p:nvPr/>
         </p:nvPicPr>
@@ -10138,8 +10339,8 @@
         </p:blipFill>
         <p:spPr>
           <a:xfrm>
-            <a:off x="2567900" y="1873050"/>
-            <a:ext cx="6497150" cy="3204675"/>
+            <a:off x="3024523" y="1420348"/>
+            <a:ext cx="6119475" cy="3723150"/>
           </a:xfrm>
           <a:prstGeom prst="rect">
             <a:avLst/>
@@ -10158,7 +10359,7 @@
 </p:sld>
 </file>
 
-<file path=ppt/slides/slide22.xml><?xml version="1.0" encoding="utf-8"?>
+<file path=ppt/slides/slide21.xml><?xml version="1.0" encoding="utf-8"?>
 <p:sld xmlns:a="http://schemas.openxmlformats.org/drawingml/2006/main" xmlns:r="http://schemas.openxmlformats.org/officeDocument/2006/relationships" xmlns:mc="http://schemas.openxmlformats.org/markup-compatibility/2006" xmlns:mv="urn:schemas-microsoft-com:mac:vml" xmlns:p="http://schemas.openxmlformats.org/presentationml/2006/main" xmlns:c="http://schemas.openxmlformats.org/drawingml/2006/chart" xmlns:dgm="http://schemas.openxmlformats.org/drawingml/2006/diagram" xmlns:o="urn:schemas-microsoft-com:office:office" xmlns:v="urn:schemas-microsoft-com:vml" xmlns:pvml="urn:schemas-microsoft-com:office:powerpoint" xmlns:com="http://schemas.openxmlformats.org/drawingml/2006/compatibility" xmlns:p14="http://schemas.microsoft.com/office/powerpoint/2010/main" xmlns:p15="http://schemas.microsoft.com/office/powerpoint/2012/main" xmlns:ahyp="http://schemas.microsoft.com/office/drawing/2018/hyperlinkcolor">
   <p:cSld>
     <p:spTree>
@@ -10177,7 +10378,7 @@
       </p:grpSpPr>
       <p:sp>
         <p:nvSpPr>
-          <p:cNvPr id="209" name="Google Shape;209;p34"/>
+          <p:cNvPr id="209" name="Google Shape;209;p33"/>
           <p:cNvSpPr txBox="1"/>
           <p:nvPr>
             <p:ph type="title"/>
@@ -10208,20 +10409,16 @@
               <a:buNone/>
             </a:pPr>
             <a:r>
-              <a:rPr lang="iw" sz="2650"/>
-              <a:t>Top models in each eligibility category - </a:t>
-            </a:r>
-            <a:r>
-              <a:rPr lang="iw" sz="2133"/>
-              <a:t>CAFV eligibility unknown</a:t>
-            </a:r>
-            <a:endParaRPr sz="2133"/>
+              <a:rPr lang="iw"/>
+              <a:t>Top models in each eligibility category - CAFV Eligible</a:t>
+            </a:r>
+            <a:endParaRPr/>
           </a:p>
         </p:txBody>
       </p:sp>
       <p:sp>
         <p:nvSpPr>
-          <p:cNvPr id="210" name="Google Shape;210;p34"/>
+          <p:cNvPr id="210" name="Google Shape;210;p33"/>
           <p:cNvSpPr txBox="1"/>
           <p:nvPr>
             <p:ph idx="1" type="body"/>
@@ -10238,30 +10435,42 @@
         </p:spPr>
         <p:txBody>
           <a:bodyPr anchorCtr="0" anchor="t" bIns="91425" lIns="91425" spcFirstLastPara="1" rIns="91425" wrap="square" tIns="91425">
-            <a:normAutofit/>
+            <a:noAutofit/>
           </a:bodyPr>
           <a:lstStyle/>
           <a:p>
             <a:pPr indent="0" lvl="0" marL="0" rtl="0" algn="l">
+              <a:lnSpc>
+                <a:spcPct val="95000"/>
+              </a:lnSpc>
               <a:spcBef>
                 <a:spcPts val="0"/>
               </a:spcBef>
               <a:spcAft>
                 <a:spcPts val="1200"/>
               </a:spcAft>
+              <a:buSzPts val="935"/>
               <a:buNone/>
             </a:pPr>
             <a:r>
-              <a:rPr lang="iw"/>
-              <a:t>Conclusion: The Tesla Model Y is the model that leads followed by the Model 3</a:t>
-            </a:r>
-            <a:endParaRPr/>
+              <a:rPr lang="iw" sz="1629"/>
+              <a:t>Conclusion</a:t>
+            </a:r>
+            <a:r>
+              <a:rPr lang="iw" sz="1629"/>
+              <a:t>: The Tesla Model 3 is the top model that is Eligible with close to 14 thousands vehicles, followed by the Nissan Leaf with ~10 </a:t>
+            </a:r>
+            <a:r>
+              <a:rPr lang="iw" sz="1629"/>
+              <a:t>thousands vehicles</a:t>
+            </a:r>
+            <a:endParaRPr sz="1629"/>
           </a:p>
         </p:txBody>
       </p:sp>
       <p:pic>
         <p:nvPicPr>
-          <p:cNvPr id="211" name="Google Shape;211;p34"/>
+          <p:cNvPr id="211" name="Google Shape;211;p33"/>
           <p:cNvPicPr preferRelativeResize="0"/>
           <p:nvPr/>
         </p:nvPicPr>
@@ -10275,8 +10484,8 @@
         </p:blipFill>
         <p:spPr>
           <a:xfrm>
-            <a:off x="2259449" y="1747750"/>
-            <a:ext cx="6884549" cy="3395750"/>
+            <a:off x="2567900" y="1873050"/>
+            <a:ext cx="6497150" cy="3204675"/>
           </a:xfrm>
           <a:prstGeom prst="rect">
             <a:avLst/>
@@ -10295,7 +10504,7 @@
 </p:sld>
 </file>
 
-<file path=ppt/slides/slide23.xml><?xml version="1.0" encoding="utf-8"?>
+<file path=ppt/slides/slide22.xml><?xml version="1.0" encoding="utf-8"?>
 <p:sld xmlns:a="http://schemas.openxmlformats.org/drawingml/2006/main" xmlns:r="http://schemas.openxmlformats.org/officeDocument/2006/relationships" xmlns:mc="http://schemas.openxmlformats.org/markup-compatibility/2006" xmlns:mv="urn:schemas-microsoft-com:mac:vml" xmlns:p="http://schemas.openxmlformats.org/presentationml/2006/main" xmlns:c="http://schemas.openxmlformats.org/drawingml/2006/chart" xmlns:dgm="http://schemas.openxmlformats.org/drawingml/2006/diagram" xmlns:o="urn:schemas-microsoft-com:office:office" xmlns:v="urn:schemas-microsoft-com:vml" xmlns:pvml="urn:schemas-microsoft-com:office:powerpoint" xmlns:com="http://schemas.openxmlformats.org/drawingml/2006/compatibility" xmlns:p14="http://schemas.microsoft.com/office/powerpoint/2010/main" xmlns:p15="http://schemas.microsoft.com/office/powerpoint/2012/main" xmlns:ahyp="http://schemas.microsoft.com/office/drawing/2018/hyperlinkcolor">
   <p:cSld>
     <p:spTree>
@@ -10314,7 +10523,7 @@
       </p:grpSpPr>
       <p:sp>
         <p:nvSpPr>
-          <p:cNvPr id="216" name="Google Shape;216;p35"/>
+          <p:cNvPr id="216" name="Google Shape;216;p34"/>
           <p:cNvSpPr txBox="1"/>
           <p:nvPr>
             <p:ph type="title"/>
@@ -10345,16 +10554,20 @@
               <a:buNone/>
             </a:pPr>
             <a:r>
-              <a:rPr lang="iw"/>
-              <a:t>Top models in each eligibility category - Not CAFV eligible</a:t>
-            </a:r>
-            <a:endParaRPr/>
+              <a:rPr lang="iw" sz="2650"/>
+              <a:t>Top models in each eligibility category - </a:t>
+            </a:r>
+            <a:r>
+              <a:rPr lang="iw" sz="2133"/>
+              <a:t>CAFV eligibility unknown</a:t>
+            </a:r>
+            <a:endParaRPr sz="2133"/>
           </a:p>
         </p:txBody>
       </p:sp>
       <p:sp>
         <p:nvSpPr>
-          <p:cNvPr id="217" name="Google Shape;217;p35"/>
+          <p:cNvPr id="217" name="Google Shape;217;p34"/>
           <p:cNvSpPr txBox="1"/>
           <p:nvPr>
             <p:ph idx="1" type="body"/>
@@ -10371,7 +10584,7 @@
         </p:spPr>
         <p:txBody>
           <a:bodyPr anchorCtr="0" anchor="t" bIns="91425" lIns="91425" spcFirstLastPara="1" rIns="91425" wrap="square" tIns="91425">
-            <a:normAutofit fontScale="85000" lnSpcReduction="20000"/>
+            <a:normAutofit/>
           </a:bodyPr>
           <a:lstStyle/>
           <a:p>
@@ -10386,7 +10599,7 @@
             </a:pPr>
             <a:r>
               <a:rPr lang="iw"/>
-              <a:t>Conclusion: The JEEP Wrangler is the top model that is not eligible with over 4 thousands vehicles, followed by the Toyota Prius Prime with ~3600 vehicles</a:t>
+              <a:t>Conclusion: The Tesla Model Y is the model that leads followed by the Model 3</a:t>
             </a:r>
             <a:endParaRPr/>
           </a:p>
@@ -10394,7 +10607,7 @@
       </p:sp>
       <p:pic>
         <p:nvPicPr>
-          <p:cNvPr id="218" name="Google Shape;218;p35"/>
+          <p:cNvPr id="218" name="Google Shape;218;p34"/>
           <p:cNvPicPr preferRelativeResize="0"/>
           <p:nvPr/>
         </p:nvPicPr>
@@ -10408,8 +10621,8 @@
         </p:blipFill>
         <p:spPr>
           <a:xfrm>
-            <a:off x="2374274" y="1804375"/>
-            <a:ext cx="6769724" cy="3339125"/>
+            <a:off x="2259449" y="1747750"/>
+            <a:ext cx="6884549" cy="3395750"/>
           </a:xfrm>
           <a:prstGeom prst="rect">
             <a:avLst/>
@@ -10428,7 +10641,7 @@
 </p:sld>
 </file>
 
-<file path=ppt/slides/slide24.xml><?xml version="1.0" encoding="utf-8"?>
+<file path=ppt/slides/slide23.xml><?xml version="1.0" encoding="utf-8"?>
 <p:sld xmlns:a="http://schemas.openxmlformats.org/drawingml/2006/main" xmlns:r="http://schemas.openxmlformats.org/officeDocument/2006/relationships" xmlns:mc="http://schemas.openxmlformats.org/markup-compatibility/2006" xmlns:mv="urn:schemas-microsoft-com:mac:vml" xmlns:p="http://schemas.openxmlformats.org/presentationml/2006/main" xmlns:c="http://schemas.openxmlformats.org/drawingml/2006/chart" xmlns:dgm="http://schemas.openxmlformats.org/drawingml/2006/diagram" xmlns:o="urn:schemas-microsoft-com:office:office" xmlns:v="urn:schemas-microsoft-com:vml" xmlns:pvml="urn:schemas-microsoft-com:office:powerpoint" xmlns:com="http://schemas.openxmlformats.org/drawingml/2006/compatibility" xmlns:p14="http://schemas.microsoft.com/office/powerpoint/2010/main" xmlns:p15="http://schemas.microsoft.com/office/powerpoint/2012/main" xmlns:ahyp="http://schemas.microsoft.com/office/drawing/2018/hyperlinkcolor">
   <p:cSld>
     <p:spTree>
@@ -10447,7 +10660,140 @@
       </p:grpSpPr>
       <p:sp>
         <p:nvSpPr>
-          <p:cNvPr id="223" name="Google Shape;223;p36"/>
+          <p:cNvPr id="223" name="Google Shape;223;p35"/>
+          <p:cNvSpPr txBox="1"/>
+          <p:nvPr>
+            <p:ph type="title"/>
+          </p:nvPr>
+        </p:nvSpPr>
+        <p:spPr>
+          <a:xfrm>
+            <a:off x="311700" y="445025"/>
+            <a:ext cx="8520600" cy="572700"/>
+          </a:xfrm>
+          <a:prstGeom prst="rect">
+            <a:avLst/>
+          </a:prstGeom>
+        </p:spPr>
+        <p:txBody>
+          <a:bodyPr anchorCtr="0" anchor="t" bIns="91425" lIns="91425" spcFirstLastPara="1" rIns="91425" wrap="square" tIns="91425">
+            <a:normAutofit fontScale="90000"/>
+          </a:bodyPr>
+          <a:lstStyle/>
+          <a:p>
+            <a:pPr indent="0" lvl="0" marL="0" rtl="0" algn="l">
+              <a:spcBef>
+                <a:spcPts val="0"/>
+              </a:spcBef>
+              <a:spcAft>
+                <a:spcPts val="0"/>
+              </a:spcAft>
+              <a:buNone/>
+            </a:pPr>
+            <a:r>
+              <a:rPr lang="iw"/>
+              <a:t>Top models in each eligibility category - Not CAFV eligible</a:t>
+            </a:r>
+            <a:endParaRPr/>
+          </a:p>
+        </p:txBody>
+      </p:sp>
+      <p:sp>
+        <p:nvSpPr>
+          <p:cNvPr id="224" name="Google Shape;224;p35"/>
+          <p:cNvSpPr txBox="1"/>
+          <p:nvPr>
+            <p:ph idx="1" type="body"/>
+          </p:nvPr>
+        </p:nvSpPr>
+        <p:spPr>
+          <a:xfrm>
+            <a:off x="311700" y="1152475"/>
+            <a:ext cx="8520600" cy="651900"/>
+          </a:xfrm>
+          <a:prstGeom prst="rect">
+            <a:avLst/>
+          </a:prstGeom>
+        </p:spPr>
+        <p:txBody>
+          <a:bodyPr anchorCtr="0" anchor="t" bIns="91425" lIns="91425" spcFirstLastPara="1" rIns="91425" wrap="square" tIns="91425">
+            <a:normAutofit fontScale="85000" lnSpcReduction="20000"/>
+          </a:bodyPr>
+          <a:lstStyle/>
+          <a:p>
+            <a:pPr indent="0" lvl="0" marL="0" rtl="0" algn="l">
+              <a:spcBef>
+                <a:spcPts val="0"/>
+              </a:spcBef>
+              <a:spcAft>
+                <a:spcPts val="1200"/>
+              </a:spcAft>
+              <a:buNone/>
+            </a:pPr>
+            <a:r>
+              <a:rPr lang="iw"/>
+              <a:t>Conclusion: The JEEP Wrangler is the top model that is not eligible with over 4 thousands vehicles, followed by the Toyota Prius Prime with ~3600 vehicles</a:t>
+            </a:r>
+            <a:endParaRPr/>
+          </a:p>
+        </p:txBody>
+      </p:sp>
+      <p:pic>
+        <p:nvPicPr>
+          <p:cNvPr id="225" name="Google Shape;225;p35"/>
+          <p:cNvPicPr preferRelativeResize="0"/>
+          <p:nvPr/>
+        </p:nvPicPr>
+        <p:blipFill>
+          <a:blip r:embed="rId3">
+            <a:alphaModFix/>
+          </a:blip>
+          <a:stretch>
+            <a:fillRect/>
+          </a:stretch>
+        </p:blipFill>
+        <p:spPr>
+          <a:xfrm>
+            <a:off x="2374274" y="1804375"/>
+            <a:ext cx="6769724" cy="3339125"/>
+          </a:xfrm>
+          <a:prstGeom prst="rect">
+            <a:avLst/>
+          </a:prstGeom>
+          <a:noFill/>
+          <a:ln>
+            <a:noFill/>
+          </a:ln>
+        </p:spPr>
+      </p:pic>
+    </p:spTree>
+  </p:cSld>
+  <p:clrMapOvr>
+    <a:masterClrMapping/>
+  </p:clrMapOvr>
+</p:sld>
+</file>
+
+<file path=ppt/slides/slide24.xml><?xml version="1.0" encoding="utf-8"?>
+<p:sld xmlns:a="http://schemas.openxmlformats.org/drawingml/2006/main" xmlns:r="http://schemas.openxmlformats.org/officeDocument/2006/relationships" xmlns:mc="http://schemas.openxmlformats.org/markup-compatibility/2006" xmlns:mv="urn:schemas-microsoft-com:mac:vml" xmlns:p="http://schemas.openxmlformats.org/presentationml/2006/main" xmlns:c="http://schemas.openxmlformats.org/drawingml/2006/chart" xmlns:dgm="http://schemas.openxmlformats.org/drawingml/2006/diagram" xmlns:o="urn:schemas-microsoft-com:office:office" xmlns:v="urn:schemas-microsoft-com:vml" xmlns:pvml="urn:schemas-microsoft-com:office:powerpoint" xmlns:com="http://schemas.openxmlformats.org/drawingml/2006/compatibility" xmlns:p14="http://schemas.microsoft.com/office/powerpoint/2010/main" xmlns:p15="http://schemas.microsoft.com/office/powerpoint/2012/main" xmlns:ahyp="http://schemas.microsoft.com/office/drawing/2018/hyperlinkcolor">
+  <p:cSld>
+    <p:spTree>
+      <p:nvGrpSpPr>
+        <p:cNvPr id="229" name="Shape 229"/>
+        <p:cNvGrpSpPr/>
+        <p:nvPr/>
+      </p:nvGrpSpPr>
+      <p:grpSpPr>
+        <a:xfrm>
+          <a:off x="0" y="0"/>
+          <a:ext cx="0" cy="0"/>
+          <a:chOff x="0" y="0"/>
+          <a:chExt cx="0" cy="0"/>
+        </a:xfrm>
+      </p:grpSpPr>
+      <p:sp>
+        <p:nvSpPr>
+          <p:cNvPr id="230" name="Google Shape;230;p36"/>
           <p:cNvSpPr txBox="1"/>
           <p:nvPr>
             <p:ph type="title"/>
@@ -10487,7 +10833,7 @@
       </p:sp>
       <p:pic>
         <p:nvPicPr>
-          <p:cNvPr id="224" name="Google Shape;224;p36"/>
+          <p:cNvPr id="231" name="Google Shape;231;p36"/>
           <p:cNvPicPr preferRelativeResize="0"/>
           <p:nvPr/>
         </p:nvPicPr>
@@ -10526,7 +10872,7 @@
   <p:cSld>
     <p:spTree>
       <p:nvGrpSpPr>
-        <p:cNvPr id="70" name="Shape 70"/>
+        <p:cNvPr id="71" name="Shape 71"/>
         <p:cNvGrpSpPr/>
         <p:nvPr/>
       </p:nvGrpSpPr>
@@ -10540,7 +10886,7 @@
       </p:grpSpPr>
       <p:sp>
         <p:nvSpPr>
-          <p:cNvPr id="71" name="Google Shape;71;p15"/>
+          <p:cNvPr id="72" name="Google Shape;72;p15"/>
           <p:cNvSpPr txBox="1"/>
           <p:nvPr>
             <p:ph type="title"/>
@@ -10619,7 +10965,7 @@
       </p:sp>
       <p:sp>
         <p:nvSpPr>
-          <p:cNvPr id="72" name="Google Shape;72;p15"/>
+          <p:cNvPr id="73" name="Google Shape;73;p15"/>
           <p:cNvSpPr txBox="1"/>
           <p:nvPr>
             <p:ph idx="1" type="body"/>
@@ -10689,7 +11035,7 @@
             </a:pPr>
             <a:r>
               <a:rPr lang="iw"/>
-              <a:t>Data fetch date: May 17th 2025</a:t>
+              <a:t>metadata: May 17th 2025</a:t>
             </a:r>
             <a:endParaRPr/>
           </a:p>
@@ -10706,7 +11052,7 @@
             </a:pPr>
             <a:r>
               <a:rPr lang="iw"/>
-              <a:t>235,693 rows x </a:t>
+              <a:t>246,138 rows x </a:t>
             </a:r>
             <a:r>
               <a:rPr lang="iw"/>
@@ -10718,7 +11064,7 @@
       </p:sp>
       <p:pic>
         <p:nvPicPr>
-          <p:cNvPr id="73" name="Google Shape;73;p15"/>
+          <p:cNvPr id="74" name="Google Shape;74;p15"/>
           <p:cNvPicPr preferRelativeResize="0"/>
           <p:nvPr/>
         </p:nvPicPr>
@@ -10757,7 +11103,7 @@
   <p:cSld>
     <p:spTree>
       <p:nvGrpSpPr>
-        <p:cNvPr id="77" name="Shape 77"/>
+        <p:cNvPr id="78" name="Shape 78"/>
         <p:cNvGrpSpPr/>
         <p:nvPr/>
       </p:nvGrpSpPr>
@@ -10771,7 +11117,7 @@
       </p:grpSpPr>
       <p:sp>
         <p:nvSpPr>
-          <p:cNvPr id="78" name="Google Shape;78;p16"/>
+          <p:cNvPr id="79" name="Google Shape;79;p16"/>
           <p:cNvSpPr txBox="1"/>
           <p:nvPr>
             <p:ph type="title"/>
@@ -10811,7 +11157,7 @@
       </p:sp>
       <p:graphicFrame>
         <p:nvGraphicFramePr>
-          <p:cNvPr id="79" name="Google Shape;79;p16"/>
+          <p:cNvPr id="80" name="Google Shape;80;p16"/>
           <p:cNvGraphicFramePr/>
           <p:nvPr/>
         </p:nvGraphicFramePr>
@@ -10824,7 +11170,7 @@
             <a:tbl>
               <a:tblPr>
                 <a:noFill/>
-                <a:tableStyleId>{3A80F15C-4DF9-42E0-8A9D-077995C2CD54}</a:tableStyleId>
+                <a:tableStyleId>{A1A136FA-2B72-4651-A519-8C62079C87FA}</a:tableStyleId>
               </a:tblPr>
               <a:tblGrid>
                 <a:gridCol w="2019075"/>
@@ -11528,7 +11874,7 @@
                           <a:cs typeface="Roboto"/>
                           <a:sym typeface="Roboto"/>
                         </a:rPr>
-                        <a:t>Type of EV (Battery Electric Vehicle (BEV), Plug-in Hybrid Electric Vehicle (PHEV), etc.).</a:t>
+                        <a:t>Type of EV (Battery Electric Vehicle (BEV), Plug-in Hybrid Electric Vehicle (PHEV)).</a:t>
                       </a:r>
                       <a:endParaRPr sz="1200">
                         <a:solidFill>
@@ -11561,7 +11907,7 @@
   <p:cSld>
     <p:spTree>
       <p:nvGrpSpPr>
-        <p:cNvPr id="83" name="Shape 83"/>
+        <p:cNvPr id="84" name="Shape 84"/>
         <p:cNvGrpSpPr/>
         <p:nvPr/>
       </p:nvGrpSpPr>
@@ -11575,7 +11921,7 @@
       </p:grpSpPr>
       <p:sp>
         <p:nvSpPr>
-          <p:cNvPr id="84" name="Google Shape;84;p17"/>
+          <p:cNvPr id="85" name="Google Shape;85;p17"/>
           <p:cNvSpPr txBox="1"/>
           <p:nvPr>
             <p:ph type="title"/>
@@ -11615,7 +11961,7 @@
       </p:sp>
       <p:graphicFrame>
         <p:nvGraphicFramePr>
-          <p:cNvPr id="85" name="Google Shape;85;p17"/>
+          <p:cNvPr id="86" name="Google Shape;86;p17"/>
           <p:cNvGraphicFramePr/>
           <p:nvPr/>
         </p:nvGraphicFramePr>
@@ -11628,7 +11974,7 @@
             <a:tbl>
               <a:tblPr>
                 <a:noFill/>
-                <a:tableStyleId>{3A80F15C-4DF9-42E0-8A9D-077995C2CD54}</a:tableStyleId>
+                <a:tableStyleId>{A1A136FA-2B72-4651-A519-8C62079C87FA}</a:tableStyleId>
               </a:tblPr>
               <a:tblGrid>
                 <a:gridCol w="2019050"/>
@@ -12323,7 +12669,7 @@
   <p:cSld>
     <p:spTree>
       <p:nvGrpSpPr>
-        <p:cNvPr id="89" name="Shape 89"/>
+        <p:cNvPr id="90" name="Shape 90"/>
         <p:cNvGrpSpPr/>
         <p:nvPr/>
       </p:nvGrpSpPr>
@@ -12337,7 +12683,7 @@
       </p:grpSpPr>
       <p:sp>
         <p:nvSpPr>
-          <p:cNvPr id="90" name="Google Shape;90;p18"/>
+          <p:cNvPr id="91" name="Google Shape;91;p18"/>
           <p:cNvSpPr txBox="1"/>
           <p:nvPr>
             <p:ph type="title"/>
@@ -12377,7 +12723,7 @@
       </p:sp>
       <p:sp>
         <p:nvSpPr>
-          <p:cNvPr id="91" name="Google Shape;91;p18"/>
+          <p:cNvPr id="92" name="Google Shape;92;p18"/>
           <p:cNvSpPr txBox="1"/>
           <p:nvPr>
             <p:ph idx="1" type="body"/>
@@ -12485,7 +12831,7 @@
       </p:sp>
       <p:pic>
         <p:nvPicPr>
-          <p:cNvPr id="92" name="Google Shape;92;p18"/>
+          <p:cNvPr id="93" name="Google Shape;93;p18"/>
           <p:cNvPicPr preferRelativeResize="0"/>
           <p:nvPr/>
         </p:nvPicPr>
@@ -12524,7 +12870,7 @@
   <p:cSld>
     <p:spTree>
       <p:nvGrpSpPr>
-        <p:cNvPr id="96" name="Shape 96"/>
+        <p:cNvPr id="97" name="Shape 97"/>
         <p:cNvGrpSpPr/>
         <p:nvPr/>
       </p:nvGrpSpPr>
@@ -12538,7 +12884,7 @@
       </p:grpSpPr>
       <p:sp>
         <p:nvSpPr>
-          <p:cNvPr id="97" name="Google Shape;97;p19"/>
+          <p:cNvPr id="98" name="Google Shape;98;p19"/>
           <p:cNvSpPr txBox="1"/>
           <p:nvPr>
             <p:ph type="title"/>
@@ -12578,7 +12924,7 @@
       </p:sp>
       <p:sp>
         <p:nvSpPr>
-          <p:cNvPr id="98" name="Google Shape;98;p19"/>
+          <p:cNvPr id="99" name="Google Shape;99;p19"/>
           <p:cNvSpPr txBox="1"/>
           <p:nvPr>
             <p:ph idx="1" type="body"/>
@@ -12653,7 +12999,7 @@
       </p:sp>
       <p:pic>
         <p:nvPicPr>
-          <p:cNvPr id="99" name="Google Shape;99;p19"/>
+          <p:cNvPr id="100" name="Google Shape;100;p19"/>
           <p:cNvPicPr preferRelativeResize="0"/>
           <p:nvPr/>
         </p:nvPicPr>
@@ -12681,7 +13027,7 @@
       </p:pic>
       <p:pic>
         <p:nvPicPr>
-          <p:cNvPr id="100" name="Google Shape;100;p19"/>
+          <p:cNvPr id="101" name="Google Shape;101;p19"/>
           <p:cNvPicPr preferRelativeResize="0"/>
           <p:nvPr/>
         </p:nvPicPr>
@@ -12720,7 +13066,7 @@
   <p:cSld>
     <p:spTree>
       <p:nvGrpSpPr>
-        <p:cNvPr id="104" name="Shape 104"/>
+        <p:cNvPr id="105" name="Shape 105"/>
         <p:cNvGrpSpPr/>
         <p:nvPr/>
       </p:nvGrpSpPr>
@@ -12734,7 +13080,7 @@
       </p:grpSpPr>
       <p:sp>
         <p:nvSpPr>
-          <p:cNvPr id="105" name="Google Shape;105;p20"/>
+          <p:cNvPr id="106" name="Google Shape;106;p20"/>
           <p:cNvSpPr txBox="1"/>
           <p:nvPr>
             <p:ph type="title"/>
@@ -12774,7 +13120,7 @@
       </p:sp>
       <p:sp>
         <p:nvSpPr>
-          <p:cNvPr id="106" name="Google Shape;106;p20"/>
+          <p:cNvPr id="107" name="Google Shape;107;p20"/>
           <p:cNvSpPr txBox="1"/>
           <p:nvPr>
             <p:ph idx="1" type="body"/>
@@ -12987,7 +13333,7 @@
                 <a:spcPts val="0"/>
               </a:spcAft>
               <a:buClr>
-                <a:srgbClr val="FF9900"/>
+                <a:srgbClr val="38761D"/>
               </a:buClr>
               <a:buSzPts val="1800"/>
               <a:buChar char="●"/>
@@ -12995,7 +13341,7 @@
             <a:r>
               <a:rPr lang="iw">
                 <a:solidFill>
-                  <a:srgbClr val="FF9900"/>
+                  <a:srgbClr val="38761D"/>
                 </a:solidFill>
               </a:rPr>
               <a:t>Top 5 models</a:t>
@@ -13110,7 +13456,7 @@
                   <a:srgbClr val="FF0000"/>
                 </a:solidFill>
               </a:rPr>
-              <a:t>Amount of Top 3 Make per each CAFV </a:t>
+              <a:t>Top 3 Make per CAFV </a:t>
             </a:r>
             <a:r>
               <a:rPr lang="iw">
@@ -13146,7 +13492,7 @@
                   <a:srgbClr val="FF0000"/>
                 </a:solidFill>
               </a:rPr>
-              <a:t>Mean Electric Range of Top 3 Make per each CAFV Eligibility</a:t>
+              <a:t>Mean Electric Range of Top 3 Make per CAFV Eligibility</a:t>
             </a:r>
             <a:endParaRPr>
               <a:solidFill>
@@ -13174,7 +13520,23 @@
                   <a:srgbClr val="FF0000"/>
                 </a:solidFill>
               </a:rPr>
-              <a:t>Top models of Make per each CAFV </a:t>
+              <a:t>Top models </a:t>
+            </a:r>
+            <a:r>
+              <a:rPr lang="iw">
+                <a:solidFill>
+                  <a:srgbClr val="FF0000"/>
+                </a:solidFill>
+              </a:rPr>
+              <a:t>of Make </a:t>
+            </a:r>
+            <a:r>
+              <a:rPr lang="iw">
+                <a:solidFill>
+                  <a:srgbClr val="FF0000"/>
+                </a:solidFill>
+              </a:rPr>
+              <a:t>per CAFV </a:t>
             </a:r>
             <a:r>
               <a:rPr lang="iw">
@@ -13194,7 +13556,7 @@
       </p:sp>
       <p:sp>
         <p:nvSpPr>
-          <p:cNvPr id="107" name="Google Shape;107;p20"/>
+          <p:cNvPr id="108" name="Google Shape;108;p20"/>
           <p:cNvSpPr txBox="1"/>
           <p:nvPr/>
         </p:nvSpPr>
@@ -13394,7 +13756,7 @@
   <p:cSld>
     <p:spTree>
       <p:nvGrpSpPr>
-        <p:cNvPr id="111" name="Shape 111"/>
+        <p:cNvPr id="112" name="Shape 112"/>
         <p:cNvGrpSpPr/>
         <p:nvPr/>
       </p:nvGrpSpPr>
@@ -13408,7 +13770,7 @@
       </p:grpSpPr>
       <p:sp>
         <p:nvSpPr>
-          <p:cNvPr id="112" name="Google Shape;112;p21"/>
+          <p:cNvPr id="113" name="Google Shape;113;p21"/>
           <p:cNvSpPr txBox="1"/>
           <p:nvPr>
             <p:ph type="title"/>
@@ -13448,7 +13810,7 @@
       </p:sp>
       <p:sp>
         <p:nvSpPr>
-          <p:cNvPr id="113" name="Google Shape;113;p21"/>
+          <p:cNvPr id="114" name="Google Shape;114;p21"/>
           <p:cNvSpPr txBox="1"/>
           <p:nvPr>
             <p:ph idx="1" type="body"/>
@@ -13457,7 +13819,7 @@
         <p:spPr>
           <a:xfrm>
             <a:off x="311700" y="1152475"/>
-            <a:ext cx="8520600" cy="3416400"/>
+            <a:ext cx="5010000" cy="3416400"/>
           </a:xfrm>
           <a:prstGeom prst="rect">
             <a:avLst/>
@@ -13480,21 +13842,14 @@
             </a:pPr>
             <a:r>
               <a:rPr lang="iw"/>
-              <a:t>Conclusion: Most vehicles are from Washington</a:t>
+              <a:t>Conclusion: Most vehicles in the databset are from from Washington, roughly ~235,000 in WA followed by ~100 in CA</a:t>
             </a:r>
             <a:br>
               <a:rPr lang="iw"/>
             </a:br>
             <a:r>
               <a:rPr lang="iw"/>
-              <a:t>~235,000 in WA followed by ~100 in CA</a:t>
-            </a:r>
-            <a:br>
-              <a:rPr lang="iw"/>
-            </a:br>
-            <a:r>
-              <a:rPr lang="iw"/>
-              <a:t>Any vehicles not from WA are outliers</a:t>
+              <a:t>Thus we concluded that vehicles not from WA are outliers</a:t>
             </a:r>
             <a:endParaRPr/>
           </a:p>
@@ -13502,7 +13857,7 @@
       </p:sp>
       <p:pic>
         <p:nvPicPr>
-          <p:cNvPr id="114" name="Google Shape;114;p21"/>
+          <p:cNvPr id="115" name="Google Shape;115;p21"/>
           <p:cNvPicPr preferRelativeResize="0"/>
           <p:nvPr/>
         </p:nvPicPr>
@@ -13530,7 +13885,7 @@
       </p:pic>
       <p:sp>
         <p:nvSpPr>
-          <p:cNvPr id="115" name="Google Shape;115;p21"/>
+          <p:cNvPr id="116" name="Google Shape;116;p21"/>
           <p:cNvSpPr txBox="1"/>
           <p:nvPr/>
         </p:nvSpPr>
@@ -13580,7 +13935,7 @@
       </p:sp>
       <p:pic>
         <p:nvPicPr>
-          <p:cNvPr id="116" name="Google Shape;116;p21"/>
+          <p:cNvPr id="117" name="Google Shape;117;p21"/>
           <p:cNvPicPr preferRelativeResize="0"/>
           <p:nvPr/>
         </p:nvPicPr>
@@ -13594,8 +13949,8 @@
         </p:blipFill>
         <p:spPr>
           <a:xfrm>
-            <a:off x="2423325" y="2234175"/>
-            <a:ext cx="2898249" cy="2909325"/>
+            <a:off x="3045511" y="2858725"/>
+            <a:ext cx="2276075" cy="2284775"/>
           </a:xfrm>
           <a:prstGeom prst="rect">
             <a:avLst/>

--- a/DataAnalysis_ElectricVehicles.pptx
+++ b/DataAnalysis_ElectricVehicles.pptx
@@ -9533,7 +9533,7 @@
             </a:pPr>
             <a:r>
               <a:rPr lang="iw" sz="1300"/>
-              <a:t>And that TESLA is actually tied with FORD in Columbia</a:t>
+              <a:t>And TESLA is actually tied with FORD in Columbia</a:t>
             </a:r>
             <a:endParaRPr sz="1420"/>
           </a:p>
@@ -11170,7 +11170,7 @@
             <a:tbl>
               <a:tblPr>
                 <a:noFill/>
-                <a:tableStyleId>{A1A136FA-2B72-4651-A519-8C62079C87FA}</a:tableStyleId>
+                <a:tableStyleId>{3E0DA135-1A3A-443B-B8BA-B909F35A611B}</a:tableStyleId>
               </a:tblPr>
               <a:tblGrid>
                 <a:gridCol w="2019075"/>
@@ -11974,7 +11974,7 @@
             <a:tbl>
               <a:tblPr>
                 <a:noFill/>
-                <a:tableStyleId>{A1A136FA-2B72-4651-A519-8C62079C87FA}</a:tableStyleId>
+                <a:tableStyleId>{3E0DA135-1A3A-443B-B8BA-B909F35A611B}</a:tableStyleId>
               </a:tblPr>
               <a:tblGrid>
                 <a:gridCol w="2019050"/>
@@ -13970,6 +13970,285 @@
 </file>
 
 <file path=ppt/theme/theme1.xml><?xml version="1.0" encoding="utf-8"?>
+<a:theme xmlns:a="http://schemas.openxmlformats.org/drawingml/2006/main" xmlns:r="http://schemas.openxmlformats.org/officeDocument/2006/relationships" name="Simple Light">
+  <a:themeElements>
+    <a:clrScheme name="Simple Light">
+      <a:dk1>
+        <a:srgbClr val="000000"/>
+      </a:dk1>
+      <a:lt1>
+        <a:srgbClr val="FFFFFF"/>
+      </a:lt1>
+      <a:dk2>
+        <a:srgbClr val="595959"/>
+      </a:dk2>
+      <a:lt2>
+        <a:srgbClr val="EEEEEE"/>
+      </a:lt2>
+      <a:accent1>
+        <a:srgbClr val="4285F4"/>
+      </a:accent1>
+      <a:accent2>
+        <a:srgbClr val="212121"/>
+      </a:accent2>
+      <a:accent3>
+        <a:srgbClr val="78909C"/>
+      </a:accent3>
+      <a:accent4>
+        <a:srgbClr val="FFAB40"/>
+      </a:accent4>
+      <a:accent5>
+        <a:srgbClr val="0097A7"/>
+      </a:accent5>
+      <a:accent6>
+        <a:srgbClr val="EEFF41"/>
+      </a:accent6>
+      <a:hlink>
+        <a:srgbClr val="0097A7"/>
+      </a:hlink>
+      <a:folHlink>
+        <a:srgbClr val="0097A7"/>
+      </a:folHlink>
+    </a:clrScheme>
+    <a:fontScheme name="Office">
+      <a:majorFont>
+        <a:latin typeface="Arial"/>
+        <a:ea typeface=""/>
+        <a:cs typeface=""/>
+        <a:font script="Jpan" typeface="ＭＳ Ｐゴシック"/>
+        <a:font script="Hang" typeface="맑은 고딕"/>
+        <a:font script="Hans" typeface="宋体"/>
+        <a:font script="Hant" typeface="新細明體"/>
+        <a:font script="Arab" typeface="Times New Roman"/>
+        <a:font script="Hebr" typeface="Times New Roman"/>
+        <a:font script="Thai" typeface="Angsana New"/>
+        <a:font script="Ethi" typeface="Nyala"/>
+        <a:font script="Beng" typeface="Vrinda"/>
+        <a:font script="Gujr" typeface="Shruti"/>
+        <a:font script="Khmr" typeface="MoolBoran"/>
+        <a:font script="Knda" typeface="Tunga"/>
+        <a:font script="Guru" typeface="Raavi"/>
+        <a:font script="Cans" typeface="Euphemia"/>
+        <a:font script="Cher" typeface="Plantagenet Cherokee"/>
+        <a:font script="Yiii" typeface="Microsoft Yi Baiti"/>
+        <a:font script="Tibt" typeface="Microsoft Himalaya"/>
+        <a:font script="Thaa" typeface="MV Boli"/>
+        <a:font script="Deva" typeface="Mangal"/>
+        <a:font script="Telu" typeface="Gautami"/>
+        <a:font script="Taml" typeface="Latha"/>
+        <a:font script="Syrc" typeface="Estrangelo Edessa"/>
+        <a:font script="Orya" typeface="Kalinga"/>
+        <a:font script="Mlym" typeface="Kartika"/>
+        <a:font script="Laoo" typeface="DokChampa"/>
+        <a:font script="Sinh" typeface="Iskoola Pota"/>
+        <a:font script="Mong" typeface="Mongolian Baiti"/>
+        <a:font script="Viet" typeface="Times New Roman"/>
+        <a:font script="Uigh" typeface="Microsoft Uighur"/>
+        <a:font script="Geor" typeface="Sylfaen"/>
+      </a:majorFont>
+      <a:minorFont>
+        <a:latin typeface="Arial"/>
+        <a:ea typeface=""/>
+        <a:cs typeface=""/>
+        <a:font script="Jpan" typeface="ＭＳ Ｐゴシック"/>
+        <a:font script="Hang" typeface="맑은 고딕"/>
+        <a:font script="Hans" typeface="宋体"/>
+        <a:font script="Hant" typeface="新細明體"/>
+        <a:font script="Arab" typeface="Arial"/>
+        <a:font script="Hebr" typeface="Arial"/>
+        <a:font script="Thai" typeface="Cordia New"/>
+        <a:font script="Ethi" typeface="Nyala"/>
+        <a:font script="Beng" typeface="Vrinda"/>
+        <a:font script="Gujr" typeface="Shruti"/>
+        <a:font script="Khmr" typeface="DaunPenh"/>
+        <a:font script="Knda" typeface="Tunga"/>
+        <a:font script="Guru" typeface="Raavi"/>
+        <a:font script="Cans" typeface="Euphemia"/>
+        <a:font script="Cher" typeface="Plantagenet Cherokee"/>
+        <a:font script="Yiii" typeface="Microsoft Yi Baiti"/>
+        <a:font script="Tibt" typeface="Microsoft Himalaya"/>
+        <a:font script="Thaa" typeface="MV Boli"/>
+        <a:font script="Deva" typeface="Mangal"/>
+        <a:font script="Telu" typeface="Gautami"/>
+        <a:font script="Taml" typeface="Latha"/>
+        <a:font script="Syrc" typeface="Estrangelo Edessa"/>
+        <a:font script="Orya" typeface="Kalinga"/>
+        <a:font script="Mlym" typeface="Kartika"/>
+        <a:font script="Laoo" typeface="DokChampa"/>
+        <a:font script="Sinh" typeface="Iskoola Pota"/>
+        <a:font script="Mong" typeface="Mongolian Baiti"/>
+        <a:font script="Viet" typeface="Arial"/>
+        <a:font script="Uigh" typeface="Microsoft Uighur"/>
+        <a:font script="Geor" typeface="Sylfaen"/>
+      </a:minorFont>
+    </a:fontScheme>
+    <a:fmtScheme name="Office">
+      <a:fillStyleLst>
+        <a:solidFill>
+          <a:schemeClr val="phClr"/>
+        </a:solidFill>
+        <a:gradFill rotWithShape="1">
+          <a:gsLst>
+            <a:gs pos="0">
+              <a:schemeClr val="phClr">
+                <a:tint val="50000"/>
+                <a:satMod val="300000"/>
+              </a:schemeClr>
+            </a:gs>
+            <a:gs pos="35000">
+              <a:schemeClr val="phClr">
+                <a:tint val="37000"/>
+                <a:satMod val="300000"/>
+              </a:schemeClr>
+            </a:gs>
+            <a:gs pos="100000">
+              <a:schemeClr val="phClr">
+                <a:tint val="15000"/>
+                <a:satMod val="350000"/>
+              </a:schemeClr>
+            </a:gs>
+          </a:gsLst>
+          <a:lin ang="16200000" scaled="1"/>
+        </a:gradFill>
+        <a:gradFill rotWithShape="1">
+          <a:gsLst>
+            <a:gs pos="0">
+              <a:schemeClr val="phClr">
+                <a:tint val="100000"/>
+                <a:shade val="100000"/>
+                <a:satMod val="130000"/>
+              </a:schemeClr>
+            </a:gs>
+            <a:gs pos="100000">
+              <a:schemeClr val="phClr">
+                <a:tint val="50000"/>
+                <a:shade val="100000"/>
+                <a:satMod val="350000"/>
+              </a:schemeClr>
+            </a:gs>
+          </a:gsLst>
+          <a:lin ang="16200000" scaled="0"/>
+        </a:gradFill>
+      </a:fillStyleLst>
+      <a:lnStyleLst>
+        <a:ln w="9525" cap="flat" cmpd="sng" algn="ctr">
+          <a:solidFill>
+            <a:schemeClr val="phClr">
+              <a:shade val="95000"/>
+              <a:satMod val="105000"/>
+            </a:schemeClr>
+          </a:solidFill>
+          <a:prstDash val="solid"/>
+        </a:ln>
+        <a:ln w="25400" cap="flat" cmpd="sng" algn="ctr">
+          <a:solidFill>
+            <a:schemeClr val="phClr"/>
+          </a:solidFill>
+          <a:prstDash val="solid"/>
+        </a:ln>
+        <a:ln w="38100" cap="flat" cmpd="sng" algn="ctr">
+          <a:solidFill>
+            <a:schemeClr val="phClr"/>
+          </a:solidFill>
+          <a:prstDash val="solid"/>
+        </a:ln>
+      </a:lnStyleLst>
+      <a:effectStyleLst>
+        <a:effectStyle>
+          <a:effectLst>
+            <a:outerShdw blurRad="40000" dist="20000" dir="5400000" rotWithShape="0">
+              <a:srgbClr val="000000">
+                <a:alpha val="38000"/>
+              </a:srgbClr>
+            </a:outerShdw>
+          </a:effectLst>
+        </a:effectStyle>
+        <a:effectStyle>
+          <a:effectLst>
+            <a:outerShdw blurRad="40000" dist="23000" dir="5400000" rotWithShape="0">
+              <a:srgbClr val="000000">
+                <a:alpha val="35000"/>
+              </a:srgbClr>
+            </a:outerShdw>
+          </a:effectLst>
+        </a:effectStyle>
+        <a:effectStyle>
+          <a:effectLst>
+            <a:outerShdw blurRad="40000" dist="23000" dir="5400000" rotWithShape="0">
+              <a:srgbClr val="000000">
+                <a:alpha val="35000"/>
+              </a:srgbClr>
+            </a:outerShdw>
+          </a:effectLst>
+          <a:scene3d>
+            <a:camera prst="orthographicFront">
+              <a:rot lat="0" lon="0" rev="0"/>
+            </a:camera>
+            <a:lightRig rig="threePt" dir="t">
+              <a:rot lat="0" lon="0" rev="1200000"/>
+            </a:lightRig>
+          </a:scene3d>
+          <a:sp3d>
+            <a:bevelT w="63500" h="25400"/>
+          </a:sp3d>
+        </a:effectStyle>
+      </a:effectStyleLst>
+      <a:bgFillStyleLst>
+        <a:solidFill>
+          <a:schemeClr val="phClr"/>
+        </a:solidFill>
+        <a:gradFill rotWithShape="1">
+          <a:gsLst>
+            <a:gs pos="0">
+              <a:schemeClr val="phClr">
+                <a:tint val="40000"/>
+                <a:satMod val="350000"/>
+              </a:schemeClr>
+            </a:gs>
+            <a:gs pos="40000">
+              <a:schemeClr val="phClr">
+                <a:tint val="45000"/>
+                <a:shade val="99000"/>
+                <a:satMod val="350000"/>
+              </a:schemeClr>
+            </a:gs>
+            <a:gs pos="100000">
+              <a:schemeClr val="phClr">
+                <a:shade val="20000"/>
+                <a:satMod val="255000"/>
+              </a:schemeClr>
+            </a:gs>
+          </a:gsLst>
+          <a:path path="circle">
+            <a:fillToRect l="50000" t="-80000" r="50000" b="180000"/>
+          </a:path>
+        </a:gradFill>
+        <a:gradFill rotWithShape="1">
+          <a:gsLst>
+            <a:gs pos="0">
+              <a:schemeClr val="phClr">
+                <a:tint val="80000"/>
+                <a:satMod val="300000"/>
+              </a:schemeClr>
+            </a:gs>
+            <a:gs pos="100000">
+              <a:schemeClr val="phClr">
+                <a:shade val="30000"/>
+                <a:satMod val="200000"/>
+              </a:schemeClr>
+            </a:gs>
+          </a:gsLst>
+          <a:path path="circle">
+            <a:fillToRect l="50000" t="50000" r="50000" b="50000"/>
+          </a:path>
+        </a:gradFill>
+      </a:bgFillStyleLst>
+    </a:fmtScheme>
+  </a:themeElements>
+</a:theme>
+</file>
+
+<file path=ppt/theme/theme2.xml><?xml version="1.0" encoding="utf-8"?>
 <a:theme xmlns:a="http://schemas.openxmlformats.org/drawingml/2006/main" xmlns:r="http://schemas.openxmlformats.org/officeDocument/2006/relationships">
   <a:themeElements>
     <a:clrScheme name="Default">
@@ -14246,283 +14525,4 @@
     </a:fmtScheme>
   </a:themeElements>
 </a:theme>
-</file>
-
-<file path=ppt/theme/theme2.xml><?xml version="1.0" encoding="utf-8"?>
-<a:theme xmlns:a="http://schemas.openxmlformats.org/drawingml/2006/main" xmlns:r="http://schemas.openxmlformats.org/officeDocument/2006/relationships" name="Simple Light">
-  <a:themeElements>
-    <a:clrScheme name="Simple Light">
-      <a:dk1>
-        <a:srgbClr val="000000"/>
-      </a:dk1>
-      <a:lt1>
-        <a:srgbClr val="FFFFFF"/>
-      </a:lt1>
-      <a:dk2>
-        <a:srgbClr val="595959"/>
-      </a:dk2>
-      <a:lt2>
-        <a:srgbClr val="EEEEEE"/>
-      </a:lt2>
-      <a:accent1>
-        <a:srgbClr val="4285F4"/>
-      </a:accent1>
-      <a:accent2>
-        <a:srgbClr val="212121"/>
-      </a:accent2>
-      <a:accent3>
-        <a:srgbClr val="78909C"/>
-      </a:accent3>
-      <a:accent4>
-        <a:srgbClr val="FFAB40"/>
-      </a:accent4>
-      <a:accent5>
-        <a:srgbClr val="0097A7"/>
-      </a:accent5>
-      <a:accent6>
-        <a:srgbClr val="EEFF41"/>
-      </a:accent6>
-      <a:hlink>
-        <a:srgbClr val="0097A7"/>
-      </a:hlink>
-      <a:folHlink>
-        <a:srgbClr val="0097A7"/>
-      </a:folHlink>
-    </a:clrScheme>
-    <a:fontScheme name="Office">
-      <a:majorFont>
-        <a:latin typeface="Arial"/>
-        <a:ea typeface=""/>
-        <a:cs typeface=""/>
-        <a:font script="Jpan" typeface="ＭＳ Ｐゴシック"/>
-        <a:font script="Hang" typeface="맑은 고딕"/>
-        <a:font script="Hans" typeface="宋体"/>
-        <a:font script="Hant" typeface="新細明體"/>
-        <a:font script="Arab" typeface="Times New Roman"/>
-        <a:font script="Hebr" typeface="Times New Roman"/>
-        <a:font script="Thai" typeface="Angsana New"/>
-        <a:font script="Ethi" typeface="Nyala"/>
-        <a:font script="Beng" typeface="Vrinda"/>
-        <a:font script="Gujr" typeface="Shruti"/>
-        <a:font script="Khmr" typeface="MoolBoran"/>
-        <a:font script="Knda" typeface="Tunga"/>
-        <a:font script="Guru" typeface="Raavi"/>
-        <a:font script="Cans" typeface="Euphemia"/>
-        <a:font script="Cher" typeface="Plantagenet Cherokee"/>
-        <a:font script="Yiii" typeface="Microsoft Yi Baiti"/>
-        <a:font script="Tibt" typeface="Microsoft Himalaya"/>
-        <a:font script="Thaa" typeface="MV Boli"/>
-        <a:font script="Deva" typeface="Mangal"/>
-        <a:font script="Telu" typeface="Gautami"/>
-        <a:font script="Taml" typeface="Latha"/>
-        <a:font script="Syrc" typeface="Estrangelo Edessa"/>
-        <a:font script="Orya" typeface="Kalinga"/>
-        <a:font script="Mlym" typeface="Kartika"/>
-        <a:font script="Laoo" typeface="DokChampa"/>
-        <a:font script="Sinh" typeface="Iskoola Pota"/>
-        <a:font script="Mong" typeface="Mongolian Baiti"/>
-        <a:font script="Viet" typeface="Times New Roman"/>
-        <a:font script="Uigh" typeface="Microsoft Uighur"/>
-        <a:font script="Geor" typeface="Sylfaen"/>
-      </a:majorFont>
-      <a:minorFont>
-        <a:latin typeface="Arial"/>
-        <a:ea typeface=""/>
-        <a:cs typeface=""/>
-        <a:font script="Jpan" typeface="ＭＳ Ｐゴシック"/>
-        <a:font script="Hang" typeface="맑은 고딕"/>
-        <a:font script="Hans" typeface="宋体"/>
-        <a:font script="Hant" typeface="新細明體"/>
-        <a:font script="Arab" typeface="Arial"/>
-        <a:font script="Hebr" typeface="Arial"/>
-        <a:font script="Thai" typeface="Cordia New"/>
-        <a:font script="Ethi" typeface="Nyala"/>
-        <a:font script="Beng" typeface="Vrinda"/>
-        <a:font script="Gujr" typeface="Shruti"/>
-        <a:font script="Khmr" typeface="DaunPenh"/>
-        <a:font script="Knda" typeface="Tunga"/>
-        <a:font script="Guru" typeface="Raavi"/>
-        <a:font script="Cans" typeface="Euphemia"/>
-        <a:font script="Cher" typeface="Plantagenet Cherokee"/>
-        <a:font script="Yiii" typeface="Microsoft Yi Baiti"/>
-        <a:font script="Tibt" typeface="Microsoft Himalaya"/>
-        <a:font script="Thaa" typeface="MV Boli"/>
-        <a:font script="Deva" typeface="Mangal"/>
-        <a:font script="Telu" typeface="Gautami"/>
-        <a:font script="Taml" typeface="Latha"/>
-        <a:font script="Syrc" typeface="Estrangelo Edessa"/>
-        <a:font script="Orya" typeface="Kalinga"/>
-        <a:font script="Mlym" typeface="Kartika"/>
-        <a:font script="Laoo" typeface="DokChampa"/>
-        <a:font script="Sinh" typeface="Iskoola Pota"/>
-        <a:font script="Mong" typeface="Mongolian Baiti"/>
-        <a:font script="Viet" typeface="Arial"/>
-        <a:font script="Uigh" typeface="Microsoft Uighur"/>
-        <a:font script="Geor" typeface="Sylfaen"/>
-      </a:minorFont>
-    </a:fontScheme>
-    <a:fmtScheme name="Office">
-      <a:fillStyleLst>
-        <a:solidFill>
-          <a:schemeClr val="phClr"/>
-        </a:solidFill>
-        <a:gradFill rotWithShape="1">
-          <a:gsLst>
-            <a:gs pos="0">
-              <a:schemeClr val="phClr">
-                <a:tint val="50000"/>
-                <a:satMod val="300000"/>
-              </a:schemeClr>
-            </a:gs>
-            <a:gs pos="35000">
-              <a:schemeClr val="phClr">
-                <a:tint val="37000"/>
-                <a:satMod val="300000"/>
-              </a:schemeClr>
-            </a:gs>
-            <a:gs pos="100000">
-              <a:schemeClr val="phClr">
-                <a:tint val="15000"/>
-                <a:satMod val="350000"/>
-              </a:schemeClr>
-            </a:gs>
-          </a:gsLst>
-          <a:lin ang="16200000" scaled="1"/>
-        </a:gradFill>
-        <a:gradFill rotWithShape="1">
-          <a:gsLst>
-            <a:gs pos="0">
-              <a:schemeClr val="phClr">
-                <a:tint val="100000"/>
-                <a:shade val="100000"/>
-                <a:satMod val="130000"/>
-              </a:schemeClr>
-            </a:gs>
-            <a:gs pos="100000">
-              <a:schemeClr val="phClr">
-                <a:tint val="50000"/>
-                <a:shade val="100000"/>
-                <a:satMod val="350000"/>
-              </a:schemeClr>
-            </a:gs>
-          </a:gsLst>
-          <a:lin ang="16200000" scaled="0"/>
-        </a:gradFill>
-      </a:fillStyleLst>
-      <a:lnStyleLst>
-        <a:ln w="9525" cap="flat" cmpd="sng" algn="ctr">
-          <a:solidFill>
-            <a:schemeClr val="phClr">
-              <a:shade val="95000"/>
-              <a:satMod val="105000"/>
-            </a:schemeClr>
-          </a:solidFill>
-          <a:prstDash val="solid"/>
-        </a:ln>
-        <a:ln w="25400" cap="flat" cmpd="sng" algn="ctr">
-          <a:solidFill>
-            <a:schemeClr val="phClr"/>
-          </a:solidFill>
-          <a:prstDash val="solid"/>
-        </a:ln>
-        <a:ln w="38100" cap="flat" cmpd="sng" algn="ctr">
-          <a:solidFill>
-            <a:schemeClr val="phClr"/>
-          </a:solidFill>
-          <a:prstDash val="solid"/>
-        </a:ln>
-      </a:lnStyleLst>
-      <a:effectStyleLst>
-        <a:effectStyle>
-          <a:effectLst>
-            <a:outerShdw blurRad="40000" dist="20000" dir="5400000" rotWithShape="0">
-              <a:srgbClr val="000000">
-                <a:alpha val="38000"/>
-              </a:srgbClr>
-            </a:outerShdw>
-          </a:effectLst>
-        </a:effectStyle>
-        <a:effectStyle>
-          <a:effectLst>
-            <a:outerShdw blurRad="40000" dist="23000" dir="5400000" rotWithShape="0">
-              <a:srgbClr val="000000">
-                <a:alpha val="35000"/>
-              </a:srgbClr>
-            </a:outerShdw>
-          </a:effectLst>
-        </a:effectStyle>
-        <a:effectStyle>
-          <a:effectLst>
-            <a:outerShdw blurRad="40000" dist="23000" dir="5400000" rotWithShape="0">
-              <a:srgbClr val="000000">
-                <a:alpha val="35000"/>
-              </a:srgbClr>
-            </a:outerShdw>
-          </a:effectLst>
-          <a:scene3d>
-            <a:camera prst="orthographicFront">
-              <a:rot lat="0" lon="0" rev="0"/>
-            </a:camera>
-            <a:lightRig rig="threePt" dir="t">
-              <a:rot lat="0" lon="0" rev="1200000"/>
-            </a:lightRig>
-          </a:scene3d>
-          <a:sp3d>
-            <a:bevelT w="63500" h="25400"/>
-          </a:sp3d>
-        </a:effectStyle>
-      </a:effectStyleLst>
-      <a:bgFillStyleLst>
-        <a:solidFill>
-          <a:schemeClr val="phClr"/>
-        </a:solidFill>
-        <a:gradFill rotWithShape="1">
-          <a:gsLst>
-            <a:gs pos="0">
-              <a:schemeClr val="phClr">
-                <a:tint val="40000"/>
-                <a:satMod val="350000"/>
-              </a:schemeClr>
-            </a:gs>
-            <a:gs pos="40000">
-              <a:schemeClr val="phClr">
-                <a:tint val="45000"/>
-                <a:shade val="99000"/>
-                <a:satMod val="350000"/>
-              </a:schemeClr>
-            </a:gs>
-            <a:gs pos="100000">
-              <a:schemeClr val="phClr">
-                <a:shade val="20000"/>
-                <a:satMod val="255000"/>
-              </a:schemeClr>
-            </a:gs>
-          </a:gsLst>
-          <a:path path="circle">
-            <a:fillToRect l="50000" t="-80000" r="50000" b="180000"/>
-          </a:path>
-        </a:gradFill>
-        <a:gradFill rotWithShape="1">
-          <a:gsLst>
-            <a:gs pos="0">
-              <a:schemeClr val="phClr">
-                <a:tint val="80000"/>
-                <a:satMod val="300000"/>
-              </a:schemeClr>
-            </a:gs>
-            <a:gs pos="100000">
-              <a:schemeClr val="phClr">
-                <a:shade val="30000"/>
-                <a:satMod val="200000"/>
-              </a:schemeClr>
-            </a:gs>
-          </a:gsLst>
-          <a:path path="circle">
-            <a:fillToRect l="50000" t="50000" r="50000" b="50000"/>
-          </a:path>
-        </a:gradFill>
-      </a:bgFillStyleLst>
-    </a:fmtScheme>
-  </a:themeElements>
-</a:theme>
 </file>
--- a/DataAnalysis_ElectricVehicles.pptx
+++ b/DataAnalysis_ElectricVehicles.pptx
@@ -822,7 +822,7 @@
   <p:cSld>
     <p:spTree>
       <p:nvGrpSpPr>
-        <p:cNvPr id="118" name="Shape 118"/>
+        <p:cNvPr id="120" name="Shape 120"/>
         <p:cNvGrpSpPr/>
         <p:nvPr/>
       </p:nvGrpSpPr>
@@ -836,7 +836,7 @@
       </p:grpSpPr>
       <p:sp>
         <p:nvSpPr>
-          <p:cNvPr id="119" name="Google Shape;119;g35da4827f45_0_81:notes"/>
+          <p:cNvPr id="121" name="Google Shape;121;g35da4827f45_0_81:notes"/>
           <p:cNvSpPr/>
           <p:nvPr>
             <p:ph idx="2" type="sldImg"/>
@@ -871,7 +871,7 @@
       </p:sp>
       <p:sp>
         <p:nvSpPr>
-          <p:cNvPr id="120" name="Google Shape;120;g35da4827f45_0_81:notes"/>
+          <p:cNvPr id="122" name="Google Shape;122;g35da4827f45_0_81:notes"/>
           <p:cNvSpPr txBox="1"/>
           <p:nvPr>
             <p:ph idx="1" type="body"/>
@@ -921,7 +921,7 @@
   <p:cSld>
     <p:spTree>
       <p:nvGrpSpPr>
-        <p:cNvPr id="126" name="Shape 126"/>
+        <p:cNvPr id="128" name="Shape 128"/>
         <p:cNvGrpSpPr/>
         <p:nvPr/>
       </p:nvGrpSpPr>
@@ -935,7 +935,7 @@
       </p:grpSpPr>
       <p:sp>
         <p:nvSpPr>
-          <p:cNvPr id="127" name="Google Shape;127;g35da4827f45_0_76:notes"/>
+          <p:cNvPr id="129" name="Google Shape;129;g35da4827f45_0_76:notes"/>
           <p:cNvSpPr/>
           <p:nvPr>
             <p:ph idx="2" type="sldImg"/>
@@ -970,7 +970,7 @@
       </p:sp>
       <p:sp>
         <p:nvSpPr>
-          <p:cNvPr id="128" name="Google Shape;128;g35da4827f45_0_76:notes"/>
+          <p:cNvPr id="130" name="Google Shape;130;g35da4827f45_0_76:notes"/>
           <p:cNvSpPr txBox="1"/>
           <p:nvPr>
             <p:ph idx="1" type="body"/>
@@ -1020,7 +1020,7 @@
   <p:cSld>
     <p:spTree>
       <p:nvGrpSpPr>
-        <p:cNvPr id="133" name="Shape 133"/>
+        <p:cNvPr id="135" name="Shape 135"/>
         <p:cNvGrpSpPr/>
         <p:nvPr/>
       </p:nvGrpSpPr>
@@ -1034,7 +1034,7 @@
       </p:grpSpPr>
       <p:sp>
         <p:nvSpPr>
-          <p:cNvPr id="134" name="Google Shape;134;g35da4827f45_0_86:notes"/>
+          <p:cNvPr id="136" name="Google Shape;136;g35da4827f45_0_86:notes"/>
           <p:cNvSpPr/>
           <p:nvPr>
             <p:ph idx="2" type="sldImg"/>
@@ -1069,7 +1069,7 @@
       </p:sp>
       <p:sp>
         <p:nvSpPr>
-          <p:cNvPr id="135" name="Google Shape;135;g35da4827f45_0_86:notes"/>
+          <p:cNvPr id="137" name="Google Shape;137;g35da4827f45_0_86:notes"/>
           <p:cNvSpPr txBox="1"/>
           <p:nvPr>
             <p:ph idx="1" type="body"/>
@@ -1119,7 +1119,7 @@
   <p:cSld>
     <p:spTree>
       <p:nvGrpSpPr>
-        <p:cNvPr id="140" name="Shape 140"/>
+        <p:cNvPr id="142" name="Shape 142"/>
         <p:cNvGrpSpPr/>
         <p:nvPr/>
       </p:nvGrpSpPr>
@@ -1133,7 +1133,7 @@
       </p:grpSpPr>
       <p:sp>
         <p:nvSpPr>
-          <p:cNvPr id="141" name="Google Shape;141;g35da4827f45_0_180:notes"/>
+          <p:cNvPr id="143" name="Google Shape;143;g35da4827f45_0_180:notes"/>
           <p:cNvSpPr/>
           <p:nvPr>
             <p:ph idx="2" type="sldImg"/>
@@ -1168,7 +1168,7 @@
       </p:sp>
       <p:sp>
         <p:nvSpPr>
-          <p:cNvPr id="142" name="Google Shape;142;g35da4827f45_0_180:notes"/>
+          <p:cNvPr id="144" name="Google Shape;144;g35da4827f45_0_180:notes"/>
           <p:cNvSpPr txBox="1"/>
           <p:nvPr>
             <p:ph idx="1" type="body"/>
@@ -1218,7 +1218,7 @@
   <p:cSld>
     <p:spTree>
       <p:nvGrpSpPr>
-        <p:cNvPr id="148" name="Shape 148"/>
+        <p:cNvPr id="150" name="Shape 150"/>
         <p:cNvGrpSpPr/>
         <p:nvPr/>
       </p:nvGrpSpPr>
@@ -1232,7 +1232,7 @@
       </p:grpSpPr>
       <p:sp>
         <p:nvSpPr>
-          <p:cNvPr id="149" name="Google Shape;149;g35da4827f45_0_116:notes"/>
+          <p:cNvPr id="151" name="Google Shape;151;g35da4827f45_0_116:notes"/>
           <p:cNvSpPr/>
           <p:nvPr>
             <p:ph idx="2" type="sldImg"/>
@@ -1267,7 +1267,7 @@
       </p:sp>
       <p:sp>
         <p:nvSpPr>
-          <p:cNvPr id="150" name="Google Shape;150;g35da4827f45_0_116:notes"/>
+          <p:cNvPr id="152" name="Google Shape;152;g35da4827f45_0_116:notes"/>
           <p:cNvSpPr txBox="1"/>
           <p:nvPr>
             <p:ph idx="1" type="body"/>
@@ -1317,7 +1317,7 @@
   <p:cSld>
     <p:spTree>
       <p:nvGrpSpPr>
-        <p:cNvPr id="155" name="Shape 155"/>
+        <p:cNvPr id="157" name="Shape 157"/>
         <p:cNvGrpSpPr/>
         <p:nvPr/>
       </p:nvGrpSpPr>
@@ -1331,7 +1331,7 @@
       </p:grpSpPr>
       <p:sp>
         <p:nvSpPr>
-          <p:cNvPr id="156" name="Google Shape;156;g35da4827f45_0_124:notes"/>
+          <p:cNvPr id="158" name="Google Shape;158;g35da4827f45_0_124:notes"/>
           <p:cNvSpPr/>
           <p:nvPr>
             <p:ph idx="2" type="sldImg"/>
@@ -1366,7 +1366,7 @@
       </p:sp>
       <p:sp>
         <p:nvSpPr>
-          <p:cNvPr id="157" name="Google Shape;157;g35da4827f45_0_124:notes"/>
+          <p:cNvPr id="159" name="Google Shape;159;g35da4827f45_0_124:notes"/>
           <p:cNvSpPr txBox="1"/>
           <p:nvPr>
             <p:ph idx="1" type="body"/>
@@ -1416,7 +1416,7 @@
   <p:cSld>
     <p:spTree>
       <p:nvGrpSpPr>
-        <p:cNvPr id="162" name="Shape 162"/>
+        <p:cNvPr id="164" name="Shape 164"/>
         <p:cNvGrpSpPr/>
         <p:nvPr/>
       </p:nvGrpSpPr>
@@ -1430,7 +1430,7 @@
       </p:grpSpPr>
       <p:sp>
         <p:nvSpPr>
-          <p:cNvPr id="163" name="Google Shape;163;g35da4827f45_0_104:notes"/>
+          <p:cNvPr id="165" name="Google Shape;165;g35da4827f45_0_104:notes"/>
           <p:cNvSpPr/>
           <p:nvPr>
             <p:ph idx="2" type="sldImg"/>
@@ -1465,7 +1465,7 @@
       </p:sp>
       <p:sp>
         <p:nvSpPr>
-          <p:cNvPr id="164" name="Google Shape;164;g35da4827f45_0_104:notes"/>
+          <p:cNvPr id="166" name="Google Shape;166;g35da4827f45_0_104:notes"/>
           <p:cNvSpPr txBox="1"/>
           <p:nvPr>
             <p:ph idx="1" type="body"/>
@@ -1515,7 +1515,7 @@
   <p:cSld>
     <p:spTree>
       <p:nvGrpSpPr>
-        <p:cNvPr id="171" name="Shape 171"/>
+        <p:cNvPr id="173" name="Shape 173"/>
         <p:cNvGrpSpPr/>
         <p:nvPr/>
       </p:nvGrpSpPr>
@@ -1529,7 +1529,7 @@
       </p:grpSpPr>
       <p:sp>
         <p:nvSpPr>
-          <p:cNvPr id="172" name="Google Shape;172;g35da4827f45_0_131:notes"/>
+          <p:cNvPr id="174" name="Google Shape;174;g35da4827f45_0_131:notes"/>
           <p:cNvSpPr/>
           <p:nvPr>
             <p:ph idx="2" type="sldImg"/>
@@ -1564,7 +1564,7 @@
       </p:sp>
       <p:sp>
         <p:nvSpPr>
-          <p:cNvPr id="173" name="Google Shape;173;g35da4827f45_0_131:notes"/>
+          <p:cNvPr id="175" name="Google Shape;175;g35da4827f45_0_131:notes"/>
           <p:cNvSpPr txBox="1"/>
           <p:nvPr>
             <p:ph idx="1" type="body"/>
@@ -1614,7 +1614,7 @@
   <p:cSld>
     <p:spTree>
       <p:nvGrpSpPr>
-        <p:cNvPr id="183" name="Shape 183"/>
+        <p:cNvPr id="185" name="Shape 185"/>
         <p:cNvGrpSpPr/>
         <p:nvPr/>
       </p:nvGrpSpPr>
@@ -1628,7 +1628,7 @@
       </p:grpSpPr>
       <p:sp>
         <p:nvSpPr>
-          <p:cNvPr id="184" name="Google Shape;184;g35da4827f45_0_137:notes"/>
+          <p:cNvPr id="186" name="Google Shape;186;g35da4827f45_0_137:notes"/>
           <p:cNvSpPr/>
           <p:nvPr>
             <p:ph idx="2" type="sldImg"/>
@@ -1663,7 +1663,7 @@
       </p:sp>
       <p:sp>
         <p:nvSpPr>
-          <p:cNvPr id="185" name="Google Shape;185;g35da4827f45_0_137:notes"/>
+          <p:cNvPr id="187" name="Google Shape;187;g35da4827f45_0_137:notes"/>
           <p:cNvSpPr txBox="1"/>
           <p:nvPr>
             <p:ph idx="1" type="body"/>
@@ -1713,7 +1713,7 @@
   <p:cSld>
     <p:spTree>
       <p:nvGrpSpPr>
-        <p:cNvPr id="191" name="Shape 191"/>
+        <p:cNvPr id="193" name="Shape 193"/>
         <p:cNvGrpSpPr/>
         <p:nvPr/>
       </p:nvGrpSpPr>
@@ -1727,7 +1727,7 @@
       </p:grpSpPr>
       <p:sp>
         <p:nvSpPr>
-          <p:cNvPr id="192" name="Google Shape;192;g35da4827f45_0_162:notes"/>
+          <p:cNvPr id="194" name="Google Shape;194;g35da4827f45_0_162:notes"/>
           <p:cNvSpPr/>
           <p:nvPr>
             <p:ph idx="2" type="sldImg"/>
@@ -1762,7 +1762,7 @@
       </p:sp>
       <p:sp>
         <p:nvSpPr>
-          <p:cNvPr id="193" name="Google Shape;193;g35da4827f45_0_162:notes"/>
+          <p:cNvPr id="195" name="Google Shape;195;g35da4827f45_0_162:notes"/>
           <p:cNvSpPr txBox="1"/>
           <p:nvPr>
             <p:ph idx="1" type="body"/>
@@ -1783,7 +1783,7 @@
           </a:bodyPr>
           <a:lstStyle/>
           <a:p>
-            <a:pPr indent="0" lvl="0" marL="0" rtl="0" algn="l">
+            <a:pPr indent="0" lvl="0" marL="0" rtl="1" algn="r">
               <a:spcBef>
                 <a:spcPts val="0"/>
               </a:spcBef>
@@ -1793,7 +1793,8 @@
               <a:buNone/>
             </a:pPr>
             <a:r>
-              <a:t/>
+              <a:rPr lang="iw"/>
+              <a:t>התייחסות לערכי 0 למצב בטריה לא ידוע</a:t>
             </a:r>
             <a:endParaRPr/>
           </a:p>
@@ -1911,7 +1912,7 @@
   <p:cSld>
     <p:spTree>
       <p:nvGrpSpPr>
-        <p:cNvPr id="198" name="Shape 198"/>
+        <p:cNvPr id="200" name="Shape 200"/>
         <p:cNvGrpSpPr/>
         <p:nvPr/>
       </p:nvGrpSpPr>
@@ -1925,7 +1926,7 @@
       </p:grpSpPr>
       <p:sp>
         <p:nvSpPr>
-          <p:cNvPr id="199" name="Google Shape;199;g35da4827f45_0_167:notes"/>
+          <p:cNvPr id="201" name="Google Shape;201;g35da4827f45_0_167:notes"/>
           <p:cNvSpPr/>
           <p:nvPr>
             <p:ph idx="2" type="sldImg"/>
@@ -1960,7 +1961,7 @@
       </p:sp>
       <p:sp>
         <p:nvSpPr>
-          <p:cNvPr id="200" name="Google Shape;200;g35da4827f45_0_167:notes"/>
+          <p:cNvPr id="202" name="Google Shape;202;g35da4827f45_0_167:notes"/>
           <p:cNvSpPr txBox="1"/>
           <p:nvPr>
             <p:ph idx="1" type="body"/>
@@ -2010,7 +2011,7 @@
   <p:cSld>
     <p:spTree>
       <p:nvGrpSpPr>
-        <p:cNvPr id="205" name="Shape 205"/>
+        <p:cNvPr id="207" name="Shape 207"/>
         <p:cNvGrpSpPr/>
         <p:nvPr/>
       </p:nvGrpSpPr>
@@ -2024,7 +2025,7 @@
       </p:grpSpPr>
       <p:sp>
         <p:nvSpPr>
-          <p:cNvPr id="206" name="Google Shape;206;g35da4827f45_0_91:notes"/>
+          <p:cNvPr id="208" name="Google Shape;208;g35da4827f45_0_91:notes"/>
           <p:cNvSpPr/>
           <p:nvPr>
             <p:ph idx="2" type="sldImg"/>
@@ -2059,7 +2060,7 @@
       </p:sp>
       <p:sp>
         <p:nvSpPr>
-          <p:cNvPr id="207" name="Google Shape;207;g35da4827f45_0_91:notes"/>
+          <p:cNvPr id="209" name="Google Shape;209;g35da4827f45_0_91:notes"/>
           <p:cNvSpPr txBox="1"/>
           <p:nvPr>
             <p:ph idx="1" type="body"/>
@@ -2109,7 +2110,7 @@
   <p:cSld>
     <p:spTree>
       <p:nvGrpSpPr>
-        <p:cNvPr id="212" name="Shape 212"/>
+        <p:cNvPr id="214" name="Shape 214"/>
         <p:cNvGrpSpPr/>
         <p:nvPr/>
       </p:nvGrpSpPr>
@@ -2123,7 +2124,7 @@
       </p:grpSpPr>
       <p:sp>
         <p:nvSpPr>
-          <p:cNvPr id="213" name="Google Shape;213;g35da4827f45_2_11:notes"/>
+          <p:cNvPr id="215" name="Google Shape;215;g35da4827f45_2_11:notes"/>
           <p:cNvSpPr/>
           <p:nvPr>
             <p:ph idx="2" type="sldImg"/>
@@ -2158,7 +2159,7 @@
       </p:sp>
       <p:sp>
         <p:nvSpPr>
-          <p:cNvPr id="214" name="Google Shape;214;g35da4827f45_2_11:notes"/>
+          <p:cNvPr id="216" name="Google Shape;216;g35da4827f45_2_11:notes"/>
           <p:cNvSpPr txBox="1"/>
           <p:nvPr>
             <p:ph idx="1" type="body"/>
@@ -2208,7 +2209,7 @@
   <p:cSld>
     <p:spTree>
       <p:nvGrpSpPr>
-        <p:cNvPr id="219" name="Shape 219"/>
+        <p:cNvPr id="221" name="Shape 221"/>
         <p:cNvGrpSpPr/>
         <p:nvPr/>
       </p:nvGrpSpPr>
@@ -2222,7 +2223,7 @@
       </p:grpSpPr>
       <p:sp>
         <p:nvSpPr>
-          <p:cNvPr id="220" name="Google Shape;220;g35da4827f45_2_17:notes"/>
+          <p:cNvPr id="222" name="Google Shape;222;g35da4827f45_2_17:notes"/>
           <p:cNvSpPr/>
           <p:nvPr>
             <p:ph idx="2" type="sldImg"/>
@@ -2257,7 +2258,7 @@
       </p:sp>
       <p:sp>
         <p:nvSpPr>
-          <p:cNvPr id="221" name="Google Shape;221;g35da4827f45_2_17:notes"/>
+          <p:cNvPr id="223" name="Google Shape;223;g35da4827f45_2_17:notes"/>
           <p:cNvSpPr txBox="1"/>
           <p:nvPr>
             <p:ph idx="1" type="body"/>
@@ -2307,7 +2308,7 @@
   <p:cSld>
     <p:spTree>
       <p:nvGrpSpPr>
-        <p:cNvPr id="226" name="Shape 226"/>
+        <p:cNvPr id="228" name="Shape 228"/>
         <p:cNvGrpSpPr/>
         <p:nvPr/>
       </p:nvGrpSpPr>
@@ -2321,7 +2322,7 @@
       </p:grpSpPr>
       <p:sp>
         <p:nvSpPr>
-          <p:cNvPr id="227" name="Google Shape;227;g35da4827f45_0_157:notes"/>
+          <p:cNvPr id="229" name="Google Shape;229;g35da4827f45_0_157:notes"/>
           <p:cNvSpPr/>
           <p:nvPr>
             <p:ph idx="2" type="sldImg"/>
@@ -2356,7 +2357,7 @@
       </p:sp>
       <p:sp>
         <p:nvSpPr>
-          <p:cNvPr id="228" name="Google Shape;228;g35da4827f45_0_157:notes"/>
+          <p:cNvPr id="230" name="Google Shape;230;g35da4827f45_0_157:notes"/>
           <p:cNvSpPr txBox="1"/>
           <p:nvPr>
             <p:ph idx="1" type="body"/>
@@ -2802,7 +2803,7 @@
   <p:cSld>
     <p:spTree>
       <p:nvGrpSpPr>
-        <p:cNvPr id="94" name="Shape 94"/>
+        <p:cNvPr id="95" name="Shape 95"/>
         <p:cNvGrpSpPr/>
         <p:nvPr/>
       </p:nvGrpSpPr>
@@ -2816,7 +2817,7 @@
       </p:grpSpPr>
       <p:sp>
         <p:nvSpPr>
-          <p:cNvPr id="95" name="Google Shape;95;g35da4827f45_0_14:notes"/>
+          <p:cNvPr id="96" name="Google Shape;96;g35da4827f45_0_14:notes"/>
           <p:cNvSpPr/>
           <p:nvPr>
             <p:ph idx="2" type="sldImg"/>
@@ -2851,7 +2852,7 @@
       </p:sp>
       <p:sp>
         <p:nvSpPr>
-          <p:cNvPr id="96" name="Google Shape;96;g35da4827f45_0_14:notes"/>
+          <p:cNvPr id="97" name="Google Shape;97;g35da4827f45_0_14:notes"/>
           <p:cNvSpPr txBox="1"/>
           <p:nvPr>
             <p:ph idx="1" type="body"/>
@@ -2901,7 +2902,7 @@
   <p:cSld>
     <p:spTree>
       <p:nvGrpSpPr>
-        <p:cNvPr id="102" name="Shape 102"/>
+        <p:cNvPr id="104" name="Shape 104"/>
         <p:cNvGrpSpPr/>
         <p:nvPr/>
       </p:nvGrpSpPr>
@@ -2915,7 +2916,7 @@
       </p:grpSpPr>
       <p:sp>
         <p:nvSpPr>
-          <p:cNvPr id="103" name="Google Shape;103;g35da4827f45_2_3:notes"/>
+          <p:cNvPr id="105" name="Google Shape;105;g35da4827f45_2_3:notes"/>
           <p:cNvSpPr/>
           <p:nvPr>
             <p:ph idx="2" type="sldImg"/>
@@ -2950,7 +2951,7 @@
       </p:sp>
       <p:sp>
         <p:nvSpPr>
-          <p:cNvPr id="104" name="Google Shape;104;g35da4827f45_2_3:notes"/>
+          <p:cNvPr id="106" name="Google Shape;106;g35da4827f45_2_3:notes"/>
           <p:cNvSpPr txBox="1"/>
           <p:nvPr>
             <p:ph idx="1" type="body"/>
@@ -3000,7 +3001,7 @@
   <p:cSld>
     <p:spTree>
       <p:nvGrpSpPr>
-        <p:cNvPr id="109" name="Shape 109"/>
+        <p:cNvPr id="111" name="Shape 111"/>
         <p:cNvGrpSpPr/>
         <p:nvPr/>
       </p:nvGrpSpPr>
@@ -3014,7 +3015,7 @@
       </p:grpSpPr>
       <p:sp>
         <p:nvSpPr>
-          <p:cNvPr id="110" name="Google Shape;110;g35da4827f45_0_67:notes"/>
+          <p:cNvPr id="112" name="Google Shape;112;g35da4827f45_0_67:notes"/>
           <p:cNvSpPr/>
           <p:nvPr>
             <p:ph idx="2" type="sldImg"/>
@@ -3049,7 +3050,7 @@
       </p:sp>
       <p:sp>
         <p:nvSpPr>
-          <p:cNvPr id="111" name="Google Shape;111;g35da4827f45_0_67:notes"/>
+          <p:cNvPr id="113" name="Google Shape;113;g35da4827f45_0_67:notes"/>
           <p:cNvSpPr txBox="1"/>
           <p:nvPr>
             <p:ph idx="1" type="body"/>
@@ -8036,7 +8037,7 @@
   <p:cSld>
     <p:spTree>
       <p:nvGrpSpPr>
-        <p:cNvPr id="121" name="Shape 121"/>
+        <p:cNvPr id="123" name="Shape 123"/>
         <p:cNvGrpSpPr/>
         <p:nvPr/>
       </p:nvGrpSpPr>
@@ -8050,7 +8051,7 @@
       </p:grpSpPr>
       <p:sp>
         <p:nvSpPr>
-          <p:cNvPr id="122" name="Google Shape;122;p22"/>
+          <p:cNvPr id="124" name="Google Shape;124;p22"/>
           <p:cNvSpPr txBox="1"/>
           <p:nvPr>
             <p:ph type="title"/>
@@ -8101,7 +8102,7 @@
       </p:sp>
       <p:sp>
         <p:nvSpPr>
-          <p:cNvPr id="123" name="Google Shape;123;p22"/>
+          <p:cNvPr id="125" name="Google Shape;125;p22"/>
           <p:cNvSpPr txBox="1"/>
           <p:nvPr>
             <p:ph idx="1" type="body"/>
@@ -8173,7 +8174,7 @@
       </p:sp>
       <p:pic>
         <p:nvPicPr>
-          <p:cNvPr id="124" name="Google Shape;124;p22"/>
+          <p:cNvPr id="126" name="Google Shape;126;p22"/>
           <p:cNvPicPr preferRelativeResize="0"/>
           <p:nvPr/>
         </p:nvPicPr>
@@ -8201,7 +8202,7 @@
       </p:pic>
       <p:pic>
         <p:nvPicPr>
-          <p:cNvPr id="125" name="Google Shape;125;p22"/>
+          <p:cNvPr id="127" name="Google Shape;127;p22"/>
           <p:cNvPicPr preferRelativeResize="0"/>
           <p:nvPr/>
         </p:nvPicPr>
@@ -8240,7 +8241,7 @@
   <p:cSld>
     <p:spTree>
       <p:nvGrpSpPr>
-        <p:cNvPr id="129" name="Shape 129"/>
+        <p:cNvPr id="131" name="Shape 131"/>
         <p:cNvGrpSpPr/>
         <p:nvPr/>
       </p:nvGrpSpPr>
@@ -8254,7 +8255,7 @@
       </p:grpSpPr>
       <p:sp>
         <p:nvSpPr>
-          <p:cNvPr id="130" name="Google Shape;130;p23"/>
+          <p:cNvPr id="132" name="Google Shape;132;p23"/>
           <p:cNvSpPr txBox="1"/>
           <p:nvPr>
             <p:ph idx="1" type="body"/>
@@ -8294,7 +8295,7 @@
       </p:sp>
       <p:pic>
         <p:nvPicPr>
-          <p:cNvPr id="131" name="Google Shape;131;p23"/>
+          <p:cNvPr id="133" name="Google Shape;133;p23"/>
           <p:cNvPicPr preferRelativeResize="0"/>
           <p:nvPr/>
         </p:nvPicPr>
@@ -8322,7 +8323,7 @@
       </p:pic>
       <p:sp>
         <p:nvSpPr>
-          <p:cNvPr id="132" name="Google Shape;132;p23"/>
+          <p:cNvPr id="134" name="Google Shape;134;p23"/>
           <p:cNvSpPr txBox="1"/>
           <p:nvPr>
             <p:ph type="title"/>
@@ -8387,7 +8388,7 @@
   <p:cSld>
     <p:spTree>
       <p:nvGrpSpPr>
-        <p:cNvPr id="136" name="Shape 136"/>
+        <p:cNvPr id="138" name="Shape 138"/>
         <p:cNvGrpSpPr/>
         <p:nvPr/>
       </p:nvGrpSpPr>
@@ -8401,7 +8402,7 @@
       </p:grpSpPr>
       <p:sp>
         <p:nvSpPr>
-          <p:cNvPr id="137" name="Google Shape;137;p24"/>
+          <p:cNvPr id="139" name="Google Shape;139;p24"/>
           <p:cNvSpPr txBox="1"/>
           <p:nvPr>
             <p:ph type="title"/>
@@ -8441,7 +8442,7 @@
       </p:sp>
       <p:sp>
         <p:nvSpPr>
-          <p:cNvPr id="138" name="Google Shape;138;p24"/>
+          <p:cNvPr id="140" name="Google Shape;140;p24"/>
           <p:cNvSpPr txBox="1"/>
           <p:nvPr>
             <p:ph idx="1" type="body"/>
@@ -8504,7 +8505,7 @@
       </p:sp>
       <p:pic>
         <p:nvPicPr>
-          <p:cNvPr id="139" name="Google Shape;139;p24"/>
+          <p:cNvPr id="141" name="Google Shape;141;p24"/>
           <p:cNvPicPr preferRelativeResize="0"/>
           <p:nvPr/>
         </p:nvPicPr>
@@ -8543,7 +8544,7 @@
   <p:cSld>
     <p:spTree>
       <p:nvGrpSpPr>
-        <p:cNvPr id="143" name="Shape 143"/>
+        <p:cNvPr id="145" name="Shape 145"/>
         <p:cNvGrpSpPr/>
         <p:nvPr/>
       </p:nvGrpSpPr>
@@ -8557,7 +8558,7 @@
       </p:grpSpPr>
       <p:sp>
         <p:nvSpPr>
-          <p:cNvPr id="144" name="Google Shape;144;p25"/>
+          <p:cNvPr id="146" name="Google Shape;146;p25"/>
           <p:cNvSpPr txBox="1"/>
           <p:nvPr>
             <p:ph type="title"/>
@@ -8597,7 +8598,7 @@
       </p:sp>
       <p:sp>
         <p:nvSpPr>
-          <p:cNvPr id="145" name="Google Shape;145;p25"/>
+          <p:cNvPr id="147" name="Google Shape;147;p25"/>
           <p:cNvSpPr txBox="1"/>
           <p:nvPr>
             <p:ph idx="1" type="body"/>
@@ -8653,7 +8654,7 @@
       </p:sp>
       <p:pic>
         <p:nvPicPr>
-          <p:cNvPr id="146" name="Google Shape;146;p25"/>
+          <p:cNvPr id="148" name="Google Shape;148;p25"/>
           <p:cNvPicPr preferRelativeResize="0"/>
           <p:nvPr/>
         </p:nvPicPr>
@@ -8681,7 +8682,7 @@
       </p:pic>
       <p:pic>
         <p:nvPicPr>
-          <p:cNvPr id="147" name="Google Shape;147;p25"/>
+          <p:cNvPr id="149" name="Google Shape;149;p25"/>
           <p:cNvPicPr preferRelativeResize="0"/>
           <p:nvPr/>
         </p:nvPicPr>
@@ -8720,7 +8721,7 @@
   <p:cSld>
     <p:spTree>
       <p:nvGrpSpPr>
-        <p:cNvPr id="151" name="Shape 151"/>
+        <p:cNvPr id="153" name="Shape 153"/>
         <p:cNvGrpSpPr/>
         <p:nvPr/>
       </p:nvGrpSpPr>
@@ -8734,7 +8735,7 @@
       </p:grpSpPr>
       <p:sp>
         <p:nvSpPr>
-          <p:cNvPr id="152" name="Google Shape;152;p26"/>
+          <p:cNvPr id="154" name="Google Shape;154;p26"/>
           <p:cNvSpPr txBox="1"/>
           <p:nvPr>
             <p:ph type="title"/>
@@ -8774,7 +8775,7 @@
       </p:sp>
       <p:sp>
         <p:nvSpPr>
-          <p:cNvPr id="153" name="Google Shape;153;p26"/>
+          <p:cNvPr id="155" name="Google Shape;155;p26"/>
           <p:cNvSpPr txBox="1"/>
           <p:nvPr>
             <p:ph idx="1" type="body"/>
@@ -8835,7 +8836,7 @@
       </p:sp>
       <p:pic>
         <p:nvPicPr>
-          <p:cNvPr id="154" name="Google Shape;154;p26"/>
+          <p:cNvPr id="156" name="Google Shape;156;p26"/>
           <p:cNvPicPr preferRelativeResize="0"/>
           <p:nvPr/>
         </p:nvPicPr>
@@ -8874,7 +8875,7 @@
   <p:cSld>
     <p:spTree>
       <p:nvGrpSpPr>
-        <p:cNvPr id="158" name="Shape 158"/>
+        <p:cNvPr id="160" name="Shape 160"/>
         <p:cNvGrpSpPr/>
         <p:nvPr/>
       </p:nvGrpSpPr>
@@ -8888,7 +8889,7 @@
       </p:grpSpPr>
       <p:sp>
         <p:nvSpPr>
-          <p:cNvPr id="159" name="Google Shape;159;p27"/>
+          <p:cNvPr id="161" name="Google Shape;161;p27"/>
           <p:cNvSpPr txBox="1"/>
           <p:nvPr>
             <p:ph type="title"/>
@@ -8928,7 +8929,7 @@
       </p:sp>
       <p:sp>
         <p:nvSpPr>
-          <p:cNvPr id="160" name="Google Shape;160;p27"/>
+          <p:cNvPr id="162" name="Google Shape;162;p27"/>
           <p:cNvSpPr txBox="1"/>
           <p:nvPr>
             <p:ph idx="1" type="body"/>
@@ -8984,7 +8985,7 @@
       </p:sp>
       <p:pic>
         <p:nvPicPr>
-          <p:cNvPr id="161" name="Google Shape;161;p27"/>
+          <p:cNvPr id="163" name="Google Shape;163;p27"/>
           <p:cNvPicPr preferRelativeResize="0"/>
           <p:nvPr/>
         </p:nvPicPr>
@@ -9023,7 +9024,7 @@
   <p:cSld>
     <p:spTree>
       <p:nvGrpSpPr>
-        <p:cNvPr id="165" name="Shape 165"/>
+        <p:cNvPr id="167" name="Shape 167"/>
         <p:cNvGrpSpPr/>
         <p:nvPr/>
       </p:nvGrpSpPr>
@@ -9037,7 +9038,7 @@
       </p:grpSpPr>
       <p:sp>
         <p:nvSpPr>
-          <p:cNvPr id="166" name="Google Shape;166;p28"/>
+          <p:cNvPr id="168" name="Google Shape;168;p28"/>
           <p:cNvSpPr txBox="1"/>
           <p:nvPr>
             <p:ph type="title"/>
@@ -9077,7 +9078,7 @@
       </p:sp>
       <p:sp>
         <p:nvSpPr>
-          <p:cNvPr id="167" name="Google Shape;167;p28"/>
+          <p:cNvPr id="169" name="Google Shape;169;p28"/>
           <p:cNvSpPr txBox="1"/>
           <p:nvPr>
             <p:ph idx="1" type="body"/>
@@ -9168,7 +9169,7 @@
       </p:sp>
       <p:pic>
         <p:nvPicPr>
-          <p:cNvPr id="168" name="Google Shape;168;p28"/>
+          <p:cNvPr id="170" name="Google Shape;170;p28"/>
           <p:cNvPicPr preferRelativeResize="0"/>
           <p:nvPr/>
         </p:nvPicPr>
@@ -9196,7 +9197,7 @@
       </p:pic>
       <p:pic>
         <p:nvPicPr>
-          <p:cNvPr id="169" name="Google Shape;169;p28"/>
+          <p:cNvPr id="171" name="Google Shape;171;p28"/>
           <p:cNvPicPr preferRelativeResize="0"/>
           <p:nvPr/>
         </p:nvPicPr>
@@ -9224,7 +9225,7 @@
       </p:pic>
       <p:pic>
         <p:nvPicPr>
-          <p:cNvPr id="170" name="Google Shape;170;p28"/>
+          <p:cNvPr id="172" name="Google Shape;172;p28"/>
           <p:cNvPicPr preferRelativeResize="0"/>
           <p:nvPr/>
         </p:nvPicPr>
@@ -9263,7 +9264,7 @@
   <p:cSld>
     <p:spTree>
       <p:nvGrpSpPr>
-        <p:cNvPr id="174" name="Shape 174"/>
+        <p:cNvPr id="176" name="Shape 176"/>
         <p:cNvGrpSpPr/>
         <p:nvPr/>
       </p:nvGrpSpPr>
@@ -9277,7 +9278,7 @@
       </p:grpSpPr>
       <p:sp>
         <p:nvSpPr>
-          <p:cNvPr id="175" name="Google Shape;175;p29"/>
+          <p:cNvPr id="177" name="Google Shape;177;p29"/>
           <p:cNvSpPr txBox="1"/>
           <p:nvPr>
             <p:ph type="title"/>
@@ -9321,7 +9322,7 @@
       </p:sp>
       <p:sp>
         <p:nvSpPr>
-          <p:cNvPr id="176" name="Google Shape;176;p29"/>
+          <p:cNvPr id="178" name="Google Shape;178;p29"/>
           <p:cNvSpPr txBox="1"/>
           <p:nvPr>
             <p:ph idx="1" type="body"/>
@@ -9369,7 +9370,7 @@
       </p:sp>
       <p:pic>
         <p:nvPicPr>
-          <p:cNvPr id="177" name="Google Shape;177;p29"/>
+          <p:cNvPr id="179" name="Google Shape;179;p29"/>
           <p:cNvPicPr preferRelativeResize="0"/>
           <p:nvPr/>
         </p:nvPicPr>
@@ -9397,7 +9398,7 @@
       </p:pic>
       <p:sp>
         <p:nvSpPr>
-          <p:cNvPr id="178" name="Google Shape;178;p29"/>
+          <p:cNvPr id="180" name="Google Shape;180;p29"/>
           <p:cNvSpPr txBox="1"/>
           <p:nvPr>
             <p:ph idx="1" type="body"/>
@@ -9441,7 +9442,7 @@
       </p:sp>
       <p:pic>
         <p:nvPicPr>
-          <p:cNvPr id="179" name="Google Shape;179;p29"/>
+          <p:cNvPr id="181" name="Google Shape;181;p29"/>
           <p:cNvPicPr preferRelativeResize="0"/>
           <p:nvPr/>
         </p:nvPicPr>
@@ -9469,7 +9470,7 @@
       </p:pic>
       <p:pic>
         <p:nvPicPr>
-          <p:cNvPr id="180" name="Google Shape;180;p29"/>
+          <p:cNvPr id="182" name="Google Shape;182;p29"/>
           <p:cNvPicPr preferRelativeResize="0"/>
           <p:nvPr/>
         </p:nvPicPr>
@@ -9497,7 +9498,7 @@
       </p:pic>
       <p:sp>
         <p:nvSpPr>
-          <p:cNvPr id="181" name="Google Shape;181;p29"/>
+          <p:cNvPr id="183" name="Google Shape;183;p29"/>
           <p:cNvSpPr txBox="1"/>
           <p:nvPr>
             <p:ph idx="1" type="body"/>
@@ -9533,7 +9534,7 @@
             </a:pPr>
             <a:r>
               <a:rPr lang="iw" sz="1300"/>
-              <a:t>And that TESLA is actually tied with FORD in Columbia</a:t>
+              <a:t>And TESLA is actually tied with FORD in Columbia</a:t>
             </a:r>
             <a:endParaRPr sz="1420"/>
           </a:p>
@@ -9541,7 +9542,7 @@
       </p:sp>
       <p:pic>
         <p:nvPicPr>
-          <p:cNvPr id="182" name="Google Shape;182;p29"/>
+          <p:cNvPr id="184" name="Google Shape;184;p29"/>
           <p:cNvPicPr preferRelativeResize="0"/>
           <p:nvPr/>
         </p:nvPicPr>
@@ -9580,7 +9581,7 @@
   <p:cSld>
     <p:spTree>
       <p:nvGrpSpPr>
-        <p:cNvPr id="186" name="Shape 186"/>
+        <p:cNvPr id="188" name="Shape 188"/>
         <p:cNvGrpSpPr/>
         <p:nvPr/>
       </p:nvGrpSpPr>
@@ -9594,7 +9595,7 @@
       </p:grpSpPr>
       <p:sp>
         <p:nvSpPr>
-          <p:cNvPr id="187" name="Google Shape;187;p30"/>
+          <p:cNvPr id="189" name="Google Shape;189;p30"/>
           <p:cNvSpPr txBox="1"/>
           <p:nvPr>
             <p:ph type="title"/>
@@ -9634,7 +9635,7 @@
       </p:sp>
       <p:sp>
         <p:nvSpPr>
-          <p:cNvPr id="188" name="Google Shape;188;p30"/>
+          <p:cNvPr id="190" name="Google Shape;190;p30"/>
           <p:cNvSpPr txBox="1"/>
           <p:nvPr>
             <p:ph idx="1" type="body"/>
@@ -9686,7 +9687,7 @@
       </p:sp>
       <p:pic>
         <p:nvPicPr>
-          <p:cNvPr id="189" name="Google Shape;189;p30"/>
+          <p:cNvPr id="191" name="Google Shape;191;p30"/>
           <p:cNvPicPr preferRelativeResize="0"/>
           <p:nvPr/>
         </p:nvPicPr>
@@ -9714,7 +9715,7 @@
       </p:pic>
       <p:pic>
         <p:nvPicPr>
-          <p:cNvPr id="190" name="Google Shape;190;p30"/>
+          <p:cNvPr id="192" name="Google Shape;192;p30"/>
           <p:cNvPicPr preferRelativeResize="0"/>
           <p:nvPr/>
         </p:nvPicPr>
@@ -9753,7 +9754,7 @@
   <p:cSld>
     <p:spTree>
       <p:nvGrpSpPr>
-        <p:cNvPr id="194" name="Shape 194"/>
+        <p:cNvPr id="196" name="Shape 196"/>
         <p:cNvGrpSpPr/>
         <p:nvPr/>
       </p:nvGrpSpPr>
@@ -9767,7 +9768,7 @@
       </p:grpSpPr>
       <p:sp>
         <p:nvSpPr>
-          <p:cNvPr id="195" name="Google Shape;195;p31"/>
+          <p:cNvPr id="197" name="Google Shape;197;p31"/>
           <p:cNvSpPr txBox="1"/>
           <p:nvPr>
             <p:ph type="title"/>
@@ -9807,7 +9808,7 @@
       </p:sp>
       <p:sp>
         <p:nvSpPr>
-          <p:cNvPr id="196" name="Google Shape;196;p31"/>
+          <p:cNvPr id="198" name="Google Shape;198;p31"/>
           <p:cNvSpPr txBox="1"/>
           <p:nvPr>
             <p:ph idx="1" type="body"/>
@@ -9906,7 +9907,7 @@
       </p:sp>
       <p:pic>
         <p:nvPicPr>
-          <p:cNvPr id="197" name="Google Shape;197;p31"/>
+          <p:cNvPr id="199" name="Google Shape;199;p31"/>
           <p:cNvPicPr preferRelativeResize="0"/>
           <p:nvPr/>
         </p:nvPicPr>
@@ -10164,7 +10165,7 @@
   <p:cSld>
     <p:spTree>
       <p:nvGrpSpPr>
-        <p:cNvPr id="201" name="Shape 201"/>
+        <p:cNvPr id="203" name="Shape 203"/>
         <p:cNvGrpSpPr/>
         <p:nvPr/>
       </p:nvGrpSpPr>
@@ -10178,7 +10179,7 @@
       </p:grpSpPr>
       <p:sp>
         <p:nvSpPr>
-          <p:cNvPr id="202" name="Google Shape;202;p32"/>
+          <p:cNvPr id="204" name="Google Shape;204;p32"/>
           <p:cNvSpPr txBox="1"/>
           <p:nvPr>
             <p:ph type="title"/>
@@ -10218,7 +10219,7 @@
       </p:sp>
       <p:sp>
         <p:nvSpPr>
-          <p:cNvPr id="203" name="Google Shape;203;p32"/>
+          <p:cNvPr id="205" name="Google Shape;205;p32"/>
           <p:cNvSpPr txBox="1"/>
           <p:nvPr>
             <p:ph idx="1" type="body"/>
@@ -10325,7 +10326,7 @@
       </p:sp>
       <p:pic>
         <p:nvPicPr>
-          <p:cNvPr id="204" name="Google Shape;204;p32"/>
+          <p:cNvPr id="206" name="Google Shape;206;p32"/>
           <p:cNvPicPr preferRelativeResize="0"/>
           <p:nvPr/>
         </p:nvPicPr>
@@ -10364,7 +10365,7 @@
   <p:cSld>
     <p:spTree>
       <p:nvGrpSpPr>
-        <p:cNvPr id="208" name="Shape 208"/>
+        <p:cNvPr id="210" name="Shape 210"/>
         <p:cNvGrpSpPr/>
         <p:nvPr/>
       </p:nvGrpSpPr>
@@ -10378,7 +10379,7 @@
       </p:grpSpPr>
       <p:sp>
         <p:nvSpPr>
-          <p:cNvPr id="209" name="Google Shape;209;p33"/>
+          <p:cNvPr id="211" name="Google Shape;211;p33"/>
           <p:cNvSpPr txBox="1"/>
           <p:nvPr>
             <p:ph type="title"/>
@@ -10418,7 +10419,7 @@
       </p:sp>
       <p:sp>
         <p:nvSpPr>
-          <p:cNvPr id="210" name="Google Shape;210;p33"/>
+          <p:cNvPr id="212" name="Google Shape;212;p33"/>
           <p:cNvSpPr txBox="1"/>
           <p:nvPr>
             <p:ph idx="1" type="body"/>
@@ -10470,7 +10471,7 @@
       </p:sp>
       <p:pic>
         <p:nvPicPr>
-          <p:cNvPr id="211" name="Google Shape;211;p33"/>
+          <p:cNvPr id="213" name="Google Shape;213;p33"/>
           <p:cNvPicPr preferRelativeResize="0"/>
           <p:nvPr/>
         </p:nvPicPr>
@@ -10509,7 +10510,7 @@
   <p:cSld>
     <p:spTree>
       <p:nvGrpSpPr>
-        <p:cNvPr id="215" name="Shape 215"/>
+        <p:cNvPr id="217" name="Shape 217"/>
         <p:cNvGrpSpPr/>
         <p:nvPr/>
       </p:nvGrpSpPr>
@@ -10523,7 +10524,7 @@
       </p:grpSpPr>
       <p:sp>
         <p:nvSpPr>
-          <p:cNvPr id="216" name="Google Shape;216;p34"/>
+          <p:cNvPr id="218" name="Google Shape;218;p34"/>
           <p:cNvSpPr txBox="1"/>
           <p:nvPr>
             <p:ph type="title"/>
@@ -10567,7 +10568,7 @@
       </p:sp>
       <p:sp>
         <p:nvSpPr>
-          <p:cNvPr id="217" name="Google Shape;217;p34"/>
+          <p:cNvPr id="219" name="Google Shape;219;p34"/>
           <p:cNvSpPr txBox="1"/>
           <p:nvPr>
             <p:ph idx="1" type="body"/>
@@ -10607,7 +10608,7 @@
       </p:sp>
       <p:pic>
         <p:nvPicPr>
-          <p:cNvPr id="218" name="Google Shape;218;p34"/>
+          <p:cNvPr id="220" name="Google Shape;220;p34"/>
           <p:cNvPicPr preferRelativeResize="0"/>
           <p:nvPr/>
         </p:nvPicPr>
@@ -10646,7 +10647,7 @@
   <p:cSld>
     <p:spTree>
       <p:nvGrpSpPr>
-        <p:cNvPr id="222" name="Shape 222"/>
+        <p:cNvPr id="224" name="Shape 224"/>
         <p:cNvGrpSpPr/>
         <p:nvPr/>
       </p:nvGrpSpPr>
@@ -10660,7 +10661,7 @@
       </p:grpSpPr>
       <p:sp>
         <p:nvSpPr>
-          <p:cNvPr id="223" name="Google Shape;223;p35"/>
+          <p:cNvPr id="225" name="Google Shape;225;p35"/>
           <p:cNvSpPr txBox="1"/>
           <p:nvPr>
             <p:ph type="title"/>
@@ -10700,7 +10701,7 @@
       </p:sp>
       <p:sp>
         <p:nvSpPr>
-          <p:cNvPr id="224" name="Google Shape;224;p35"/>
+          <p:cNvPr id="226" name="Google Shape;226;p35"/>
           <p:cNvSpPr txBox="1"/>
           <p:nvPr>
             <p:ph idx="1" type="body"/>
@@ -10740,7 +10741,7 @@
       </p:sp>
       <p:pic>
         <p:nvPicPr>
-          <p:cNvPr id="225" name="Google Shape;225;p35"/>
+          <p:cNvPr id="227" name="Google Shape;227;p35"/>
           <p:cNvPicPr preferRelativeResize="0"/>
           <p:nvPr/>
         </p:nvPicPr>
@@ -10779,7 +10780,7 @@
   <p:cSld>
     <p:spTree>
       <p:nvGrpSpPr>
-        <p:cNvPr id="229" name="Shape 229"/>
+        <p:cNvPr id="231" name="Shape 231"/>
         <p:cNvGrpSpPr/>
         <p:nvPr/>
       </p:nvGrpSpPr>
@@ -10793,7 +10794,7 @@
       </p:grpSpPr>
       <p:sp>
         <p:nvSpPr>
-          <p:cNvPr id="230" name="Google Shape;230;p36"/>
+          <p:cNvPr id="232" name="Google Shape;232;p36"/>
           <p:cNvSpPr txBox="1"/>
           <p:nvPr>
             <p:ph type="title"/>
@@ -10833,7 +10834,7 @@
       </p:sp>
       <p:pic>
         <p:nvPicPr>
-          <p:cNvPr id="231" name="Google Shape;231;p36"/>
+          <p:cNvPr id="233" name="Google Shape;233;p36"/>
           <p:cNvPicPr preferRelativeResize="0"/>
           <p:nvPr/>
         </p:nvPicPr>
@@ -11170,7 +11171,7 @@
             <a:tbl>
               <a:tblPr>
                 <a:noFill/>
-                <a:tableStyleId>{A1A136FA-2B72-4651-A519-8C62079C87FA}</a:tableStyleId>
+                <a:tableStyleId>{2A01AFC5-6646-4A61-BB2E-F47871C702AD}</a:tableStyleId>
               </a:tblPr>
               <a:tblGrid>
                 <a:gridCol w="2019075"/>
@@ -11974,7 +11975,7 @@
             <a:tbl>
               <a:tblPr>
                 <a:noFill/>
-                <a:tableStyleId>{A1A136FA-2B72-4651-A519-8C62079C87FA}</a:tableStyleId>
+                <a:tableStyleId>{2A01AFC5-6646-4A61-BB2E-F47871C702AD}</a:tableStyleId>
               </a:tblPr>
               <a:tblGrid>
                 <a:gridCol w="2019050"/>
@@ -12845,8 +12846,36 @@
         </p:blipFill>
         <p:spPr>
           <a:xfrm>
-            <a:off x="476025" y="4206000"/>
+            <a:off x="476025" y="3501250"/>
             <a:ext cx="8520601" cy="688000"/>
+          </a:xfrm>
+          <a:prstGeom prst="rect">
+            <a:avLst/>
+          </a:prstGeom>
+          <a:noFill/>
+          <a:ln>
+            <a:noFill/>
+          </a:ln>
+        </p:spPr>
+      </p:pic>
+      <p:pic>
+        <p:nvPicPr>
+          <p:cNvPr id="94" name="Google Shape;94;p18"/>
+          <p:cNvPicPr preferRelativeResize="0"/>
+          <p:nvPr/>
+        </p:nvPicPr>
+        <p:blipFill>
+          <a:blip r:embed="rId4">
+            <a:alphaModFix/>
+          </a:blip>
+          <a:stretch>
+            <a:fillRect/>
+          </a:stretch>
+        </p:blipFill>
+        <p:spPr>
+          <a:xfrm>
+            <a:off x="3152980" y="4288175"/>
+            <a:ext cx="2838047" cy="572700"/>
           </a:xfrm>
           <a:prstGeom prst="rect">
             <a:avLst/>
@@ -12870,7 +12899,7 @@
   <p:cSld>
     <p:spTree>
       <p:nvGrpSpPr>
-        <p:cNvPr id="97" name="Shape 97"/>
+        <p:cNvPr id="98" name="Shape 98"/>
         <p:cNvGrpSpPr/>
         <p:nvPr/>
       </p:nvGrpSpPr>
@@ -12884,7 +12913,7 @@
       </p:grpSpPr>
       <p:sp>
         <p:nvSpPr>
-          <p:cNvPr id="98" name="Google Shape;98;p19"/>
+          <p:cNvPr id="99" name="Google Shape;99;p19"/>
           <p:cNvSpPr txBox="1"/>
           <p:nvPr>
             <p:ph type="title"/>
@@ -12924,7 +12953,7 @@
       </p:sp>
       <p:sp>
         <p:nvSpPr>
-          <p:cNvPr id="99" name="Google Shape;99;p19"/>
+          <p:cNvPr id="100" name="Google Shape;100;p19"/>
           <p:cNvSpPr txBox="1"/>
           <p:nvPr>
             <p:ph idx="1" type="body"/>
@@ -12999,7 +13028,7 @@
       </p:sp>
       <p:pic>
         <p:nvPicPr>
-          <p:cNvPr id="100" name="Google Shape;100;p19"/>
+          <p:cNvPr id="101" name="Google Shape;101;p19"/>
           <p:cNvPicPr preferRelativeResize="0"/>
           <p:nvPr/>
         </p:nvPicPr>
@@ -13027,7 +13056,7 @@
       </p:pic>
       <p:pic>
         <p:nvPicPr>
-          <p:cNvPr id="101" name="Google Shape;101;p19"/>
+          <p:cNvPr id="102" name="Google Shape;102;p19"/>
           <p:cNvPicPr preferRelativeResize="0"/>
           <p:nvPr/>
         </p:nvPicPr>
@@ -13042,7 +13071,35 @@
         <p:spPr>
           <a:xfrm>
             <a:off x="67575" y="4310650"/>
-            <a:ext cx="8934252" cy="721825"/>
+            <a:ext cx="5846000" cy="472325"/>
+          </a:xfrm>
+          <a:prstGeom prst="rect">
+            <a:avLst/>
+          </a:prstGeom>
+          <a:noFill/>
+          <a:ln>
+            <a:noFill/>
+          </a:ln>
+        </p:spPr>
+      </p:pic>
+      <p:pic>
+        <p:nvPicPr>
+          <p:cNvPr id="103" name="Google Shape;103;p19"/>
+          <p:cNvPicPr preferRelativeResize="0"/>
+          <p:nvPr/>
+        </p:nvPicPr>
+        <p:blipFill>
+          <a:blip r:embed="rId5">
+            <a:alphaModFix/>
+          </a:blip>
+          <a:stretch>
+            <a:fillRect/>
+          </a:stretch>
+        </p:blipFill>
+        <p:spPr>
+          <a:xfrm>
+            <a:off x="6337713" y="4299174"/>
+            <a:ext cx="2076450" cy="495300"/>
           </a:xfrm>
           <a:prstGeom prst="rect">
             <a:avLst/>
@@ -13066,7 +13123,7 @@
   <p:cSld>
     <p:spTree>
       <p:nvGrpSpPr>
-        <p:cNvPr id="105" name="Shape 105"/>
+        <p:cNvPr id="107" name="Shape 107"/>
         <p:cNvGrpSpPr/>
         <p:nvPr/>
       </p:nvGrpSpPr>
@@ -13080,7 +13137,7 @@
       </p:grpSpPr>
       <p:sp>
         <p:nvSpPr>
-          <p:cNvPr id="106" name="Google Shape;106;p20"/>
+          <p:cNvPr id="108" name="Google Shape;108;p20"/>
           <p:cNvSpPr txBox="1"/>
           <p:nvPr>
             <p:ph type="title"/>
@@ -13120,7 +13177,7 @@
       </p:sp>
       <p:sp>
         <p:nvSpPr>
-          <p:cNvPr id="107" name="Google Shape;107;p20"/>
+          <p:cNvPr id="109" name="Google Shape;109;p20"/>
           <p:cNvSpPr txBox="1"/>
           <p:nvPr>
             <p:ph idx="1" type="body"/>
@@ -13556,7 +13613,7 @@
       </p:sp>
       <p:sp>
         <p:nvSpPr>
-          <p:cNvPr id="108" name="Google Shape;108;p20"/>
+          <p:cNvPr id="110" name="Google Shape;110;p20"/>
           <p:cNvSpPr txBox="1"/>
           <p:nvPr/>
         </p:nvSpPr>
@@ -13756,7 +13813,7 @@
   <p:cSld>
     <p:spTree>
       <p:nvGrpSpPr>
-        <p:cNvPr id="112" name="Shape 112"/>
+        <p:cNvPr id="114" name="Shape 114"/>
         <p:cNvGrpSpPr/>
         <p:nvPr/>
       </p:nvGrpSpPr>
@@ -13770,7 +13827,7 @@
       </p:grpSpPr>
       <p:sp>
         <p:nvSpPr>
-          <p:cNvPr id="113" name="Google Shape;113;p21"/>
+          <p:cNvPr id="115" name="Google Shape;115;p21"/>
           <p:cNvSpPr txBox="1"/>
           <p:nvPr>
             <p:ph type="title"/>
@@ -13810,7 +13867,7 @@
       </p:sp>
       <p:sp>
         <p:nvSpPr>
-          <p:cNvPr id="114" name="Google Shape;114;p21"/>
+          <p:cNvPr id="116" name="Google Shape;116;p21"/>
           <p:cNvSpPr txBox="1"/>
           <p:nvPr>
             <p:ph idx="1" type="body"/>
@@ -13857,7 +13914,7 @@
       </p:sp>
       <p:pic>
         <p:nvPicPr>
-          <p:cNvPr id="115" name="Google Shape;115;p21"/>
+          <p:cNvPr id="117" name="Google Shape;117;p21"/>
           <p:cNvPicPr preferRelativeResize="0"/>
           <p:nvPr/>
         </p:nvPicPr>
@@ -13885,7 +13942,7 @@
       </p:pic>
       <p:sp>
         <p:nvSpPr>
-          <p:cNvPr id="116" name="Google Shape;116;p21"/>
+          <p:cNvPr id="118" name="Google Shape;118;p21"/>
           <p:cNvSpPr txBox="1"/>
           <p:nvPr/>
         </p:nvSpPr>
@@ -13935,7 +13992,7 @@
       </p:sp>
       <p:pic>
         <p:nvPicPr>
-          <p:cNvPr id="117" name="Google Shape;117;p21"/>
+          <p:cNvPr id="119" name="Google Shape;119;p21"/>
           <p:cNvPicPr preferRelativeResize="0"/>
           <p:nvPr/>
         </p:nvPicPr>
